--- a/public/wedding-mentor-files/S7_Producao_Entrega.pptx
+++ b/public/wedding-mentor-files/S7_Producao_Entrega.pptx
@@ -2548,7 +2548,7 @@
     <p:bg>
       <p:bgPr>
         <a:solidFill>
-          <a:srgbClr val="0B1D33"/>
+          <a:srgbClr val="F8F6F3"/>
         </a:solidFill>
       </p:bgPr>
     </p:bg>
@@ -2566,60 +2566,40 @@
           <a:chExt cx="0" cy="0"/>
         </a:xfrm>
       </p:grpSpPr>
-      <p:sp>
-        <p:nvSpPr>
-          <p:cNvPr id="2" name="Shape 0"/>
-          <p:cNvSpPr/>
-          <p:nvPr/>
-        </p:nvSpPr>
-        <p:spPr>
-          <a:xfrm>
-            <a:off x="8046720" y="-1645920"/>
-            <a:ext cx="5943600" cy="5943600"/>
-          </a:xfrm>
-          <a:prstGeom prst="ellipse">
-            <a:avLst/>
-          </a:prstGeom>
-          <a:solidFill>
-            <a:srgbClr val="4A9EFF">
-              <a:alpha val="14000"/>
-            </a:srgbClr>
-          </a:solidFill>
-          <a:ln/>
-        </p:spPr>
-      </p:sp>
-      <p:sp>
-        <p:nvSpPr>
-          <p:cNvPr id="3" name="Shape 1"/>
-          <p:cNvSpPr/>
-          <p:nvPr/>
-        </p:nvSpPr>
-        <p:spPr>
-          <a:xfrm>
-            <a:off x="-1828800" y="4389120"/>
-            <a:ext cx="5029200" cy="5029200"/>
-          </a:xfrm>
-          <a:prstGeom prst="ellipse">
-            <a:avLst/>
-          </a:prstGeom>
-          <a:solidFill>
-            <a:srgbClr val="C9A961">
-              <a:alpha val="10000"/>
-            </a:srgbClr>
-          </a:solidFill>
-          <a:ln/>
-        </p:spPr>
-      </p:sp>
-      <p:sp>
-        <p:nvSpPr>
-          <p:cNvPr id="4" name="Text 2"/>
-          <p:cNvSpPr/>
-          <p:nvPr/>
-        </p:nvSpPr>
-        <p:spPr>
-          <a:xfrm>
-            <a:off x="640080" y="548640"/>
-            <a:ext cx="7315200" cy="365760"/>
+      <p:pic>
+        <p:nvPicPr>
+          <p:cNvPr id="2" name="Image 0" descr="preencoded.png">    </p:cNvPr>
+          <p:cNvPicPr>
+            <a:picLocks noChangeAspect="1"/>
+          </p:cNvPicPr>
+          <p:nvPr/>
+        </p:nvPicPr>
+        <p:blipFill>
+          <a:blip r:embed="rId1"/>
+          <a:stretch>
+            <a:fillRect/>
+          </a:stretch>
+        </p:blipFill>
+        <p:spPr>
+          <a:xfrm>
+            <a:off x="603504" y="457200"/>
+            <a:ext cx="1371600" cy="1415143"/>
+          </a:xfrm>
+          <a:prstGeom prst="rect">
+            <a:avLst/>
+          </a:prstGeom>
+        </p:spPr>
+      </p:pic>
+      <p:sp>
+        <p:nvSpPr>
+          <p:cNvPr id="3" name="Text 0"/>
+          <p:cNvSpPr/>
+          <p:nvPr/>
+        </p:nvSpPr>
+        <p:spPr>
+          <a:xfrm>
+            <a:off x="640080" y="2286000"/>
+            <a:ext cx="5486400" cy="457200"/>
           </a:xfrm>
           <a:prstGeom prst="rect">
             <a:avLst/>
@@ -2635,53 +2615,14 @@
               <a:buNone/>
             </a:pPr>
             <a:r>
-              <a:rPr lang="en-US" sz="1300" b="1" spc="500" kern="0" dirty="0">
-                <a:solidFill>
-                  <a:srgbClr val="9FB2C9"/>
+              <a:rPr lang="en-US" sz="1500" b="1" spc="600" kern="0" dirty="0">
+                <a:solidFill>
+                  <a:srgbClr val="B1937E"/>
                 </a:solidFill>
                 <a:latin typeface="Calibri" pitchFamily="34" charset="0"/>
                 <a:ea typeface="Calibri" pitchFamily="34" charset="-122"/>
                 <a:cs typeface="Calibri" pitchFamily="34" charset="-120"/>
               </a:rPr>
-              <a:t>MENTORIA · RL</a:t>
-            </a:r>
-            <a:endParaRPr lang="en-US" sz="1300" dirty="0"/>
-          </a:p>
-        </p:txBody>
-      </p:sp>
-      <p:sp>
-        <p:nvSpPr>
-          <p:cNvPr id="5" name="Text 3"/>
-          <p:cNvSpPr/>
-          <p:nvPr/>
-        </p:nvSpPr>
-        <p:spPr>
-          <a:xfrm>
-            <a:off x="640080" y="2286000"/>
-            <a:ext cx="5486400" cy="457200"/>
-          </a:xfrm>
-          <a:prstGeom prst="rect">
-            <a:avLst/>
-          </a:prstGeom>
-          <a:noFill/>
-          <a:ln/>
-        </p:spPr>
-        <p:txBody>
-          <a:bodyPr wrap="square" lIns="0" tIns="0" rIns="0" bIns="0" rtlCol="0" anchor="ctr"/>
-          <a:lstStyle/>
-          <a:p>
-            <a:pPr indent="0" marL="0">
-              <a:buNone/>
-            </a:pPr>
-            <a:r>
-              <a:rPr lang="en-US" sz="1500" b="1" spc="600" kern="0" dirty="0">
-                <a:solidFill>
-                  <a:srgbClr val="C9A961"/>
-                </a:solidFill>
-                <a:latin typeface="Calibri" pitchFamily="34" charset="0"/>
-                <a:ea typeface="Calibri" pitchFamily="34" charset="-122"/>
-                <a:cs typeface="Calibri" pitchFamily="34" charset="-120"/>
-              </a:rPr>
               <a:t>SESSÃO 07</a:t>
             </a:r>
             <a:endParaRPr lang="en-US" sz="1500" dirty="0"/>
@@ -2690,7 +2631,7 @@
       </p:sp>
       <p:sp>
         <p:nvSpPr>
-          <p:cNvPr id="6" name="Text 4"/>
+          <p:cNvPr id="4" name="Text 1"/>
           <p:cNvSpPr/>
           <p:nvPr/>
         </p:nvSpPr>
@@ -2716,17 +2657,17 @@
               <a:buNone/>
             </a:pPr>
             <a:r>
-              <a:rPr lang="en-US" sz="5000" b="1" dirty="0">
-                <a:solidFill>
-                  <a:srgbClr val="EAF1FA"/>
-                </a:solidFill>
-                <a:latin typeface="Bookman Old Style" pitchFamily="34" charset="0"/>
-                <a:ea typeface="Bookman Old Style" pitchFamily="34" charset="-122"/>
-                <a:cs typeface="Bookman Old Style" pitchFamily="34" charset="-120"/>
+              <a:rPr lang="en-US" sz="4400" b="1" dirty="0">
+                <a:solidFill>
+                  <a:srgbClr val="33302B"/>
+                </a:solidFill>
+                <a:latin typeface="Georgia" pitchFamily="34" charset="0"/>
+                <a:ea typeface="Georgia" pitchFamily="34" charset="-122"/>
+                <a:cs typeface="Georgia" pitchFamily="34" charset="-120"/>
               </a:rPr>
               <a:t>Produção</a:t>
             </a:r>
-            <a:endParaRPr lang="en-US" sz="5000" dirty="0"/>
+            <a:endParaRPr lang="en-US" sz="4400" dirty="0"/>
           </a:p>
           <a:p>
             <a:pPr indent="0" marL="0">
@@ -2736,23 +2677,23 @@
               <a:buNone/>
             </a:pPr>
             <a:r>
-              <a:rPr lang="en-US" sz="5000" b="1" dirty="0">
-                <a:solidFill>
-                  <a:srgbClr val="EAF1FA"/>
-                </a:solidFill>
-                <a:latin typeface="Bookman Old Style" pitchFamily="34" charset="0"/>
-                <a:ea typeface="Bookman Old Style" pitchFamily="34" charset="-122"/>
-                <a:cs typeface="Bookman Old Style" pitchFamily="34" charset="-120"/>
+              <a:rPr lang="en-US" sz="4400" b="1" dirty="0">
+                <a:solidFill>
+                  <a:srgbClr val="33302B"/>
+                </a:solidFill>
+                <a:latin typeface="Georgia" pitchFamily="34" charset="0"/>
+                <a:ea typeface="Georgia" pitchFamily="34" charset="-122"/>
+                <a:cs typeface="Georgia" pitchFamily="34" charset="-120"/>
               </a:rPr>
               <a:t>e Entrega</a:t>
             </a:r>
-            <a:endParaRPr lang="en-US" sz="5000" dirty="0"/>
-          </a:p>
-        </p:txBody>
-      </p:sp>
-      <p:sp>
-        <p:nvSpPr>
-          <p:cNvPr id="7" name="Text 5"/>
+            <a:endParaRPr lang="en-US" sz="4400" dirty="0"/>
+          </a:p>
+        </p:txBody>
+      </p:sp>
+      <p:sp>
+        <p:nvSpPr>
+          <p:cNvPr id="5" name="Text 2"/>
           <p:cNvSpPr/>
           <p:nvPr/>
         </p:nvSpPr>
@@ -2777,7 +2718,7 @@
             <a:r>
               <a:rPr lang="en-US" sz="1700" dirty="0">
                 <a:solidFill>
-                  <a:srgbClr val="9FB2C9"/>
+                  <a:srgbClr val="8A7E72"/>
                 </a:solidFill>
                 <a:latin typeface="Calibri" pitchFamily="34" charset="0"/>
                 <a:ea typeface="Calibri" pitchFamily="34" charset="-122"/>
@@ -2791,7 +2732,7 @@
       </p:sp>
       <p:sp>
         <p:nvSpPr>
-          <p:cNvPr id="8" name="Text 6"/>
+          <p:cNvPr id="6" name="Text 3"/>
           <p:cNvSpPr/>
           <p:nvPr/>
         </p:nvSpPr>
@@ -2816,11 +2757,11 @@
             <a:r>
               <a:rPr lang="en-US" sz="12000" b="1" dirty="0">
                 <a:solidFill>
-                  <a:srgbClr val="16314F"/>
-                </a:solidFill>
-                <a:latin typeface="Bookman Old Style" pitchFamily="34" charset="0"/>
-                <a:ea typeface="Bookman Old Style" pitchFamily="34" charset="-122"/>
-                <a:cs typeface="Bookman Old Style" pitchFamily="34" charset="-120"/>
+                  <a:srgbClr val="EADFD0"/>
+                </a:solidFill>
+                <a:latin typeface="Georgia" pitchFamily="34" charset="0"/>
+                <a:ea typeface="Georgia" pitchFamily="34" charset="-122"/>
+                <a:cs typeface="Georgia" pitchFamily="34" charset="-120"/>
               </a:rPr>
               <a:t>07</a:t>
             </a:r>
@@ -2830,7 +2771,7 @@
       </p:sp>
       <p:sp>
         <p:nvSpPr>
-          <p:cNvPr id="9" name="Shape 7"/>
+          <p:cNvPr id="7" name="Shape 4"/>
           <p:cNvSpPr/>
           <p:nvPr/>
         </p:nvSpPr>
@@ -2845,7 +2786,7 @@
           <a:noFill/>
           <a:ln w="31750">
             <a:solidFill>
-              <a:srgbClr val="C9A961"/>
+              <a:srgbClr val="B1937E"/>
             </a:solidFill>
             <a:prstDash val="solid"/>
           </a:ln>
@@ -2865,7 +2806,7 @@
     <p:bg>
       <p:bgPr>
         <a:solidFill>
-          <a:srgbClr val="0B1D33"/>
+          <a:srgbClr val="F8F6F3"/>
         </a:solidFill>
       </p:bgPr>
     </p:bg>
@@ -2885,51 +2826,7 @@
       </p:grpSpPr>
       <p:sp>
         <p:nvSpPr>
-          <p:cNvPr id="2" name="Shape 0"/>
-          <p:cNvSpPr/>
-          <p:nvPr/>
-        </p:nvSpPr>
-        <p:spPr>
-          <a:xfrm>
-            <a:off x="7772400" y="-1371600"/>
-            <a:ext cx="5486400" cy="5486400"/>
-          </a:xfrm>
-          <a:prstGeom prst="ellipse">
-            <a:avLst/>
-          </a:prstGeom>
-          <a:solidFill>
-            <a:srgbClr val="4A9EFF">
-              <a:alpha val="10000"/>
-            </a:srgbClr>
-          </a:solidFill>
-          <a:ln/>
-        </p:spPr>
-      </p:sp>
-      <p:sp>
-        <p:nvSpPr>
-          <p:cNvPr id="3" name="Shape 1"/>
-          <p:cNvSpPr/>
-          <p:nvPr/>
-        </p:nvSpPr>
-        <p:spPr>
-          <a:xfrm>
-            <a:off x="-1371600" y="4114800"/>
-            <a:ext cx="4572000" cy="4572000"/>
-          </a:xfrm>
-          <a:prstGeom prst="ellipse">
-            <a:avLst/>
-          </a:prstGeom>
-          <a:solidFill>
-            <a:srgbClr val="C9A961">
-              <a:alpha val="8000"/>
-            </a:srgbClr>
-          </a:solidFill>
-          <a:ln/>
-        </p:spPr>
-      </p:sp>
-      <p:sp>
-        <p:nvSpPr>
-          <p:cNvPr id="4" name="Text 2"/>
+          <p:cNvPr id="2" name="Text 0"/>
           <p:cNvSpPr/>
           <p:nvPr/>
         </p:nvSpPr>
@@ -2954,11 +2851,11 @@
             <a:r>
               <a:rPr lang="en-US" sz="15000" b="1" dirty="0">
                 <a:solidFill>
-                  <a:srgbClr val="16314F"/>
-                </a:solidFill>
-                <a:latin typeface="Bookman Old Style" pitchFamily="34" charset="0"/>
-                <a:ea typeface="Bookman Old Style" pitchFamily="34" charset="-122"/>
-                <a:cs typeface="Bookman Old Style" pitchFamily="34" charset="-120"/>
+                  <a:srgbClr val="EADFD0"/>
+                </a:solidFill>
+                <a:latin typeface="Georgia" pitchFamily="34" charset="0"/>
+                <a:ea typeface="Georgia" pitchFamily="34" charset="-122"/>
+                <a:cs typeface="Georgia" pitchFamily="34" charset="-120"/>
               </a:rPr>
               <a:t>B</a:t>
             </a:r>
@@ -2968,7 +2865,7 @@
       </p:sp>
       <p:sp>
         <p:nvSpPr>
-          <p:cNvPr id="5" name="Text 3"/>
+          <p:cNvPr id="3" name="Text 1"/>
           <p:cNvSpPr/>
           <p:nvPr/>
         </p:nvSpPr>
@@ -2993,7 +2890,7 @@
             <a:r>
               <a:rPr lang="en-US" sz="1300" b="1" spc="400" kern="0" dirty="0">
                 <a:solidFill>
-                  <a:srgbClr val="C9A961"/>
+                  <a:srgbClr val="B1937E"/>
                 </a:solidFill>
                 <a:latin typeface="Calibri" pitchFamily="34" charset="0"/>
                 <a:ea typeface="Calibri" pitchFamily="34" charset="-122"/>
@@ -3007,7 +2904,7 @@
       </p:sp>
       <p:sp>
         <p:nvSpPr>
-          <p:cNvPr id="6" name="Text 4"/>
+          <p:cNvPr id="4" name="Text 2"/>
           <p:cNvSpPr/>
           <p:nvPr/>
         </p:nvSpPr>
@@ -3033,23 +2930,23 @@
               <a:buNone/>
             </a:pPr>
             <a:r>
-              <a:rPr lang="en-US" sz="4400" b="1" dirty="0">
-                <a:solidFill>
-                  <a:srgbClr val="EAF1FA"/>
-                </a:solidFill>
-                <a:latin typeface="Bookman Old Style" pitchFamily="34" charset="0"/>
-                <a:ea typeface="Bookman Old Style" pitchFamily="34" charset="-122"/>
-                <a:cs typeface="Bookman Old Style" pitchFamily="34" charset="-120"/>
+              <a:rPr lang="en-US" sz="4000" b="1" dirty="0">
+                <a:solidFill>
+                  <a:srgbClr val="33302B"/>
+                </a:solidFill>
+                <a:latin typeface="Georgia" pitchFamily="34" charset="0"/>
+                <a:ea typeface="Georgia" pitchFamily="34" charset="-122"/>
+                <a:cs typeface="Georgia" pitchFamily="34" charset="-120"/>
               </a:rPr>
               <a:t>A Entrega que Marca</a:t>
             </a:r>
-            <a:endParaRPr lang="en-US" sz="4400" dirty="0"/>
-          </a:p>
-        </p:txBody>
-      </p:sp>
-      <p:sp>
-        <p:nvSpPr>
-          <p:cNvPr id="7" name="Text 5"/>
+            <a:endParaRPr lang="en-US" sz="4000" dirty="0"/>
+          </a:p>
+        </p:txBody>
+      </p:sp>
+      <p:sp>
+        <p:nvSpPr>
+          <p:cNvPr id="5" name="Text 3"/>
           <p:cNvSpPr/>
           <p:nvPr/>
         </p:nvSpPr>
@@ -3074,7 +2971,7 @@
             <a:r>
               <a:rPr lang="en-US" sz="1600" dirty="0">
                 <a:solidFill>
-                  <a:srgbClr val="9FB2C9"/>
+                  <a:srgbClr val="8A7E72"/>
                 </a:solidFill>
                 <a:latin typeface="Calibri" pitchFamily="34" charset="0"/>
                 <a:ea typeface="Calibri" pitchFamily="34" charset="-122"/>
@@ -3088,7 +2985,7 @@
       </p:sp>
       <p:sp>
         <p:nvSpPr>
-          <p:cNvPr id="8" name="Shape 6"/>
+          <p:cNvPr id="6" name="Shape 4"/>
           <p:cNvSpPr/>
           <p:nvPr/>
         </p:nvSpPr>
@@ -3103,7 +3000,7 @@
           <a:noFill/>
           <a:ln w="9525">
             <a:solidFill>
-              <a:srgbClr val="5C708A">
+              <a:srgbClr val="A89A86">
                 <a:alpha val="60000"/>
               </a:srgbClr>
             </a:solidFill>
@@ -3113,7 +3010,7 @@
       </p:sp>
       <p:sp>
         <p:nvSpPr>
-          <p:cNvPr id="9" name="Text 7"/>
+          <p:cNvPr id="7" name="Text 5"/>
           <p:cNvSpPr/>
           <p:nvPr/>
         </p:nvSpPr>
@@ -3138,7 +3035,7 @@
             <a:r>
               <a:rPr lang="en-US" sz="900" dirty="0">
                 <a:solidFill>
-                  <a:srgbClr val="5C708A"/>
+                  <a:srgbClr val="A89A86"/>
                 </a:solidFill>
                 <a:latin typeface="Calibri" pitchFamily="34" charset="0"/>
                 <a:ea typeface="Calibri" pitchFamily="34" charset="-122"/>
@@ -3152,7 +3049,7 @@
       </p:sp>
       <p:sp>
         <p:nvSpPr>
-          <p:cNvPr id="10" name="Text 8"/>
+          <p:cNvPr id="8" name="Text 6"/>
           <p:cNvSpPr/>
           <p:nvPr/>
         </p:nvSpPr>
@@ -3177,7 +3074,7 @@
             <a:r>
               <a:rPr lang="en-US" sz="900" dirty="0">
                 <a:solidFill>
-                  <a:srgbClr val="5C708A"/>
+                  <a:srgbClr val="A89A86"/>
                 </a:solidFill>
                 <a:latin typeface="Calibri" pitchFamily="34" charset="0"/>
                 <a:ea typeface="Calibri" pitchFamily="34" charset="-122"/>
@@ -3203,7 +3100,7 @@
     <p:bg>
       <p:bgPr>
         <a:solidFill>
-          <a:srgbClr val="0B1D33"/>
+          <a:srgbClr val="F8F6F3"/>
         </a:solidFill>
       </p:bgPr>
     </p:bg>
@@ -3248,7 +3145,7 @@
             <a:r>
               <a:rPr lang="en-US" sz="1200" b="1" spc="300" kern="0" dirty="0">
                 <a:solidFill>
-                  <a:srgbClr val="4A9EFF"/>
+                  <a:srgbClr val="9A7B66"/>
                 </a:solidFill>
                 <a:latin typeface="Calibri" pitchFamily="34" charset="0"/>
                 <a:ea typeface="Calibri" pitchFamily="34" charset="-122"/>
@@ -3290,11 +3187,11 @@
             <a:r>
               <a:rPr lang="en-US" sz="3200" b="1" dirty="0">
                 <a:solidFill>
-                  <a:srgbClr val="EAF1FA"/>
-                </a:solidFill>
-                <a:latin typeface="Bookman Old Style" pitchFamily="34" charset="0"/>
-                <a:ea typeface="Bookman Old Style" pitchFamily="34" charset="-122"/>
-                <a:cs typeface="Bookman Old Style" pitchFamily="34" charset="-120"/>
+                  <a:srgbClr val="33302B"/>
+                </a:solidFill>
+                <a:latin typeface="Georgia" pitchFamily="34" charset="0"/>
+                <a:ea typeface="Georgia" pitchFamily="34" charset="-122"/>
+                <a:cs typeface="Georgia" pitchFamily="34" charset="-120"/>
               </a:rPr>
               <a:t>Same Day Edit &amp; Relive Wedding</a:t>
             </a:r>
@@ -3319,13 +3216,18 @@
             </a:avLst>
           </a:prstGeom>
           <a:solidFill>
-            <a:srgbClr val="13283F"/>
+            <a:srgbClr val="FFFFFF"/>
           </a:solidFill>
-          <a:ln/>
+          <a:ln w="12700">
+            <a:solidFill>
+              <a:srgbClr val="E3D9CC"/>
+            </a:solidFill>
+            <a:prstDash val="solid"/>
+          </a:ln>
           <a:effectLst>
-            <a:outerShdw sx="100000" sy="100000" kx="0" ky="0" algn="bl" rotWithShape="0" blurRad="127000" dist="38100" dir="5400000">
-              <a:srgbClr val="000000">
-                <a:alpha val="28000"/>
+            <a:outerShdw sx="100000" sy="100000" kx="0" ky="0" algn="bl" rotWithShape="0" blurRad="114300" dist="38100" dir="5400000">
+              <a:srgbClr val="7A6A55">
+                <a:alpha val="12000"/>
               </a:srgbClr>
             </a:outerShdw>
           </a:effectLst>
@@ -3346,9 +3248,14 @@
             <a:avLst/>
           </a:prstGeom>
           <a:solidFill>
-            <a:srgbClr val="16314F"/>
+            <a:srgbClr val="EADFD0"/>
           </a:solidFill>
-          <a:ln/>
+          <a:ln w="9525">
+            <a:solidFill>
+              <a:srgbClr val="E3D9CC"/>
+            </a:solidFill>
+            <a:prstDash val="solid"/>
+          </a:ln>
         </p:spPr>
       </p:sp>
       <p:pic>
@@ -3402,11 +3309,11 @@
             <a:r>
               <a:rPr lang="en-US" sz="1800" b="1" dirty="0">
                 <a:solidFill>
-                  <a:srgbClr val="C9A961"/>
-                </a:solidFill>
-                <a:latin typeface="Bookman Old Style" pitchFamily="34" charset="0"/>
-                <a:ea typeface="Bookman Old Style" pitchFamily="34" charset="-122"/>
-                <a:cs typeface="Bookman Old Style" pitchFamily="34" charset="-120"/>
+                  <a:srgbClr val="B1937E"/>
+                </a:solidFill>
+                <a:latin typeface="Georgia" pitchFamily="34" charset="0"/>
+                <a:ea typeface="Georgia" pitchFamily="34" charset="-122"/>
+                <a:cs typeface="Georgia" pitchFamily="34" charset="-120"/>
               </a:rPr>
               <a:t>Same day edit</a:t>
             </a:r>
@@ -3441,7 +3348,7 @@
             <a:r>
               <a:rPr lang="en-US" sz="1350" dirty="0">
                 <a:solidFill>
-                  <a:srgbClr val="9FB2C9"/>
+                  <a:srgbClr val="8A7E72"/>
                 </a:solidFill>
                 <a:latin typeface="Calibri" pitchFamily="34" charset="0"/>
                 <a:ea typeface="Calibri" pitchFamily="34" charset="-122"/>
@@ -3470,13 +3377,18 @@
             </a:avLst>
           </a:prstGeom>
           <a:solidFill>
-            <a:srgbClr val="13283F"/>
+            <a:srgbClr val="FFFFFF"/>
           </a:solidFill>
-          <a:ln/>
+          <a:ln w="12700">
+            <a:solidFill>
+              <a:srgbClr val="E3D9CC"/>
+            </a:solidFill>
+            <a:prstDash val="solid"/>
+          </a:ln>
           <a:effectLst>
-            <a:outerShdw sx="100000" sy="100000" kx="0" ky="0" algn="bl" rotWithShape="0" blurRad="127000" dist="38100" dir="5400000">
-              <a:srgbClr val="000000">
-                <a:alpha val="28000"/>
+            <a:outerShdw sx="100000" sy="100000" kx="0" ky="0" algn="bl" rotWithShape="0" blurRad="114300" dist="38100" dir="5400000">
+              <a:srgbClr val="7A6A55">
+                <a:alpha val="12000"/>
               </a:srgbClr>
             </a:outerShdw>
           </a:effectLst>
@@ -3497,9 +3409,14 @@
             <a:avLst/>
           </a:prstGeom>
           <a:solidFill>
-            <a:srgbClr val="16314F"/>
+            <a:srgbClr val="EADFD0"/>
           </a:solidFill>
-          <a:ln/>
+          <a:ln w="9525">
+            <a:solidFill>
+              <a:srgbClr val="E3D9CC"/>
+            </a:solidFill>
+            <a:prstDash val="solid"/>
+          </a:ln>
         </p:spPr>
       </p:sp>
       <p:pic>
@@ -3553,11 +3470,11 @@
             <a:r>
               <a:rPr lang="en-US" sz="1800" b="1" dirty="0">
                 <a:solidFill>
-                  <a:srgbClr val="C9A961"/>
-                </a:solidFill>
-                <a:latin typeface="Bookman Old Style" pitchFamily="34" charset="0"/>
-                <a:ea typeface="Bookman Old Style" pitchFamily="34" charset="-122"/>
-                <a:cs typeface="Bookman Old Style" pitchFamily="34" charset="-120"/>
+                  <a:srgbClr val="B1937E"/>
+                </a:solidFill>
+                <a:latin typeface="Georgia" pitchFamily="34" charset="0"/>
+                <a:ea typeface="Georgia" pitchFamily="34" charset="-122"/>
+                <a:cs typeface="Georgia" pitchFamily="34" charset="-120"/>
               </a:rPr>
               <a:t>Relive Wedding</a:t>
             </a:r>
@@ -3592,7 +3509,7 @@
             <a:r>
               <a:rPr lang="en-US" sz="1350" dirty="0">
                 <a:solidFill>
-                  <a:srgbClr val="9FB2C9"/>
+                  <a:srgbClr val="8A7E72"/>
                 </a:solidFill>
                 <a:latin typeface="Calibri" pitchFamily="34" charset="0"/>
                 <a:ea typeface="Calibri" pitchFamily="34" charset="-122"/>
@@ -3621,13 +3538,18 @@
             </a:avLst>
           </a:prstGeom>
           <a:solidFill>
-            <a:srgbClr val="13283F"/>
+            <a:srgbClr val="FFFFFF"/>
           </a:solidFill>
-          <a:ln/>
+          <a:ln w="12700">
+            <a:solidFill>
+              <a:srgbClr val="E3D9CC"/>
+            </a:solidFill>
+            <a:prstDash val="solid"/>
+          </a:ln>
           <a:effectLst>
-            <a:outerShdw sx="100000" sy="100000" kx="0" ky="0" algn="bl" rotWithShape="0" blurRad="127000" dist="38100" dir="5400000">
-              <a:srgbClr val="000000">
-                <a:alpha val="28000"/>
+            <a:outerShdw sx="100000" sy="100000" kx="0" ky="0" algn="bl" rotWithShape="0" blurRad="114300" dist="38100" dir="5400000">
+              <a:srgbClr val="7A6A55">
+                <a:alpha val="12000"/>
               </a:srgbClr>
             </a:outerShdw>
           </a:effectLst>
@@ -3648,9 +3570,14 @@
             <a:avLst/>
           </a:prstGeom>
           <a:solidFill>
-            <a:srgbClr val="16314F"/>
+            <a:srgbClr val="EADFD0"/>
           </a:solidFill>
-          <a:ln/>
+          <a:ln w="9525">
+            <a:solidFill>
+              <a:srgbClr val="E3D9CC"/>
+            </a:solidFill>
+            <a:prstDash val="solid"/>
+          </a:ln>
         </p:spPr>
       </p:sp>
       <p:pic>
@@ -3704,11 +3631,11 @@
             <a:r>
               <a:rPr lang="en-US" sz="1800" b="1" dirty="0">
                 <a:solidFill>
-                  <a:srgbClr val="C9A961"/>
-                </a:solidFill>
-                <a:latin typeface="Bookman Old Style" pitchFamily="34" charset="0"/>
-                <a:ea typeface="Bookman Old Style" pitchFamily="34" charset="-122"/>
-                <a:cs typeface="Bookman Old Style" pitchFamily="34" charset="-120"/>
+                  <a:srgbClr val="B1937E"/>
+                </a:solidFill>
+                <a:latin typeface="Georgia" pitchFamily="34" charset="0"/>
+                <a:ea typeface="Georgia" pitchFamily="34" charset="-122"/>
+                <a:cs typeface="Georgia" pitchFamily="34" charset="-120"/>
               </a:rPr>
               <a:t>Geradores de conteúdo</a:t>
             </a:r>
@@ -3743,7 +3670,7 @@
             <a:r>
               <a:rPr lang="en-US" sz="1350" dirty="0">
                 <a:solidFill>
-                  <a:srgbClr val="9FB2C9"/>
+                  <a:srgbClr val="8A7E72"/>
                 </a:solidFill>
                 <a:latin typeface="Calibri" pitchFamily="34" charset="0"/>
                 <a:ea typeface="Calibri" pitchFamily="34" charset="-122"/>
@@ -3772,13 +3699,18 @@
             </a:avLst>
           </a:prstGeom>
           <a:solidFill>
-            <a:srgbClr val="13283F"/>
+            <a:srgbClr val="FFFFFF"/>
           </a:solidFill>
-          <a:ln/>
+          <a:ln w="12700">
+            <a:solidFill>
+              <a:srgbClr val="E3D9CC"/>
+            </a:solidFill>
+            <a:prstDash val="solid"/>
+          </a:ln>
           <a:effectLst>
-            <a:outerShdw sx="100000" sy="100000" kx="0" ky="0" algn="bl" rotWithShape="0" blurRad="127000" dist="38100" dir="5400000">
-              <a:srgbClr val="000000">
-                <a:alpha val="28000"/>
+            <a:outerShdw sx="100000" sy="100000" kx="0" ky="0" algn="bl" rotWithShape="0" blurRad="114300" dist="38100" dir="5400000">
+              <a:srgbClr val="7A6A55">
+                <a:alpha val="12000"/>
               </a:srgbClr>
             </a:outerShdw>
           </a:effectLst>
@@ -3799,9 +3731,14 @@
             <a:avLst/>
           </a:prstGeom>
           <a:solidFill>
-            <a:srgbClr val="16314F"/>
+            <a:srgbClr val="EADFD0"/>
           </a:solidFill>
-          <a:ln/>
+          <a:ln w="9525">
+            <a:solidFill>
+              <a:srgbClr val="E3D9CC"/>
+            </a:solidFill>
+            <a:prstDash val="solid"/>
+          </a:ln>
         </p:spPr>
       </p:sp>
       <p:pic>
@@ -3855,11 +3792,11 @@
             <a:r>
               <a:rPr lang="en-US" sz="1800" b="1" dirty="0">
                 <a:solidFill>
-                  <a:srgbClr val="C9A961"/>
-                </a:solidFill>
-                <a:latin typeface="Bookman Old Style" pitchFamily="34" charset="0"/>
-                <a:ea typeface="Bookman Old Style" pitchFamily="34" charset="-122"/>
-                <a:cs typeface="Bookman Old Style" pitchFamily="34" charset="-120"/>
+                  <a:srgbClr val="B1937E"/>
+                </a:solidFill>
+                <a:latin typeface="Georgia" pitchFamily="34" charset="0"/>
+                <a:ea typeface="Georgia" pitchFamily="34" charset="-122"/>
+                <a:cs typeface="Georgia" pitchFamily="34" charset="-120"/>
               </a:rPr>
               <a:t>Justificam o premium</a:t>
             </a:r>
@@ -3894,7 +3831,7 @@
             <a:r>
               <a:rPr lang="en-US" sz="1350" dirty="0">
                 <a:solidFill>
-                  <a:srgbClr val="9FB2C9"/>
+                  <a:srgbClr val="8A7E72"/>
                 </a:solidFill>
                 <a:latin typeface="Calibri" pitchFamily="34" charset="0"/>
                 <a:ea typeface="Calibri" pitchFamily="34" charset="-122"/>
@@ -3923,7 +3860,7 @@
           <a:noFill/>
           <a:ln w="9525">
             <a:solidFill>
-              <a:srgbClr val="5C708A">
+              <a:srgbClr val="A89A86">
                 <a:alpha val="60000"/>
               </a:srgbClr>
             </a:solidFill>
@@ -3958,7 +3895,7 @@
             <a:r>
               <a:rPr lang="en-US" sz="900" dirty="0">
                 <a:solidFill>
-                  <a:srgbClr val="5C708A"/>
+                  <a:srgbClr val="A89A86"/>
                 </a:solidFill>
                 <a:latin typeface="Calibri" pitchFamily="34" charset="0"/>
                 <a:ea typeface="Calibri" pitchFamily="34" charset="-122"/>
@@ -3997,7 +3934,7 @@
             <a:r>
               <a:rPr lang="en-US" sz="900" dirty="0">
                 <a:solidFill>
-                  <a:srgbClr val="5C708A"/>
+                  <a:srgbClr val="A89A86"/>
                 </a:solidFill>
                 <a:latin typeface="Calibri" pitchFamily="34" charset="0"/>
                 <a:ea typeface="Calibri" pitchFamily="34" charset="-122"/>
@@ -4023,7 +3960,7 @@
     <p:bg>
       <p:bgPr>
         <a:solidFill>
-          <a:srgbClr val="0B1D33"/>
+          <a:srgbClr val="F8F6F3"/>
         </a:solidFill>
       </p:bgPr>
     </p:bg>
@@ -4043,51 +3980,7 @@
       </p:grpSpPr>
       <p:sp>
         <p:nvSpPr>
-          <p:cNvPr id="2" name="Shape 0"/>
-          <p:cNvSpPr/>
-          <p:nvPr/>
-        </p:nvSpPr>
-        <p:spPr>
-          <a:xfrm>
-            <a:off x="8229600" y="-1463040"/>
-            <a:ext cx="5486400" cy="5486400"/>
-          </a:xfrm>
-          <a:prstGeom prst="ellipse">
-            <a:avLst/>
-          </a:prstGeom>
-          <a:solidFill>
-            <a:srgbClr val="4A9EFF">
-              <a:alpha val="10000"/>
-            </a:srgbClr>
-          </a:solidFill>
-          <a:ln/>
-        </p:spPr>
-      </p:sp>
-      <p:sp>
-        <p:nvSpPr>
-          <p:cNvPr id="3" name="Shape 1"/>
-          <p:cNvSpPr/>
-          <p:nvPr/>
-        </p:nvSpPr>
-        <p:spPr>
-          <a:xfrm>
-            <a:off x="-1463040" y="4206240"/>
-            <a:ext cx="4572000" cy="4572000"/>
-          </a:xfrm>
-          <a:prstGeom prst="ellipse">
-            <a:avLst/>
-          </a:prstGeom>
-          <a:solidFill>
-            <a:srgbClr val="C9A961">
-              <a:alpha val="8000"/>
-            </a:srgbClr>
-          </a:solidFill>
-          <a:ln/>
-        </p:spPr>
-      </p:sp>
-      <p:sp>
-        <p:nvSpPr>
-          <p:cNvPr id="4" name="Text 2"/>
+          <p:cNvPr id="2" name="Text 0"/>
           <p:cNvSpPr/>
           <p:nvPr/>
         </p:nvSpPr>
@@ -4112,7 +4005,7 @@
             <a:r>
               <a:rPr lang="en-US" sz="1200" b="1" spc="300" kern="0" dirty="0">
                 <a:solidFill>
-                  <a:srgbClr val="4A9EFF"/>
+                  <a:srgbClr val="9A7B66"/>
                 </a:solidFill>
                 <a:latin typeface="Calibri" pitchFamily="34" charset="0"/>
                 <a:ea typeface="Calibri" pitchFamily="34" charset="-122"/>
@@ -4126,7 +4019,7 @@
       </p:sp>
       <p:sp>
         <p:nvSpPr>
-          <p:cNvPr id="5" name="Shape 3"/>
+          <p:cNvPr id="3" name="Shape 1"/>
           <p:cNvSpPr/>
           <p:nvPr/>
         </p:nvSpPr>
@@ -4139,14 +4032,19 @@
             <a:avLst/>
           </a:prstGeom>
           <a:solidFill>
-            <a:srgbClr val="16314F"/>
+            <a:srgbClr val="EADFD0"/>
           </a:solidFill>
-          <a:ln/>
+          <a:ln w="9525">
+            <a:solidFill>
+              <a:srgbClr val="E3D9CC"/>
+            </a:solidFill>
+            <a:prstDash val="solid"/>
+          </a:ln>
         </p:spPr>
       </p:sp>
       <p:pic>
         <p:nvPicPr>
-          <p:cNvPr id="6" name="Image 0" descr="preencoded.png">    </p:cNvPr>
+          <p:cNvPr id="4" name="Image 0" descr="preencoded.png">    </p:cNvPr>
           <p:cNvPicPr>
             <a:picLocks noChangeAspect="1"/>
           </p:cNvPicPr>
@@ -4170,7 +4068,7 @@
       </p:pic>
       <p:sp>
         <p:nvSpPr>
-          <p:cNvPr id="7" name="Text 4"/>
+          <p:cNvPr id="5" name="Text 2"/>
           <p:cNvSpPr/>
           <p:nvPr/>
         </p:nvSpPr>
@@ -4198,11 +4096,11 @@
             <a:r>
               <a:rPr lang="en-US" sz="2800" b="1" i="1" dirty="0">
                 <a:solidFill>
-                  <a:srgbClr val="EAF1FA"/>
-                </a:solidFill>
-                <a:latin typeface="Bookman Old Style" pitchFamily="34" charset="0"/>
-                <a:ea typeface="Bookman Old Style" pitchFamily="34" charset="-122"/>
-                <a:cs typeface="Bookman Old Style" pitchFamily="34" charset="-120"/>
+                  <a:srgbClr val="33302B"/>
+                </a:solidFill>
+                <a:latin typeface="Georgia" pitchFamily="34" charset="0"/>
+                <a:ea typeface="Georgia" pitchFamily="34" charset="-122"/>
+                <a:cs typeface="Georgia" pitchFamily="34" charset="-120"/>
               </a:rPr>
               <a:t>Como entregas transforma um download de ficheiros num momento que nunca esquecem.</a:t>
             </a:r>
@@ -4212,7 +4110,7 @@
       </p:sp>
       <p:sp>
         <p:nvSpPr>
-          <p:cNvPr id="8" name="Text 5"/>
+          <p:cNvPr id="6" name="Text 3"/>
           <p:cNvSpPr/>
           <p:nvPr/>
         </p:nvSpPr>
@@ -4237,7 +4135,7 @@
             <a:r>
               <a:rPr lang="en-US" sz="1600" dirty="0">
                 <a:solidFill>
-                  <a:srgbClr val="9FB2C9"/>
+                  <a:srgbClr val="8A7E72"/>
                 </a:solidFill>
                 <a:latin typeface="Calibri" pitchFamily="34" charset="0"/>
                 <a:ea typeface="Calibri" pitchFamily="34" charset="-122"/>
@@ -4251,7 +4149,7 @@
       </p:sp>
       <p:sp>
         <p:nvSpPr>
-          <p:cNvPr id="9" name="Shape 6"/>
+          <p:cNvPr id="7" name="Shape 4"/>
           <p:cNvSpPr/>
           <p:nvPr/>
         </p:nvSpPr>
@@ -4266,7 +4164,7 @@
           <a:noFill/>
           <a:ln w="9525">
             <a:solidFill>
-              <a:srgbClr val="5C708A">
+              <a:srgbClr val="A89A86">
                 <a:alpha val="60000"/>
               </a:srgbClr>
             </a:solidFill>
@@ -4276,7 +4174,7 @@
       </p:sp>
       <p:sp>
         <p:nvSpPr>
-          <p:cNvPr id="10" name="Text 7"/>
+          <p:cNvPr id="8" name="Text 5"/>
           <p:cNvSpPr/>
           <p:nvPr/>
         </p:nvSpPr>
@@ -4301,7 +4199,7 @@
             <a:r>
               <a:rPr lang="en-US" sz="900" dirty="0">
                 <a:solidFill>
-                  <a:srgbClr val="5C708A"/>
+                  <a:srgbClr val="A89A86"/>
                 </a:solidFill>
                 <a:latin typeface="Calibri" pitchFamily="34" charset="0"/>
                 <a:ea typeface="Calibri" pitchFamily="34" charset="-122"/>
@@ -4315,7 +4213,7 @@
       </p:sp>
       <p:sp>
         <p:nvSpPr>
-          <p:cNvPr id="11" name="Text 8"/>
+          <p:cNvPr id="9" name="Text 6"/>
           <p:cNvSpPr/>
           <p:nvPr/>
         </p:nvSpPr>
@@ -4340,7 +4238,7 @@
             <a:r>
               <a:rPr lang="en-US" sz="900" dirty="0">
                 <a:solidFill>
-                  <a:srgbClr val="5C708A"/>
+                  <a:srgbClr val="A89A86"/>
                 </a:solidFill>
                 <a:latin typeface="Calibri" pitchFamily="34" charset="0"/>
                 <a:ea typeface="Calibri" pitchFamily="34" charset="-122"/>
@@ -4366,7 +4264,7 @@
     <p:bg>
       <p:bgPr>
         <a:solidFill>
-          <a:srgbClr val="0B1D33"/>
+          <a:srgbClr val="F8F6F3"/>
         </a:solidFill>
       </p:bgPr>
     </p:bg>
@@ -4411,7 +4309,7 @@
             <a:r>
               <a:rPr lang="en-US" sz="1200" b="1" spc="300" kern="0" dirty="0">
                 <a:solidFill>
-                  <a:srgbClr val="4A9EFF"/>
+                  <a:srgbClr val="9A7B66"/>
                 </a:solidFill>
                 <a:latin typeface="Calibri" pitchFamily="34" charset="0"/>
                 <a:ea typeface="Calibri" pitchFamily="34" charset="-122"/>
@@ -4453,11 +4351,11 @@
             <a:r>
               <a:rPr lang="en-US" sz="3200" b="1" dirty="0">
                 <a:solidFill>
-                  <a:srgbClr val="EAF1FA"/>
-                </a:solidFill>
-                <a:latin typeface="Bookman Old Style" pitchFamily="34" charset="0"/>
-                <a:ea typeface="Bookman Old Style" pitchFamily="34" charset="-122"/>
-                <a:cs typeface="Bookman Old Style" pitchFamily="34" charset="-120"/>
+                  <a:srgbClr val="33302B"/>
+                </a:solidFill>
+                <a:latin typeface="Georgia" pitchFamily="34" charset="0"/>
+                <a:ea typeface="Georgia" pitchFamily="34" charset="-122"/>
+                <a:cs typeface="Georgia" pitchFamily="34" charset="-120"/>
               </a:rPr>
               <a:t>O momento de revelação</a:t>
             </a:r>
@@ -4482,13 +4380,18 @@
             </a:avLst>
           </a:prstGeom>
           <a:solidFill>
-            <a:srgbClr val="13283F"/>
+            <a:srgbClr val="FFFFFF"/>
           </a:solidFill>
-          <a:ln/>
+          <a:ln w="12700">
+            <a:solidFill>
+              <a:srgbClr val="E3D9CC"/>
+            </a:solidFill>
+            <a:prstDash val="solid"/>
+          </a:ln>
           <a:effectLst>
-            <a:outerShdw sx="100000" sy="100000" kx="0" ky="0" algn="bl" rotWithShape="0" blurRad="127000" dist="38100" dir="5400000">
-              <a:srgbClr val="000000">
-                <a:alpha val="28000"/>
+            <a:outerShdw sx="100000" sy="100000" kx="0" ky="0" algn="bl" rotWithShape="0" blurRad="114300" dist="38100" dir="5400000">
+              <a:srgbClr val="7A6A55">
+                <a:alpha val="12000"/>
               </a:srgbClr>
             </a:outerShdw>
           </a:effectLst>
@@ -4509,9 +4412,14 @@
             <a:avLst/>
           </a:prstGeom>
           <a:solidFill>
-            <a:srgbClr val="16314F"/>
+            <a:srgbClr val="EADFD0"/>
           </a:solidFill>
-          <a:ln/>
+          <a:ln w="9525">
+            <a:solidFill>
+              <a:srgbClr val="E3D9CC"/>
+            </a:solidFill>
+            <a:prstDash val="solid"/>
+          </a:ln>
         </p:spPr>
       </p:sp>
       <p:pic>
@@ -4565,11 +4473,11 @@
             <a:r>
               <a:rPr lang="en-US" sz="1900" b="1" dirty="0">
                 <a:solidFill>
-                  <a:srgbClr val="C9A961"/>
-                </a:solidFill>
-                <a:latin typeface="Bookman Old Style" pitchFamily="34" charset="0"/>
-                <a:ea typeface="Bookman Old Style" pitchFamily="34" charset="-122"/>
-                <a:cs typeface="Bookman Old Style" pitchFamily="34" charset="-120"/>
+                  <a:srgbClr val="B1937E"/>
+                </a:solidFill>
+                <a:latin typeface="Georgia" pitchFamily="34" charset="0"/>
+                <a:ea typeface="Georgia" pitchFamily="34" charset="-122"/>
+                <a:cs typeface="Georgia" pitchFamily="34" charset="-120"/>
               </a:rPr>
               <a:t>Sessão de visualização</a:t>
             </a:r>
@@ -4604,7 +4512,7 @@
             <a:r>
               <a:rPr lang="en-US" sz="1400" dirty="0">
                 <a:solidFill>
-                  <a:srgbClr val="9FB2C9"/>
+                  <a:srgbClr val="8A7E72"/>
                 </a:solidFill>
                 <a:latin typeface="Calibri" pitchFamily="34" charset="0"/>
                 <a:ea typeface="Calibri" pitchFamily="34" charset="-122"/>
@@ -4633,13 +4541,18 @@
             </a:avLst>
           </a:prstGeom>
           <a:solidFill>
-            <a:srgbClr val="13283F"/>
+            <a:srgbClr val="FFFFFF"/>
           </a:solidFill>
-          <a:ln/>
+          <a:ln w="12700">
+            <a:solidFill>
+              <a:srgbClr val="E3D9CC"/>
+            </a:solidFill>
+            <a:prstDash val="solid"/>
+          </a:ln>
           <a:effectLst>
-            <a:outerShdw sx="100000" sy="100000" kx="0" ky="0" algn="bl" rotWithShape="0" blurRad="127000" dist="38100" dir="5400000">
-              <a:srgbClr val="000000">
-                <a:alpha val="28000"/>
+            <a:outerShdw sx="100000" sy="100000" kx="0" ky="0" algn="bl" rotWithShape="0" blurRad="114300" dist="38100" dir="5400000">
+              <a:srgbClr val="7A6A55">
+                <a:alpha val="12000"/>
               </a:srgbClr>
             </a:outerShdw>
           </a:effectLst>
@@ -4660,9 +4573,14 @@
             <a:avLst/>
           </a:prstGeom>
           <a:solidFill>
-            <a:srgbClr val="16314F"/>
+            <a:srgbClr val="EADFD0"/>
           </a:solidFill>
-          <a:ln/>
+          <a:ln w="9525">
+            <a:solidFill>
+              <a:srgbClr val="E3D9CC"/>
+            </a:solidFill>
+            <a:prstDash val="solid"/>
+          </a:ln>
         </p:spPr>
       </p:sp>
       <p:pic>
@@ -4716,11 +4634,11 @@
             <a:r>
               <a:rPr lang="en-US" sz="1900" b="1" dirty="0">
                 <a:solidFill>
-                  <a:srgbClr val="C9A961"/>
-                </a:solidFill>
-                <a:latin typeface="Bookman Old Style" pitchFamily="34" charset="0"/>
-                <a:ea typeface="Bookman Old Style" pitchFamily="34" charset="-122"/>
-                <a:cs typeface="Bookman Old Style" pitchFamily="34" charset="-120"/>
+                  <a:srgbClr val="B1937E"/>
+                </a:solidFill>
+                <a:latin typeface="Georgia" pitchFamily="34" charset="0"/>
+                <a:ea typeface="Georgia" pitchFamily="34" charset="-122"/>
+                <a:cs typeface="Georgia" pitchFamily="34" charset="-120"/>
               </a:rPr>
               <a:t>Entrega física premium</a:t>
             </a:r>
@@ -4755,7 +4673,7 @@
             <a:r>
               <a:rPr lang="en-US" sz="1400" dirty="0">
                 <a:solidFill>
-                  <a:srgbClr val="9FB2C9"/>
+                  <a:srgbClr val="8A7E72"/>
                 </a:solidFill>
                 <a:latin typeface="Calibri" pitchFamily="34" charset="0"/>
                 <a:ea typeface="Calibri" pitchFamily="34" charset="-122"/>
@@ -4784,13 +4702,18 @@
             </a:avLst>
           </a:prstGeom>
           <a:solidFill>
-            <a:srgbClr val="13283F"/>
+            <a:srgbClr val="FFFFFF"/>
           </a:solidFill>
-          <a:ln/>
+          <a:ln w="12700">
+            <a:solidFill>
+              <a:srgbClr val="E3D9CC"/>
+            </a:solidFill>
+            <a:prstDash val="solid"/>
+          </a:ln>
           <a:effectLst>
-            <a:outerShdw sx="100000" sy="100000" kx="0" ky="0" algn="bl" rotWithShape="0" blurRad="127000" dist="38100" dir="5400000">
-              <a:srgbClr val="000000">
-                <a:alpha val="28000"/>
+            <a:outerShdw sx="100000" sy="100000" kx="0" ky="0" algn="bl" rotWithShape="0" blurRad="114300" dist="38100" dir="5400000">
+              <a:srgbClr val="7A6A55">
+                <a:alpha val="12000"/>
               </a:srgbClr>
             </a:outerShdw>
           </a:effectLst>
@@ -4811,9 +4734,14 @@
             <a:avLst/>
           </a:prstGeom>
           <a:solidFill>
-            <a:srgbClr val="16314F"/>
+            <a:srgbClr val="EADFD0"/>
           </a:solidFill>
-          <a:ln/>
+          <a:ln w="9525">
+            <a:solidFill>
+              <a:srgbClr val="E3D9CC"/>
+            </a:solidFill>
+            <a:prstDash val="solid"/>
+          </a:ln>
         </p:spPr>
       </p:sp>
       <p:pic>
@@ -4867,11 +4795,11 @@
             <a:r>
               <a:rPr lang="en-US" sz="1900" b="1" dirty="0">
                 <a:solidFill>
-                  <a:srgbClr val="C9A961"/>
-                </a:solidFill>
-                <a:latin typeface="Bookman Old Style" pitchFamily="34" charset="0"/>
-                <a:ea typeface="Bookman Old Style" pitchFamily="34" charset="-122"/>
-                <a:cs typeface="Bookman Old Style" pitchFamily="34" charset="-120"/>
+                  <a:srgbClr val="B1937E"/>
+                </a:solidFill>
+                <a:latin typeface="Georgia" pitchFamily="34" charset="0"/>
+                <a:ea typeface="Georgia" pitchFamily="34" charset="-122"/>
+                <a:cs typeface="Georgia" pitchFamily="34" charset="-120"/>
               </a:rPr>
               <a:t>Apresentação cuidada</a:t>
             </a:r>
@@ -4906,7 +4834,7 @@
             <a:r>
               <a:rPr lang="en-US" sz="1400" dirty="0">
                 <a:solidFill>
-                  <a:srgbClr val="9FB2C9"/>
+                  <a:srgbClr val="8A7E72"/>
                 </a:solidFill>
                 <a:latin typeface="Calibri" pitchFamily="34" charset="0"/>
                 <a:ea typeface="Calibri" pitchFamily="34" charset="-122"/>
@@ -4935,7 +4863,7 @@
           <a:noFill/>
           <a:ln w="9525">
             <a:solidFill>
-              <a:srgbClr val="5C708A">
+              <a:srgbClr val="A89A86">
                 <a:alpha val="60000"/>
               </a:srgbClr>
             </a:solidFill>
@@ -4970,7 +4898,7 @@
             <a:r>
               <a:rPr lang="en-US" sz="900" dirty="0">
                 <a:solidFill>
-                  <a:srgbClr val="5C708A"/>
+                  <a:srgbClr val="A89A86"/>
                 </a:solidFill>
                 <a:latin typeface="Calibri" pitchFamily="34" charset="0"/>
                 <a:ea typeface="Calibri" pitchFamily="34" charset="-122"/>
@@ -5009,7 +4937,7 @@
             <a:r>
               <a:rPr lang="en-US" sz="900" dirty="0">
                 <a:solidFill>
-                  <a:srgbClr val="5C708A"/>
+                  <a:srgbClr val="A89A86"/>
                 </a:solidFill>
                 <a:latin typeface="Calibri" pitchFamily="34" charset="0"/>
                 <a:ea typeface="Calibri" pitchFamily="34" charset="-122"/>
@@ -5035,7 +4963,7 @@
     <p:bg>
       <p:bgPr>
         <a:solidFill>
-          <a:srgbClr val="102844"/>
+          <a:srgbClr val="EFE7DE"/>
         </a:solidFill>
       </p:bgPr>
     </p:bg>
@@ -5080,7 +5008,7 @@
             <a:r>
               <a:rPr lang="en-US" sz="1200" b="1" spc="300" kern="0" dirty="0">
                 <a:solidFill>
-                  <a:srgbClr val="C9A961"/>
+                  <a:srgbClr val="B1937E"/>
                 </a:solidFill>
                 <a:latin typeface="Calibri" pitchFamily="34" charset="0"/>
                 <a:ea typeface="Calibri" pitchFamily="34" charset="-122"/>
@@ -5122,11 +5050,11 @@
             <a:r>
               <a:rPr lang="en-US" sz="3400" b="1" dirty="0">
                 <a:solidFill>
-                  <a:srgbClr val="EAF1FA"/>
-                </a:solidFill>
-                <a:latin typeface="Bookman Old Style" pitchFamily="34" charset="0"/>
-                <a:ea typeface="Bookman Old Style" pitchFamily="34" charset="-122"/>
-                <a:cs typeface="Bookman Old Style" pitchFamily="34" charset="-120"/>
+                  <a:srgbClr val="33302B"/>
+                </a:solidFill>
+                <a:latin typeface="Georgia" pitchFamily="34" charset="0"/>
+                <a:ea typeface="Georgia" pitchFamily="34" charset="-122"/>
+                <a:cs typeface="Georgia" pitchFamily="34" charset="-120"/>
               </a:rPr>
               <a:t>Entrega encenada vs. ficheiros</a:t>
             </a:r>
@@ -5151,20 +5079,20 @@
             </a:avLst>
           </a:prstGeom>
           <a:solidFill>
-            <a:srgbClr val="13283F"/>
+            <a:srgbClr val="FFFFFF"/>
           </a:solidFill>
           <a:ln w="9525">
             <a:solidFill>
-              <a:srgbClr val="9FB2C9">
+              <a:srgbClr val="8A7E72">
                 <a:alpha val="50000"/>
               </a:srgbClr>
             </a:solidFill>
             <a:prstDash val="solid"/>
           </a:ln>
           <a:effectLst>
-            <a:outerShdw sx="100000" sy="100000" kx="0" ky="0" algn="bl" rotWithShape="0" blurRad="127000" dist="38100" dir="5400000">
-              <a:srgbClr val="000000">
-                <a:alpha val="28000"/>
+            <a:outerShdw sx="100000" sy="100000" kx="0" ky="0" algn="bl" rotWithShape="0" blurRad="114300" dist="38100" dir="5400000">
+              <a:srgbClr val="7A6A55">
+                <a:alpha val="12000"/>
               </a:srgbClr>
             </a:outerShdw>
           </a:effectLst>
@@ -5197,7 +5125,7 @@
             <a:r>
               <a:rPr lang="en-US" sz="1300" b="1" spc="300" kern="0" dirty="0">
                 <a:solidFill>
-                  <a:srgbClr val="9FB2C9"/>
+                  <a:srgbClr val="8A7E72"/>
                 </a:solidFill>
                 <a:latin typeface="Calibri" pitchFamily="34" charset="0"/>
                 <a:ea typeface="Calibri" pitchFamily="34" charset="-122"/>
@@ -5239,7 +5167,7 @@
             <a:r>
               <a:rPr lang="en-US" sz="1600" b="1" i="1" dirty="0">
                 <a:solidFill>
-                  <a:srgbClr val="9FB2C9"/>
+                  <a:srgbClr val="8A7E72"/>
                 </a:solidFill>
                 <a:latin typeface="Calibri" pitchFamily="34" charset="0"/>
                 <a:ea typeface="Calibri" pitchFamily="34" charset="-122"/>
@@ -5259,7 +5187,7 @@
             <a:r>
               <a:rPr lang="en-US" sz="1500" dirty="0">
                 <a:solidFill>
-                  <a:srgbClr val="9FB2C9"/>
+                  <a:srgbClr val="8A7E72"/>
                 </a:solidFill>
                 <a:latin typeface="Calibri" pitchFamily="34" charset="0"/>
                 <a:ea typeface="Calibri" pitchFamily="34" charset="-122"/>
@@ -5279,7 +5207,7 @@
             <a:r>
               <a:rPr lang="en-US" sz="1500" dirty="0">
                 <a:solidFill>
-                  <a:srgbClr val="9FB2C9"/>
+                  <a:srgbClr val="8A7E72"/>
                 </a:solidFill>
                 <a:latin typeface="Calibri" pitchFamily="34" charset="0"/>
                 <a:ea typeface="Calibri" pitchFamily="34" charset="-122"/>
@@ -5296,7 +5224,7 @@
             <a:r>
               <a:rPr lang="en-US" sz="1400" i="1" dirty="0">
                 <a:solidFill>
-                  <a:srgbClr val="9FB2C9"/>
+                  <a:srgbClr val="8A7E72"/>
                 </a:solidFill>
                 <a:latin typeface="Calibri" pitchFamily="34" charset="0"/>
                 <a:ea typeface="Calibri" pitchFamily="34" charset="-122"/>
@@ -5325,18 +5253,18 @@
             </a:avLst>
           </a:prstGeom>
           <a:solidFill>
-            <a:srgbClr val="16314F"/>
+            <a:srgbClr val="EADFD0"/>
           </a:solidFill>
           <a:ln w="19050">
             <a:solidFill>
-              <a:srgbClr val="C9A961"/>
+              <a:srgbClr val="B1937E"/>
             </a:solidFill>
             <a:prstDash val="solid"/>
           </a:ln>
           <a:effectLst>
-            <a:outerShdw sx="100000" sy="100000" kx="0" ky="0" algn="bl" rotWithShape="0" blurRad="127000" dist="38100" dir="5400000">
-              <a:srgbClr val="000000">
-                <a:alpha val="28000"/>
+            <a:outerShdw sx="100000" sy="100000" kx="0" ky="0" algn="bl" rotWithShape="0" blurRad="114300" dist="38100" dir="5400000">
+              <a:srgbClr val="7A6A55">
+                <a:alpha val="12000"/>
               </a:srgbClr>
             </a:outerShdw>
           </a:effectLst>
@@ -5369,7 +5297,7 @@
             <a:r>
               <a:rPr lang="en-US" sz="1300" b="1" spc="300" kern="0" dirty="0">
                 <a:solidFill>
-                  <a:srgbClr val="C9A961"/>
+                  <a:srgbClr val="B1937E"/>
                 </a:solidFill>
                 <a:latin typeface="Calibri" pitchFamily="34" charset="0"/>
                 <a:ea typeface="Calibri" pitchFamily="34" charset="-122"/>
@@ -5411,7 +5339,7 @@
             <a:r>
               <a:rPr lang="en-US" sz="1600" b="1" dirty="0">
                 <a:solidFill>
-                  <a:srgbClr val="EAF1FA"/>
+                  <a:srgbClr val="33302B"/>
                 </a:solidFill>
                 <a:latin typeface="Calibri" pitchFamily="34" charset="0"/>
                 <a:ea typeface="Calibri" pitchFamily="34" charset="-122"/>
@@ -5431,7 +5359,7 @@
             <a:r>
               <a:rPr lang="en-US" sz="1500" dirty="0">
                 <a:solidFill>
-                  <a:srgbClr val="EAF1FA"/>
+                  <a:srgbClr val="33302B"/>
                 </a:solidFill>
                 <a:latin typeface="Calibri" pitchFamily="34" charset="0"/>
                 <a:ea typeface="Calibri" pitchFamily="34" charset="-122"/>
@@ -5451,7 +5379,7 @@
             <a:r>
               <a:rPr lang="en-US" sz="1500" dirty="0">
                 <a:solidFill>
-                  <a:srgbClr val="EAF1FA"/>
+                  <a:srgbClr val="33302B"/>
                 </a:solidFill>
                 <a:latin typeface="Calibri" pitchFamily="34" charset="0"/>
                 <a:ea typeface="Calibri" pitchFamily="34" charset="-122"/>
@@ -5468,7 +5396,7 @@
             <a:r>
               <a:rPr lang="en-US" sz="1400" i="1" dirty="0">
                 <a:solidFill>
-                  <a:srgbClr val="C9A961"/>
+                  <a:srgbClr val="B1937E"/>
                 </a:solidFill>
                 <a:latin typeface="Calibri" pitchFamily="34" charset="0"/>
                 <a:ea typeface="Calibri" pitchFamily="34" charset="-122"/>
@@ -5497,7 +5425,7 @@
           <a:noFill/>
           <a:ln w="9525">
             <a:solidFill>
-              <a:srgbClr val="5C708A">
+              <a:srgbClr val="A89A86">
                 <a:alpha val="60000"/>
               </a:srgbClr>
             </a:solidFill>
@@ -5532,7 +5460,7 @@
             <a:r>
               <a:rPr lang="en-US" sz="900" dirty="0">
                 <a:solidFill>
-                  <a:srgbClr val="5C708A"/>
+                  <a:srgbClr val="A89A86"/>
                 </a:solidFill>
                 <a:latin typeface="Calibri" pitchFamily="34" charset="0"/>
                 <a:ea typeface="Calibri" pitchFamily="34" charset="-122"/>
@@ -5571,7 +5499,7 @@
             <a:r>
               <a:rPr lang="en-US" sz="900" dirty="0">
                 <a:solidFill>
-                  <a:srgbClr val="5C708A"/>
+                  <a:srgbClr val="A89A86"/>
                 </a:solidFill>
                 <a:latin typeface="Calibri" pitchFamily="34" charset="0"/>
                 <a:ea typeface="Calibri" pitchFamily="34" charset="-122"/>
@@ -5597,7 +5525,7 @@
     <p:bg>
       <p:bgPr>
         <a:solidFill>
-          <a:srgbClr val="0B1D33"/>
+          <a:srgbClr val="F8F6F3"/>
         </a:solidFill>
       </p:bgPr>
     </p:bg>
@@ -5642,7 +5570,7 @@
             <a:r>
               <a:rPr lang="en-US" sz="1200" b="1" spc="300" kern="0" dirty="0">
                 <a:solidFill>
-                  <a:srgbClr val="4A9EFF"/>
+                  <a:srgbClr val="9A7B66"/>
                 </a:solidFill>
                 <a:latin typeface="Calibri" pitchFamily="34" charset="0"/>
                 <a:ea typeface="Calibri" pitchFamily="34" charset="-122"/>
@@ -5684,11 +5612,11 @@
             <a:r>
               <a:rPr lang="en-US" sz="3200" b="1" dirty="0">
                 <a:solidFill>
-                  <a:srgbClr val="EAF1FA"/>
-                </a:solidFill>
-                <a:latin typeface="Bookman Old Style" pitchFamily="34" charset="0"/>
-                <a:ea typeface="Bookman Old Style" pitchFamily="34" charset="-122"/>
-                <a:cs typeface="Bookman Old Style" pitchFamily="34" charset="-120"/>
+                  <a:srgbClr val="33302B"/>
+                </a:solidFill>
+                <a:latin typeface="Georgia" pitchFamily="34" charset="0"/>
+                <a:ea typeface="Georgia" pitchFamily="34" charset="-122"/>
+                <a:cs typeface="Georgia" pitchFamily="34" charset="-120"/>
               </a:rPr>
               <a:t>Uma boa entrega trabalha por ti</a:t>
             </a:r>
@@ -5713,13 +5641,18 @@
             </a:avLst>
           </a:prstGeom>
           <a:solidFill>
-            <a:srgbClr val="13283F"/>
+            <a:srgbClr val="FFFFFF"/>
           </a:solidFill>
-          <a:ln/>
+          <a:ln w="12700">
+            <a:solidFill>
+              <a:srgbClr val="E3D9CC"/>
+            </a:solidFill>
+            <a:prstDash val="solid"/>
+          </a:ln>
           <a:effectLst>
-            <a:outerShdw sx="100000" sy="100000" kx="0" ky="0" algn="bl" rotWithShape="0" blurRad="127000" dist="38100" dir="5400000">
-              <a:srgbClr val="000000">
-                <a:alpha val="28000"/>
+            <a:outerShdw sx="100000" sy="100000" kx="0" ky="0" algn="bl" rotWithShape="0" blurRad="114300" dist="38100" dir="5400000">
+              <a:srgbClr val="7A6A55">
+                <a:alpha val="12000"/>
               </a:srgbClr>
             </a:outerShdw>
           </a:effectLst>
@@ -5752,11 +5685,11 @@
             <a:r>
               <a:rPr lang="en-US" sz="4600" b="1" dirty="0">
                 <a:solidFill>
-                  <a:srgbClr val="C9A961"/>
-                </a:solidFill>
-                <a:latin typeface="Bookman Old Style" pitchFamily="34" charset="0"/>
-                <a:ea typeface="Bookman Old Style" pitchFamily="34" charset="-122"/>
-                <a:cs typeface="Bookman Old Style" pitchFamily="34" charset="-120"/>
+                  <a:srgbClr val="B1937E"/>
+                </a:solidFill>
+                <a:latin typeface="Georgia" pitchFamily="34" charset="0"/>
+                <a:ea typeface="Georgia" pitchFamily="34" charset="-122"/>
+                <a:cs typeface="Georgia" pitchFamily="34" charset="-120"/>
               </a:rPr>
               <a:t>+</a:t>
             </a:r>
@@ -5791,7 +5724,7 @@
             <a:r>
               <a:rPr lang="en-US" sz="1500" b="1" dirty="0">
                 <a:solidFill>
-                  <a:srgbClr val="EAF1FA"/>
+                  <a:srgbClr val="33302B"/>
                 </a:solidFill>
                 <a:latin typeface="Calibri" pitchFamily="34" charset="0"/>
                 <a:ea typeface="Calibri" pitchFamily="34" charset="-122"/>
@@ -5820,7 +5753,7 @@
           <a:noFill/>
           <a:ln w="9525">
             <a:solidFill>
-              <a:srgbClr val="5C708A">
+              <a:srgbClr val="A89A86">
                 <a:alpha val="60000"/>
               </a:srgbClr>
             </a:solidFill>
@@ -5855,7 +5788,7 @@
             <a:r>
               <a:rPr lang="en-US" sz="1300" dirty="0">
                 <a:solidFill>
-                  <a:srgbClr val="9FB2C9"/>
+                  <a:srgbClr val="8A7E72"/>
                 </a:solidFill>
                 <a:latin typeface="Calibri" pitchFamily="34" charset="0"/>
                 <a:ea typeface="Calibri" pitchFamily="34" charset="-122"/>
@@ -5884,13 +5817,18 @@
             </a:avLst>
           </a:prstGeom>
           <a:solidFill>
-            <a:srgbClr val="13283F"/>
+            <a:srgbClr val="FFFFFF"/>
           </a:solidFill>
-          <a:ln/>
+          <a:ln w="12700">
+            <a:solidFill>
+              <a:srgbClr val="E3D9CC"/>
+            </a:solidFill>
+            <a:prstDash val="solid"/>
+          </a:ln>
           <a:effectLst>
-            <a:outerShdw sx="100000" sy="100000" kx="0" ky="0" algn="bl" rotWithShape="0" blurRad="127000" dist="38100" dir="5400000">
-              <a:srgbClr val="000000">
-                <a:alpha val="28000"/>
+            <a:outerShdw sx="100000" sy="100000" kx="0" ky="0" algn="bl" rotWithShape="0" blurRad="114300" dist="38100" dir="5400000">
+              <a:srgbClr val="7A6A55">
+                <a:alpha val="12000"/>
               </a:srgbClr>
             </a:outerShdw>
           </a:effectLst>
@@ -5923,11 +5861,11 @@
             <a:r>
               <a:rPr lang="en-US" sz="4600" b="1" dirty="0">
                 <a:solidFill>
-                  <a:srgbClr val="4A9EFF"/>
-                </a:solidFill>
-                <a:latin typeface="Bookman Old Style" pitchFamily="34" charset="0"/>
-                <a:ea typeface="Bookman Old Style" pitchFamily="34" charset="-122"/>
-                <a:cs typeface="Bookman Old Style" pitchFamily="34" charset="-120"/>
+                  <a:srgbClr val="9A7B66"/>
+                </a:solidFill>
+                <a:latin typeface="Georgia" pitchFamily="34" charset="0"/>
+                <a:ea typeface="Georgia" pitchFamily="34" charset="-122"/>
+                <a:cs typeface="Georgia" pitchFamily="34" charset="-120"/>
               </a:rPr>
               <a:t>+</a:t>
             </a:r>
@@ -5962,7 +5900,7 @@
             <a:r>
               <a:rPr lang="en-US" sz="1500" b="1" dirty="0">
                 <a:solidFill>
-                  <a:srgbClr val="EAF1FA"/>
+                  <a:srgbClr val="33302B"/>
                 </a:solidFill>
                 <a:latin typeface="Calibri" pitchFamily="34" charset="0"/>
                 <a:ea typeface="Calibri" pitchFamily="34" charset="-122"/>
@@ -5991,7 +5929,7 @@
           <a:noFill/>
           <a:ln w="9525">
             <a:solidFill>
-              <a:srgbClr val="5C708A">
+              <a:srgbClr val="A89A86">
                 <a:alpha val="60000"/>
               </a:srgbClr>
             </a:solidFill>
@@ -6026,7 +5964,7 @@
             <a:r>
               <a:rPr lang="en-US" sz="1300" dirty="0">
                 <a:solidFill>
-                  <a:srgbClr val="9FB2C9"/>
+                  <a:srgbClr val="8A7E72"/>
                 </a:solidFill>
                 <a:latin typeface="Calibri" pitchFamily="34" charset="0"/>
                 <a:ea typeface="Calibri" pitchFamily="34" charset="-122"/>
@@ -6055,13 +5993,18 @@
             </a:avLst>
           </a:prstGeom>
           <a:solidFill>
-            <a:srgbClr val="13283F"/>
+            <a:srgbClr val="FFFFFF"/>
           </a:solidFill>
-          <a:ln/>
+          <a:ln w="12700">
+            <a:solidFill>
+              <a:srgbClr val="E3D9CC"/>
+            </a:solidFill>
+            <a:prstDash val="solid"/>
+          </a:ln>
           <a:effectLst>
-            <a:outerShdw sx="100000" sy="100000" kx="0" ky="0" algn="bl" rotWithShape="0" blurRad="127000" dist="38100" dir="5400000">
-              <a:srgbClr val="000000">
-                <a:alpha val="28000"/>
+            <a:outerShdw sx="100000" sy="100000" kx="0" ky="0" algn="bl" rotWithShape="0" blurRad="114300" dist="38100" dir="5400000">
+              <a:srgbClr val="7A6A55">
+                <a:alpha val="12000"/>
               </a:srgbClr>
             </a:outerShdw>
           </a:effectLst>
@@ -6094,11 +6037,11 @@
             <a:r>
               <a:rPr lang="en-US" sz="4600" b="1" dirty="0">
                 <a:solidFill>
-                  <a:srgbClr val="4A9EFF"/>
-                </a:solidFill>
-                <a:latin typeface="Bookman Old Style" pitchFamily="34" charset="0"/>
-                <a:ea typeface="Bookman Old Style" pitchFamily="34" charset="-122"/>
-                <a:cs typeface="Bookman Old Style" pitchFamily="34" charset="-120"/>
+                  <a:srgbClr val="9A7B66"/>
+                </a:solidFill>
+                <a:latin typeface="Georgia" pitchFamily="34" charset="0"/>
+                <a:ea typeface="Georgia" pitchFamily="34" charset="-122"/>
+                <a:cs typeface="Georgia" pitchFamily="34" charset="-120"/>
               </a:rPr>
               <a:t>+</a:t>
             </a:r>
@@ -6133,7 +6076,7 @@
             <a:r>
               <a:rPr lang="en-US" sz="1500" b="1" dirty="0">
                 <a:solidFill>
-                  <a:srgbClr val="EAF1FA"/>
+                  <a:srgbClr val="33302B"/>
                 </a:solidFill>
                 <a:latin typeface="Calibri" pitchFamily="34" charset="0"/>
                 <a:ea typeface="Calibri" pitchFamily="34" charset="-122"/>
@@ -6162,7 +6105,7 @@
           <a:noFill/>
           <a:ln w="9525">
             <a:solidFill>
-              <a:srgbClr val="5C708A">
+              <a:srgbClr val="A89A86">
                 <a:alpha val="60000"/>
               </a:srgbClr>
             </a:solidFill>
@@ -6197,7 +6140,7 @@
             <a:r>
               <a:rPr lang="en-US" sz="1300" dirty="0">
                 <a:solidFill>
-                  <a:srgbClr val="9FB2C9"/>
+                  <a:srgbClr val="8A7E72"/>
                 </a:solidFill>
                 <a:latin typeface="Calibri" pitchFamily="34" charset="0"/>
                 <a:ea typeface="Calibri" pitchFamily="34" charset="-122"/>
@@ -6226,7 +6169,7 @@
           <a:noFill/>
           <a:ln w="9525">
             <a:solidFill>
-              <a:srgbClr val="5C708A">
+              <a:srgbClr val="A89A86">
                 <a:alpha val="60000"/>
               </a:srgbClr>
             </a:solidFill>
@@ -6261,7 +6204,7 @@
             <a:r>
               <a:rPr lang="en-US" sz="900" dirty="0">
                 <a:solidFill>
-                  <a:srgbClr val="5C708A"/>
+                  <a:srgbClr val="A89A86"/>
                 </a:solidFill>
                 <a:latin typeface="Calibri" pitchFamily="34" charset="0"/>
                 <a:ea typeface="Calibri" pitchFamily="34" charset="-122"/>
@@ -6300,7 +6243,7 @@
             <a:r>
               <a:rPr lang="en-US" sz="900" dirty="0">
                 <a:solidFill>
-                  <a:srgbClr val="5C708A"/>
+                  <a:srgbClr val="A89A86"/>
                 </a:solidFill>
                 <a:latin typeface="Calibri" pitchFamily="34" charset="0"/>
                 <a:ea typeface="Calibri" pitchFamily="34" charset="-122"/>
@@ -6326,7 +6269,7 @@
     <p:bg>
       <p:bgPr>
         <a:solidFill>
-          <a:srgbClr val="0B1D33"/>
+          <a:srgbClr val="F8F6F3"/>
         </a:solidFill>
       </p:bgPr>
     </p:bg>
@@ -6371,7 +6314,7 @@
             <a:r>
               <a:rPr lang="en-US" sz="1200" b="1" spc="300" kern="0" dirty="0">
                 <a:solidFill>
-                  <a:srgbClr val="4A9EFF"/>
+                  <a:srgbClr val="9A7B66"/>
                 </a:solidFill>
                 <a:latin typeface="Calibri" pitchFamily="34" charset="0"/>
                 <a:ea typeface="Calibri" pitchFamily="34" charset="-122"/>
@@ -6413,11 +6356,11 @@
             <a:r>
               <a:rPr lang="en-US" sz="3200" b="1" dirty="0">
                 <a:solidFill>
-                  <a:srgbClr val="EAF1FA"/>
-                </a:solidFill>
-                <a:latin typeface="Bookman Old Style" pitchFamily="34" charset="0"/>
-                <a:ea typeface="Bookman Old Style" pitchFamily="34" charset="-122"/>
-                <a:cs typeface="Bookman Old Style" pitchFamily="34" charset="-120"/>
+                  <a:srgbClr val="33302B"/>
+                </a:solidFill>
+                <a:latin typeface="Georgia" pitchFamily="34" charset="0"/>
+                <a:ea typeface="Georgia" pitchFamily="34" charset="-122"/>
+                <a:cs typeface="Georgia" pitchFamily="34" charset="-120"/>
               </a:rPr>
               <a:t>Erros comuns na produção e entrega</a:t>
             </a:r>
@@ -6442,13 +6385,18 @@
             </a:avLst>
           </a:prstGeom>
           <a:solidFill>
-            <a:srgbClr val="13283F"/>
+            <a:srgbClr val="FFFFFF"/>
           </a:solidFill>
-          <a:ln/>
+          <a:ln w="12700">
+            <a:solidFill>
+              <a:srgbClr val="E3D9CC"/>
+            </a:solidFill>
+            <a:prstDash val="solid"/>
+          </a:ln>
           <a:effectLst>
-            <a:outerShdw sx="100000" sy="100000" kx="0" ky="0" algn="bl" rotWithShape="0" blurRad="127000" dist="38100" dir="5400000">
-              <a:srgbClr val="000000">
-                <a:alpha val="28000"/>
+            <a:outerShdw sx="100000" sy="100000" kx="0" ky="0" algn="bl" rotWithShape="0" blurRad="114300" dist="38100" dir="5400000">
+              <a:srgbClr val="7A6A55">
+                <a:alpha val="12000"/>
               </a:srgbClr>
             </a:outerShdw>
           </a:effectLst>
@@ -6469,9 +6417,14 @@
             <a:avLst/>
           </a:prstGeom>
           <a:solidFill>
-            <a:srgbClr val="16314F"/>
+            <a:srgbClr val="EADFD0"/>
           </a:solidFill>
-          <a:ln/>
+          <a:ln w="9525">
+            <a:solidFill>
+              <a:srgbClr val="E3D9CC"/>
+            </a:solidFill>
+            <a:prstDash val="solid"/>
+          </a:ln>
         </p:spPr>
       </p:sp>
       <p:pic>
@@ -6525,11 +6478,11 @@
             <a:r>
               <a:rPr lang="en-US" sz="1800" b="1" dirty="0">
                 <a:solidFill>
-                  <a:srgbClr val="C9A961"/>
-                </a:solidFill>
-                <a:latin typeface="Bookman Old Style" pitchFamily="34" charset="0"/>
-                <a:ea typeface="Bookman Old Style" pitchFamily="34" charset="-122"/>
-                <a:cs typeface="Bookman Old Style" pitchFamily="34" charset="-120"/>
+                  <a:srgbClr val="B1937E"/>
+                </a:solidFill>
+                <a:latin typeface="Georgia" pitchFamily="34" charset="0"/>
+                <a:ea typeface="Georgia" pitchFamily="34" charset="-122"/>
+                <a:cs typeface="Georgia" pitchFamily="34" charset="-120"/>
               </a:rPr>
               <a:t>Editar sem sistema</a:t>
             </a:r>
@@ -6564,7 +6517,7 @@
             <a:r>
               <a:rPr lang="en-US" sz="1350" dirty="0">
                 <a:solidFill>
-                  <a:srgbClr val="9FB2C9"/>
+                  <a:srgbClr val="8A7E72"/>
                 </a:solidFill>
                 <a:latin typeface="Calibri" pitchFamily="34" charset="0"/>
                 <a:ea typeface="Calibri" pitchFamily="34" charset="-122"/>
@@ -6593,13 +6546,18 @@
             </a:avLst>
           </a:prstGeom>
           <a:solidFill>
-            <a:srgbClr val="13283F"/>
+            <a:srgbClr val="FFFFFF"/>
           </a:solidFill>
-          <a:ln/>
+          <a:ln w="12700">
+            <a:solidFill>
+              <a:srgbClr val="E3D9CC"/>
+            </a:solidFill>
+            <a:prstDash val="solid"/>
+          </a:ln>
           <a:effectLst>
-            <a:outerShdw sx="100000" sy="100000" kx="0" ky="0" algn="bl" rotWithShape="0" blurRad="127000" dist="38100" dir="5400000">
-              <a:srgbClr val="000000">
-                <a:alpha val="28000"/>
+            <a:outerShdw sx="100000" sy="100000" kx="0" ky="0" algn="bl" rotWithShape="0" blurRad="114300" dist="38100" dir="5400000">
+              <a:srgbClr val="7A6A55">
+                <a:alpha val="12000"/>
               </a:srgbClr>
             </a:outerShdw>
           </a:effectLst>
@@ -6620,9 +6578,14 @@
             <a:avLst/>
           </a:prstGeom>
           <a:solidFill>
-            <a:srgbClr val="16314F"/>
+            <a:srgbClr val="EADFD0"/>
           </a:solidFill>
-          <a:ln/>
+          <a:ln w="9525">
+            <a:solidFill>
+              <a:srgbClr val="E3D9CC"/>
+            </a:solidFill>
+            <a:prstDash val="solid"/>
+          </a:ln>
         </p:spPr>
       </p:sp>
       <p:pic>
@@ -6676,11 +6639,11 @@
             <a:r>
               <a:rPr lang="en-US" sz="1800" b="1" dirty="0">
                 <a:solidFill>
-                  <a:srgbClr val="C9A961"/>
-                </a:solidFill>
-                <a:latin typeface="Bookman Old Style" pitchFamily="34" charset="0"/>
-                <a:ea typeface="Bookman Old Style" pitchFamily="34" charset="-122"/>
-                <a:cs typeface="Bookman Old Style" pitchFamily="34" charset="-120"/>
+                  <a:srgbClr val="B1937E"/>
+                </a:solidFill>
+                <a:latin typeface="Georgia" pitchFamily="34" charset="0"/>
+                <a:ea typeface="Georgia" pitchFamily="34" charset="-122"/>
+                <a:cs typeface="Georgia" pitchFamily="34" charset="-120"/>
               </a:rPr>
               <a:t>Prometer prazos irrealistas</a:t>
             </a:r>
@@ -6715,7 +6678,7 @@
             <a:r>
               <a:rPr lang="en-US" sz="1350" dirty="0">
                 <a:solidFill>
-                  <a:srgbClr val="9FB2C9"/>
+                  <a:srgbClr val="8A7E72"/>
                 </a:solidFill>
                 <a:latin typeface="Calibri" pitchFamily="34" charset="0"/>
                 <a:ea typeface="Calibri" pitchFamily="34" charset="-122"/>
@@ -6744,13 +6707,18 @@
             </a:avLst>
           </a:prstGeom>
           <a:solidFill>
-            <a:srgbClr val="13283F"/>
+            <a:srgbClr val="FFFFFF"/>
           </a:solidFill>
-          <a:ln/>
+          <a:ln w="12700">
+            <a:solidFill>
+              <a:srgbClr val="E3D9CC"/>
+            </a:solidFill>
+            <a:prstDash val="solid"/>
+          </a:ln>
           <a:effectLst>
-            <a:outerShdw sx="100000" sy="100000" kx="0" ky="0" algn="bl" rotWithShape="0" blurRad="127000" dist="38100" dir="5400000">
-              <a:srgbClr val="000000">
-                <a:alpha val="28000"/>
+            <a:outerShdw sx="100000" sy="100000" kx="0" ky="0" algn="bl" rotWithShape="0" blurRad="114300" dist="38100" dir="5400000">
+              <a:srgbClr val="7A6A55">
+                <a:alpha val="12000"/>
               </a:srgbClr>
             </a:outerShdw>
           </a:effectLst>
@@ -6771,9 +6739,14 @@
             <a:avLst/>
           </a:prstGeom>
           <a:solidFill>
-            <a:srgbClr val="16314F"/>
+            <a:srgbClr val="EADFD0"/>
           </a:solidFill>
-          <a:ln/>
+          <a:ln w="9525">
+            <a:solidFill>
+              <a:srgbClr val="E3D9CC"/>
+            </a:solidFill>
+            <a:prstDash val="solid"/>
+          </a:ln>
         </p:spPr>
       </p:sp>
       <p:pic>
@@ -6827,11 +6800,11 @@
             <a:r>
               <a:rPr lang="en-US" sz="1800" b="1" dirty="0">
                 <a:solidFill>
-                  <a:srgbClr val="C9A961"/>
-                </a:solidFill>
-                <a:latin typeface="Bookman Old Style" pitchFamily="34" charset="0"/>
-                <a:ea typeface="Bookman Old Style" pitchFamily="34" charset="-122"/>
-                <a:cs typeface="Bookman Old Style" pitchFamily="34" charset="-120"/>
+                  <a:srgbClr val="B1937E"/>
+                </a:solidFill>
+                <a:latin typeface="Georgia" pitchFamily="34" charset="0"/>
+                <a:ea typeface="Georgia" pitchFamily="34" charset="-122"/>
+                <a:cs typeface="Georgia" pitchFamily="34" charset="-120"/>
               </a:rPr>
               <a:t>Bastidores desorganizados</a:t>
             </a:r>
@@ -6866,7 +6839,7 @@
             <a:r>
               <a:rPr lang="en-US" sz="1350" dirty="0">
                 <a:solidFill>
-                  <a:srgbClr val="9FB2C9"/>
+                  <a:srgbClr val="8A7E72"/>
                 </a:solidFill>
                 <a:latin typeface="Calibri" pitchFamily="34" charset="0"/>
                 <a:ea typeface="Calibri" pitchFamily="34" charset="-122"/>
@@ -6895,13 +6868,18 @@
             </a:avLst>
           </a:prstGeom>
           <a:solidFill>
-            <a:srgbClr val="13283F"/>
+            <a:srgbClr val="FFFFFF"/>
           </a:solidFill>
-          <a:ln/>
+          <a:ln w="12700">
+            <a:solidFill>
+              <a:srgbClr val="E3D9CC"/>
+            </a:solidFill>
+            <a:prstDash val="solid"/>
+          </a:ln>
           <a:effectLst>
-            <a:outerShdw sx="100000" sy="100000" kx="0" ky="0" algn="bl" rotWithShape="0" blurRad="127000" dist="38100" dir="5400000">
-              <a:srgbClr val="000000">
-                <a:alpha val="28000"/>
+            <a:outerShdw sx="100000" sy="100000" kx="0" ky="0" algn="bl" rotWithShape="0" blurRad="114300" dist="38100" dir="5400000">
+              <a:srgbClr val="7A6A55">
+                <a:alpha val="12000"/>
               </a:srgbClr>
             </a:outerShdw>
           </a:effectLst>
@@ -6922,9 +6900,14 @@
             <a:avLst/>
           </a:prstGeom>
           <a:solidFill>
-            <a:srgbClr val="16314F"/>
+            <a:srgbClr val="EADFD0"/>
           </a:solidFill>
-          <a:ln/>
+          <a:ln w="9525">
+            <a:solidFill>
+              <a:srgbClr val="E3D9CC"/>
+            </a:solidFill>
+            <a:prstDash val="solid"/>
+          </a:ln>
         </p:spPr>
       </p:sp>
       <p:pic>
@@ -6978,11 +6961,11 @@
             <a:r>
               <a:rPr lang="en-US" sz="1800" b="1" dirty="0">
                 <a:solidFill>
-                  <a:srgbClr val="C9A961"/>
-                </a:solidFill>
-                <a:latin typeface="Bookman Old Style" pitchFamily="34" charset="0"/>
-                <a:ea typeface="Bookman Old Style" pitchFamily="34" charset="-122"/>
-                <a:cs typeface="Bookman Old Style" pitchFamily="34" charset="-120"/>
+                  <a:srgbClr val="B1937E"/>
+                </a:solidFill>
+                <a:latin typeface="Georgia" pitchFamily="34" charset="0"/>
+                <a:ea typeface="Georgia" pitchFamily="34" charset="-122"/>
+                <a:cs typeface="Georgia" pitchFamily="34" charset="-120"/>
               </a:rPr>
               <a:t>Entregar sem ritual</a:t>
             </a:r>
@@ -7017,7 +7000,7 @@
             <a:r>
               <a:rPr lang="en-US" sz="1350" dirty="0">
                 <a:solidFill>
-                  <a:srgbClr val="9FB2C9"/>
+                  <a:srgbClr val="8A7E72"/>
                 </a:solidFill>
                 <a:latin typeface="Calibri" pitchFamily="34" charset="0"/>
                 <a:ea typeface="Calibri" pitchFamily="34" charset="-122"/>
@@ -7046,7 +7029,7 @@
           <a:noFill/>
           <a:ln w="9525">
             <a:solidFill>
-              <a:srgbClr val="5C708A">
+              <a:srgbClr val="A89A86">
                 <a:alpha val="60000"/>
               </a:srgbClr>
             </a:solidFill>
@@ -7081,7 +7064,7 @@
             <a:r>
               <a:rPr lang="en-US" sz="900" dirty="0">
                 <a:solidFill>
-                  <a:srgbClr val="5C708A"/>
+                  <a:srgbClr val="A89A86"/>
                 </a:solidFill>
                 <a:latin typeface="Calibri" pitchFamily="34" charset="0"/>
                 <a:ea typeface="Calibri" pitchFamily="34" charset="-122"/>
@@ -7120,7 +7103,7 @@
             <a:r>
               <a:rPr lang="en-US" sz="900" dirty="0">
                 <a:solidFill>
-                  <a:srgbClr val="5C708A"/>
+                  <a:srgbClr val="A89A86"/>
                 </a:solidFill>
                 <a:latin typeface="Calibri" pitchFamily="34" charset="0"/>
                 <a:ea typeface="Calibri" pitchFamily="34" charset="-122"/>
@@ -7146,7 +7129,7 @@
     <p:bg>
       <p:bgPr>
         <a:solidFill>
-          <a:srgbClr val="0B1D33"/>
+          <a:srgbClr val="F8F6F3"/>
         </a:solidFill>
       </p:bgPr>
     </p:bg>
@@ -7166,51 +7149,7 @@
       </p:grpSpPr>
       <p:sp>
         <p:nvSpPr>
-          <p:cNvPr id="2" name="Shape 0"/>
-          <p:cNvSpPr/>
-          <p:nvPr/>
-        </p:nvSpPr>
-        <p:spPr>
-          <a:xfrm>
-            <a:off x="7772400" y="-1371600"/>
-            <a:ext cx="5486400" cy="5486400"/>
-          </a:xfrm>
-          <a:prstGeom prst="ellipse">
-            <a:avLst/>
-          </a:prstGeom>
-          <a:solidFill>
-            <a:srgbClr val="4A9EFF">
-              <a:alpha val="10000"/>
-            </a:srgbClr>
-          </a:solidFill>
-          <a:ln/>
-        </p:spPr>
-      </p:sp>
-      <p:sp>
-        <p:nvSpPr>
-          <p:cNvPr id="3" name="Shape 1"/>
-          <p:cNvSpPr/>
-          <p:nvPr/>
-        </p:nvSpPr>
-        <p:spPr>
-          <a:xfrm>
-            <a:off x="-1371600" y="4114800"/>
-            <a:ext cx="4572000" cy="4572000"/>
-          </a:xfrm>
-          <a:prstGeom prst="ellipse">
-            <a:avLst/>
-          </a:prstGeom>
-          <a:solidFill>
-            <a:srgbClr val="C9A961">
-              <a:alpha val="8000"/>
-            </a:srgbClr>
-          </a:solidFill>
-          <a:ln/>
-        </p:spPr>
-      </p:sp>
-      <p:sp>
-        <p:nvSpPr>
-          <p:cNvPr id="4" name="Text 2"/>
+          <p:cNvPr id="2" name="Text 0"/>
           <p:cNvSpPr/>
           <p:nvPr/>
         </p:nvSpPr>
@@ -7235,11 +7174,11 @@
             <a:r>
               <a:rPr lang="en-US" sz="15000" b="1" dirty="0">
                 <a:solidFill>
-                  <a:srgbClr val="16314F"/>
-                </a:solidFill>
-                <a:latin typeface="Bookman Old Style" pitchFamily="34" charset="0"/>
-                <a:ea typeface="Bookman Old Style" pitchFamily="34" charset="-122"/>
-                <a:cs typeface="Bookman Old Style" pitchFamily="34" charset="-120"/>
+                  <a:srgbClr val="EADFD0"/>
+                </a:solidFill>
+                <a:latin typeface="Georgia" pitchFamily="34" charset="0"/>
+                <a:ea typeface="Georgia" pitchFamily="34" charset="-122"/>
+                <a:cs typeface="Georgia" pitchFamily="34" charset="-120"/>
               </a:rPr>
               <a:t>C</a:t>
             </a:r>
@@ -7249,7 +7188,7 @@
       </p:sp>
       <p:sp>
         <p:nvSpPr>
-          <p:cNvPr id="5" name="Text 3"/>
+          <p:cNvPr id="3" name="Text 1"/>
           <p:cNvSpPr/>
           <p:nvPr/>
         </p:nvSpPr>
@@ -7274,7 +7213,7 @@
             <a:r>
               <a:rPr lang="en-US" sz="1300" b="1" spc="400" kern="0" dirty="0">
                 <a:solidFill>
-                  <a:srgbClr val="C9A961"/>
+                  <a:srgbClr val="B1937E"/>
                 </a:solidFill>
                 <a:latin typeface="Calibri" pitchFamily="34" charset="0"/>
                 <a:ea typeface="Calibri" pitchFamily="34" charset="-122"/>
@@ -7288,7 +7227,7 @@
       </p:sp>
       <p:sp>
         <p:nvSpPr>
-          <p:cNvPr id="6" name="Text 4"/>
+          <p:cNvPr id="4" name="Text 2"/>
           <p:cNvSpPr/>
           <p:nvPr/>
         </p:nvSpPr>
@@ -7314,23 +7253,23 @@
               <a:buNone/>
             </a:pPr>
             <a:r>
-              <a:rPr lang="en-US" sz="4400" b="1" dirty="0">
-                <a:solidFill>
-                  <a:srgbClr val="EAF1FA"/>
-                </a:solidFill>
-                <a:latin typeface="Bookman Old Style" pitchFamily="34" charset="0"/>
-                <a:ea typeface="Bookman Old Style" pitchFamily="34" charset="-122"/>
-                <a:cs typeface="Bookman Old Style" pitchFamily="34" charset="-120"/>
+              <a:rPr lang="en-US" sz="4000" b="1" dirty="0">
+                <a:solidFill>
+                  <a:srgbClr val="33302B"/>
+                </a:solidFill>
+                <a:latin typeface="Georgia" pitchFamily="34" charset="0"/>
+                <a:ea typeface="Georgia" pitchFamily="34" charset="-122"/>
+                <a:cs typeface="Georgia" pitchFamily="34" charset="-120"/>
               </a:rPr>
               <a:t>O Trabalho desta Semana</a:t>
             </a:r>
-            <a:endParaRPr lang="en-US" sz="4400" dirty="0"/>
-          </a:p>
-        </p:txBody>
-      </p:sp>
-      <p:sp>
-        <p:nvSpPr>
-          <p:cNvPr id="7" name="Text 5"/>
+            <a:endParaRPr lang="en-US" sz="4000" dirty="0"/>
+          </a:p>
+        </p:txBody>
+      </p:sp>
+      <p:sp>
+        <p:nvSpPr>
+          <p:cNvPr id="5" name="Text 3"/>
           <p:cNvSpPr/>
           <p:nvPr/>
         </p:nvSpPr>
@@ -7355,7 +7294,7 @@
             <a:r>
               <a:rPr lang="en-US" sz="1600" dirty="0">
                 <a:solidFill>
-                  <a:srgbClr val="9FB2C9"/>
+                  <a:srgbClr val="8A7E72"/>
                 </a:solidFill>
                 <a:latin typeface="Calibri" pitchFamily="34" charset="0"/>
                 <a:ea typeface="Calibri" pitchFamily="34" charset="-122"/>
@@ -7369,7 +7308,7 @@
       </p:sp>
       <p:sp>
         <p:nvSpPr>
-          <p:cNvPr id="8" name="Shape 6"/>
+          <p:cNvPr id="6" name="Shape 4"/>
           <p:cNvSpPr/>
           <p:nvPr/>
         </p:nvSpPr>
@@ -7384,7 +7323,7 @@
           <a:noFill/>
           <a:ln w="9525">
             <a:solidFill>
-              <a:srgbClr val="5C708A">
+              <a:srgbClr val="A89A86">
                 <a:alpha val="60000"/>
               </a:srgbClr>
             </a:solidFill>
@@ -7394,7 +7333,7 @@
       </p:sp>
       <p:sp>
         <p:nvSpPr>
-          <p:cNvPr id="9" name="Text 7"/>
+          <p:cNvPr id="7" name="Text 5"/>
           <p:cNvSpPr/>
           <p:nvPr/>
         </p:nvSpPr>
@@ -7419,7 +7358,7 @@
             <a:r>
               <a:rPr lang="en-US" sz="900" dirty="0">
                 <a:solidFill>
-                  <a:srgbClr val="5C708A"/>
+                  <a:srgbClr val="A89A86"/>
                 </a:solidFill>
                 <a:latin typeface="Calibri" pitchFamily="34" charset="0"/>
                 <a:ea typeface="Calibri" pitchFamily="34" charset="-122"/>
@@ -7433,7 +7372,7 @@
       </p:sp>
       <p:sp>
         <p:nvSpPr>
-          <p:cNvPr id="10" name="Text 8"/>
+          <p:cNvPr id="8" name="Text 6"/>
           <p:cNvSpPr/>
           <p:nvPr/>
         </p:nvSpPr>
@@ -7458,7 +7397,7 @@
             <a:r>
               <a:rPr lang="en-US" sz="900" dirty="0">
                 <a:solidFill>
-                  <a:srgbClr val="5C708A"/>
+                  <a:srgbClr val="A89A86"/>
                 </a:solidFill>
                 <a:latin typeface="Calibri" pitchFamily="34" charset="0"/>
                 <a:ea typeface="Calibri" pitchFamily="34" charset="-122"/>
@@ -7484,7 +7423,7 @@
     <p:bg>
       <p:bgPr>
         <a:solidFill>
-          <a:srgbClr val="0B1D33"/>
+          <a:srgbClr val="F8F6F3"/>
         </a:solidFill>
       </p:bgPr>
     </p:bg>
@@ -7529,7 +7468,7 @@
             <a:r>
               <a:rPr lang="en-US" sz="1200" b="1" spc="300" kern="0" dirty="0">
                 <a:solidFill>
-                  <a:srgbClr val="4A9EFF"/>
+                  <a:srgbClr val="9A7B66"/>
                 </a:solidFill>
                 <a:latin typeface="Calibri" pitchFamily="34" charset="0"/>
                 <a:ea typeface="Calibri" pitchFamily="34" charset="-122"/>
@@ -7571,11 +7510,11 @@
             <a:r>
               <a:rPr lang="en-US" sz="3400" b="1" dirty="0">
                 <a:solidFill>
-                  <a:srgbClr val="EAF1FA"/>
-                </a:solidFill>
-                <a:latin typeface="Bookman Old Style" pitchFamily="34" charset="0"/>
-                <a:ea typeface="Bookman Old Style" pitchFamily="34" charset="-122"/>
-                <a:cs typeface="Bookman Old Style" pitchFamily="34" charset="-120"/>
+                  <a:srgbClr val="33302B"/>
+                </a:solidFill>
+                <a:latin typeface="Georgia" pitchFamily="34" charset="0"/>
+                <a:ea typeface="Georgia" pitchFamily="34" charset="-122"/>
+                <a:cs typeface="Georgia" pitchFamily="34" charset="-120"/>
               </a:rPr>
               <a:t>Três peças, entrega memorável</a:t>
             </a:r>
@@ -7600,13 +7539,18 @@
             </a:avLst>
           </a:prstGeom>
           <a:solidFill>
-            <a:srgbClr val="13283F"/>
+            <a:srgbClr val="FFFFFF"/>
           </a:solidFill>
-          <a:ln/>
+          <a:ln w="12700">
+            <a:solidFill>
+              <a:srgbClr val="E3D9CC"/>
+            </a:solidFill>
+            <a:prstDash val="solid"/>
+          </a:ln>
           <a:effectLst>
-            <a:outerShdw sx="100000" sy="100000" kx="0" ky="0" algn="bl" rotWithShape="0" blurRad="127000" dist="38100" dir="5400000">
-              <a:srgbClr val="000000">
-                <a:alpha val="28000"/>
+            <a:outerShdw sx="100000" sy="100000" kx="0" ky="0" algn="bl" rotWithShape="0" blurRad="114300" dist="38100" dir="5400000">
+              <a:srgbClr val="7A6A55">
+                <a:alpha val="12000"/>
               </a:srgbClr>
             </a:outerShdw>
           </a:effectLst>
@@ -7639,11 +7583,11 @@
             <a:r>
               <a:rPr lang="en-US" sz="3600" b="1" dirty="0">
                 <a:solidFill>
-                  <a:srgbClr val="C9A961"/>
-                </a:solidFill>
-                <a:latin typeface="Bookman Old Style" pitchFamily="34" charset="0"/>
-                <a:ea typeface="Bookman Old Style" pitchFamily="34" charset="-122"/>
-                <a:cs typeface="Bookman Old Style" pitchFamily="34" charset="-120"/>
+                  <a:srgbClr val="B1937E"/>
+                </a:solidFill>
+                <a:latin typeface="Georgia" pitchFamily="34" charset="0"/>
+                <a:ea typeface="Georgia" pitchFamily="34" charset="-122"/>
+                <a:cs typeface="Georgia" pitchFamily="34" charset="-120"/>
               </a:rPr>
               <a:t>01</a:t>
             </a:r>
@@ -7666,9 +7610,14 @@
             <a:avLst/>
           </a:prstGeom>
           <a:solidFill>
-            <a:srgbClr val="16314F"/>
+            <a:srgbClr val="EADFD0"/>
           </a:solidFill>
-          <a:ln/>
+          <a:ln w="9525">
+            <a:solidFill>
+              <a:srgbClr val="E3D9CC"/>
+            </a:solidFill>
+            <a:prstDash val="solid"/>
+          </a:ln>
         </p:spPr>
       </p:sp>
       <p:pic>
@@ -7722,11 +7671,11 @@
             <a:r>
               <a:rPr lang="en-US" sz="1900" b="1" dirty="0">
                 <a:solidFill>
-                  <a:srgbClr val="EAF1FA"/>
-                </a:solidFill>
-                <a:latin typeface="Bookman Old Style" pitchFamily="34" charset="0"/>
-                <a:ea typeface="Bookman Old Style" pitchFamily="34" charset="-122"/>
-                <a:cs typeface="Bookman Old Style" pitchFamily="34" charset="-120"/>
+                  <a:srgbClr val="33302B"/>
+                </a:solidFill>
+                <a:latin typeface="Georgia" pitchFamily="34" charset="0"/>
+                <a:ea typeface="Georgia" pitchFamily="34" charset="-122"/>
+                <a:cs typeface="Georgia" pitchFamily="34" charset="-120"/>
               </a:rPr>
               <a:t>Mapeia o workflow</a:t>
             </a:r>
@@ -7761,7 +7710,7 @@
             <a:r>
               <a:rPr lang="en-US" sz="1300" dirty="0">
                 <a:solidFill>
-                  <a:srgbClr val="9FB2C9"/>
+                  <a:srgbClr val="8A7E72"/>
                 </a:solidFill>
                 <a:latin typeface="Calibri" pitchFamily="34" charset="0"/>
                 <a:ea typeface="Calibri" pitchFamily="34" charset="-122"/>
@@ -7790,13 +7739,18 @@
             </a:avLst>
           </a:prstGeom>
           <a:solidFill>
-            <a:srgbClr val="13283F"/>
+            <a:srgbClr val="FFFFFF"/>
           </a:solidFill>
-          <a:ln/>
+          <a:ln w="12700">
+            <a:solidFill>
+              <a:srgbClr val="E3D9CC"/>
+            </a:solidFill>
+            <a:prstDash val="solid"/>
+          </a:ln>
           <a:effectLst>
-            <a:outerShdw sx="100000" sy="100000" kx="0" ky="0" algn="bl" rotWithShape="0" blurRad="127000" dist="38100" dir="5400000">
-              <a:srgbClr val="000000">
-                <a:alpha val="28000"/>
+            <a:outerShdw sx="100000" sy="100000" kx="0" ky="0" algn="bl" rotWithShape="0" blurRad="114300" dist="38100" dir="5400000">
+              <a:srgbClr val="7A6A55">
+                <a:alpha val="12000"/>
               </a:srgbClr>
             </a:outerShdw>
           </a:effectLst>
@@ -7829,11 +7783,11 @@
             <a:r>
               <a:rPr lang="en-US" sz="3600" b="1" dirty="0">
                 <a:solidFill>
-                  <a:srgbClr val="C9A961"/>
-                </a:solidFill>
-                <a:latin typeface="Bookman Old Style" pitchFamily="34" charset="0"/>
-                <a:ea typeface="Bookman Old Style" pitchFamily="34" charset="-122"/>
-                <a:cs typeface="Bookman Old Style" pitchFamily="34" charset="-120"/>
+                  <a:srgbClr val="B1937E"/>
+                </a:solidFill>
+                <a:latin typeface="Georgia" pitchFamily="34" charset="0"/>
+                <a:ea typeface="Georgia" pitchFamily="34" charset="-122"/>
+                <a:cs typeface="Georgia" pitchFamily="34" charset="-120"/>
               </a:rPr>
               <a:t>02</a:t>
             </a:r>
@@ -7856,9 +7810,14 @@
             <a:avLst/>
           </a:prstGeom>
           <a:solidFill>
-            <a:srgbClr val="16314F"/>
+            <a:srgbClr val="EADFD0"/>
           </a:solidFill>
-          <a:ln/>
+          <a:ln w="9525">
+            <a:solidFill>
+              <a:srgbClr val="E3D9CC"/>
+            </a:solidFill>
+            <a:prstDash val="solid"/>
+          </a:ln>
         </p:spPr>
       </p:sp>
       <p:pic>
@@ -7912,11 +7871,11 @@
             <a:r>
               <a:rPr lang="en-US" sz="1900" b="1" dirty="0">
                 <a:solidFill>
-                  <a:srgbClr val="EAF1FA"/>
-                </a:solidFill>
-                <a:latin typeface="Bookman Old Style" pitchFamily="34" charset="0"/>
-                <a:ea typeface="Bookman Old Style" pitchFamily="34" charset="-122"/>
-                <a:cs typeface="Bookman Old Style" pitchFamily="34" charset="-120"/>
+                  <a:srgbClr val="33302B"/>
+                </a:solidFill>
+                <a:latin typeface="Georgia" pitchFamily="34" charset="0"/>
+                <a:ea typeface="Georgia" pitchFamily="34" charset="-122"/>
+                <a:cs typeface="Georgia" pitchFamily="34" charset="-120"/>
               </a:rPr>
               <a:t>Define prazos-padrão</a:t>
             </a:r>
@@ -7951,7 +7910,7 @@
             <a:r>
               <a:rPr lang="en-US" sz="1300" dirty="0">
                 <a:solidFill>
-                  <a:srgbClr val="9FB2C9"/>
+                  <a:srgbClr val="8A7E72"/>
                 </a:solidFill>
                 <a:latin typeface="Calibri" pitchFamily="34" charset="0"/>
                 <a:ea typeface="Calibri" pitchFamily="34" charset="-122"/>
@@ -7980,13 +7939,18 @@
             </a:avLst>
           </a:prstGeom>
           <a:solidFill>
-            <a:srgbClr val="13283F"/>
+            <a:srgbClr val="FFFFFF"/>
           </a:solidFill>
-          <a:ln/>
+          <a:ln w="12700">
+            <a:solidFill>
+              <a:srgbClr val="E3D9CC"/>
+            </a:solidFill>
+            <a:prstDash val="solid"/>
+          </a:ln>
           <a:effectLst>
-            <a:outerShdw sx="100000" sy="100000" kx="0" ky="0" algn="bl" rotWithShape="0" blurRad="127000" dist="38100" dir="5400000">
-              <a:srgbClr val="000000">
-                <a:alpha val="28000"/>
+            <a:outerShdw sx="100000" sy="100000" kx="0" ky="0" algn="bl" rotWithShape="0" blurRad="114300" dist="38100" dir="5400000">
+              <a:srgbClr val="7A6A55">
+                <a:alpha val="12000"/>
               </a:srgbClr>
             </a:outerShdw>
           </a:effectLst>
@@ -8019,11 +7983,11 @@
             <a:r>
               <a:rPr lang="en-US" sz="3600" b="1" dirty="0">
                 <a:solidFill>
-                  <a:srgbClr val="C9A961"/>
-                </a:solidFill>
-                <a:latin typeface="Bookman Old Style" pitchFamily="34" charset="0"/>
-                <a:ea typeface="Bookman Old Style" pitchFamily="34" charset="-122"/>
-                <a:cs typeface="Bookman Old Style" pitchFamily="34" charset="-120"/>
+                  <a:srgbClr val="B1937E"/>
+                </a:solidFill>
+                <a:latin typeface="Georgia" pitchFamily="34" charset="0"/>
+                <a:ea typeface="Georgia" pitchFamily="34" charset="-122"/>
+                <a:cs typeface="Georgia" pitchFamily="34" charset="-120"/>
               </a:rPr>
               <a:t>03</a:t>
             </a:r>
@@ -8046,9 +8010,14 @@
             <a:avLst/>
           </a:prstGeom>
           <a:solidFill>
-            <a:srgbClr val="16314F"/>
+            <a:srgbClr val="EADFD0"/>
           </a:solidFill>
-          <a:ln/>
+          <a:ln w="9525">
+            <a:solidFill>
+              <a:srgbClr val="E3D9CC"/>
+            </a:solidFill>
+            <a:prstDash val="solid"/>
+          </a:ln>
         </p:spPr>
       </p:sp>
       <p:pic>
@@ -8102,11 +8071,11 @@
             <a:r>
               <a:rPr lang="en-US" sz="1900" b="1" dirty="0">
                 <a:solidFill>
-                  <a:srgbClr val="EAF1FA"/>
-                </a:solidFill>
-                <a:latin typeface="Bookman Old Style" pitchFamily="34" charset="0"/>
-                <a:ea typeface="Bookman Old Style" pitchFamily="34" charset="-122"/>
-                <a:cs typeface="Bookman Old Style" pitchFamily="34" charset="-120"/>
+                  <a:srgbClr val="33302B"/>
+                </a:solidFill>
+                <a:latin typeface="Georgia" pitchFamily="34" charset="0"/>
+                <a:ea typeface="Georgia" pitchFamily="34" charset="-122"/>
+                <a:cs typeface="Georgia" pitchFamily="34" charset="-120"/>
               </a:rPr>
               <a:t>Desenha a revelação</a:t>
             </a:r>
@@ -8141,7 +8110,7 @@
             <a:r>
               <a:rPr lang="en-US" sz="1300" dirty="0">
                 <a:solidFill>
-                  <a:srgbClr val="9FB2C9"/>
+                  <a:srgbClr val="8A7E72"/>
                 </a:solidFill>
                 <a:latin typeface="Calibri" pitchFamily="34" charset="0"/>
                 <a:ea typeface="Calibri" pitchFamily="34" charset="-122"/>
@@ -8170,7 +8139,7 @@
           <a:noFill/>
           <a:ln w="9525">
             <a:solidFill>
-              <a:srgbClr val="5C708A">
+              <a:srgbClr val="A89A86">
                 <a:alpha val="60000"/>
               </a:srgbClr>
             </a:solidFill>
@@ -8205,7 +8174,7 @@
             <a:r>
               <a:rPr lang="en-US" sz="900" dirty="0">
                 <a:solidFill>
-                  <a:srgbClr val="5C708A"/>
+                  <a:srgbClr val="A89A86"/>
                 </a:solidFill>
                 <a:latin typeface="Calibri" pitchFamily="34" charset="0"/>
                 <a:ea typeface="Calibri" pitchFamily="34" charset="-122"/>
@@ -8244,7 +8213,7 @@
             <a:r>
               <a:rPr lang="en-US" sz="900" dirty="0">
                 <a:solidFill>
-                  <a:srgbClr val="5C708A"/>
+                  <a:srgbClr val="A89A86"/>
                 </a:solidFill>
                 <a:latin typeface="Calibri" pitchFamily="34" charset="0"/>
                 <a:ea typeface="Calibri" pitchFamily="34" charset="-122"/>
@@ -8270,7 +8239,7 @@
     <p:bg>
       <p:bgPr>
         <a:solidFill>
-          <a:srgbClr val="102844"/>
+          <a:srgbClr val="EFE7DE"/>
         </a:solidFill>
       </p:bgPr>
     </p:bg>
@@ -8315,7 +8284,7 @@
             <a:r>
               <a:rPr lang="en-US" sz="1200" b="1" spc="300" kern="0" dirty="0">
                 <a:solidFill>
-                  <a:srgbClr val="C9A961"/>
+                  <a:srgbClr val="B1937E"/>
                 </a:solidFill>
                 <a:latin typeface="Calibri" pitchFamily="34" charset="0"/>
                 <a:ea typeface="Calibri" pitchFamily="34" charset="-122"/>
@@ -8357,11 +8326,11 @@
             <a:r>
               <a:rPr lang="en-US" sz="3200" b="1" dirty="0">
                 <a:solidFill>
-                  <a:srgbClr val="EAF1FA"/>
-                </a:solidFill>
-                <a:latin typeface="Bookman Old Style" pitchFamily="34" charset="0"/>
-                <a:ea typeface="Bookman Old Style" pitchFamily="34" charset="-122"/>
-                <a:cs typeface="Bookman Old Style" pitchFamily="34" charset="-120"/>
+                  <a:srgbClr val="33302B"/>
+                </a:solidFill>
+                <a:latin typeface="Georgia" pitchFamily="34" charset="0"/>
+                <a:ea typeface="Georgia" pitchFamily="34" charset="-122"/>
+                <a:cs typeface="Georgia" pitchFamily="34" charset="-120"/>
               </a:rPr>
               <a:t>O que trazes à próxima sessão</a:t>
             </a:r>
@@ -8386,18 +8355,18 @@
             </a:avLst>
           </a:prstGeom>
           <a:solidFill>
-            <a:srgbClr val="13283F"/>
+            <a:srgbClr val="FFFFFF"/>
           </a:solidFill>
           <a:ln w="19050">
             <a:solidFill>
-              <a:srgbClr val="C9A961"/>
+              <a:srgbClr val="B1937E"/>
             </a:solidFill>
             <a:prstDash val="solid"/>
           </a:ln>
           <a:effectLst>
-            <a:outerShdw sx="100000" sy="100000" kx="0" ky="0" algn="bl" rotWithShape="0" blurRad="127000" dist="38100" dir="5400000">
-              <a:srgbClr val="000000">
-                <a:alpha val="28000"/>
+            <a:outerShdw sx="100000" sy="100000" kx="0" ky="0" algn="bl" rotWithShape="0" blurRad="114300" dist="38100" dir="5400000">
+              <a:srgbClr val="7A6A55">
+                <a:alpha val="12000"/>
               </a:srgbClr>
             </a:outerShdw>
           </a:effectLst>
@@ -8430,11 +8399,11 @@
             <a:r>
               <a:rPr lang="en-US" sz="2300" b="1" dirty="0">
                 <a:solidFill>
-                  <a:srgbClr val="C9A961"/>
-                </a:solidFill>
-                <a:latin typeface="Bookman Old Style" pitchFamily="34" charset="0"/>
-                <a:ea typeface="Bookman Old Style" pitchFamily="34" charset="-122"/>
-                <a:cs typeface="Bookman Old Style" pitchFamily="34" charset="-120"/>
+                  <a:srgbClr val="B1937E"/>
+                </a:solidFill>
+                <a:latin typeface="Georgia" pitchFamily="34" charset="0"/>
+                <a:ea typeface="Georgia" pitchFamily="34" charset="-122"/>
+                <a:cs typeface="Georgia" pitchFamily="34" charset="-120"/>
               </a:rPr>
               <a:t>Sistema de Produção e Entrega</a:t>
             </a:r>
@@ -8493,7 +8462,7 @@
             <a:r>
               <a:rPr lang="en-US" sz="1550" dirty="0">
                 <a:solidFill>
-                  <a:srgbClr val="EAF1FA"/>
+                  <a:srgbClr val="33302B"/>
                 </a:solidFill>
                 <a:latin typeface="Calibri" pitchFamily="34" charset="0"/>
                 <a:ea typeface="Calibri" pitchFamily="34" charset="-122"/>
@@ -8556,7 +8525,7 @@
             <a:r>
               <a:rPr lang="en-US" sz="1550" dirty="0">
                 <a:solidFill>
-                  <a:srgbClr val="EAF1FA"/>
+                  <a:srgbClr val="33302B"/>
                 </a:solidFill>
                 <a:latin typeface="Calibri" pitchFamily="34" charset="0"/>
                 <a:ea typeface="Calibri" pitchFamily="34" charset="-122"/>
@@ -8619,7 +8588,7 @@
             <a:r>
               <a:rPr lang="en-US" sz="1550" dirty="0">
                 <a:solidFill>
-                  <a:srgbClr val="EAF1FA"/>
+                  <a:srgbClr val="33302B"/>
                 </a:solidFill>
                 <a:latin typeface="Calibri" pitchFamily="34" charset="0"/>
                 <a:ea typeface="Calibri" pitchFamily="34" charset="-122"/>
@@ -8658,7 +8627,7 @@
             <a:r>
               <a:rPr lang="en-US" sz="1500" i="1" dirty="0">
                 <a:solidFill>
-                  <a:srgbClr val="9FB2C9"/>
+                  <a:srgbClr val="8A7E72"/>
                 </a:solidFill>
                 <a:latin typeface="Calibri" pitchFamily="34" charset="0"/>
                 <a:ea typeface="Calibri" pitchFamily="34" charset="-122"/>
@@ -8687,7 +8656,7 @@
           <a:noFill/>
           <a:ln w="9525">
             <a:solidFill>
-              <a:srgbClr val="5C708A">
+              <a:srgbClr val="A89A86">
                 <a:alpha val="60000"/>
               </a:srgbClr>
             </a:solidFill>
@@ -8722,7 +8691,7 @@
             <a:r>
               <a:rPr lang="en-US" sz="900" dirty="0">
                 <a:solidFill>
-                  <a:srgbClr val="5C708A"/>
+                  <a:srgbClr val="A89A86"/>
                 </a:solidFill>
                 <a:latin typeface="Calibri" pitchFamily="34" charset="0"/>
                 <a:ea typeface="Calibri" pitchFamily="34" charset="-122"/>
@@ -8761,7 +8730,7 @@
             <a:r>
               <a:rPr lang="en-US" sz="900" dirty="0">
                 <a:solidFill>
-                  <a:srgbClr val="5C708A"/>
+                  <a:srgbClr val="A89A86"/>
                 </a:solidFill>
                 <a:latin typeface="Calibri" pitchFamily="34" charset="0"/>
                 <a:ea typeface="Calibri" pitchFamily="34" charset="-122"/>
@@ -8787,7 +8756,7 @@
     <p:bg>
       <p:bgPr>
         <a:solidFill>
-          <a:srgbClr val="0B1D33"/>
+          <a:srgbClr val="F8F6F3"/>
         </a:solidFill>
       </p:bgPr>
     </p:bg>
@@ -8832,7 +8801,7 @@
             <a:r>
               <a:rPr lang="en-US" sz="1200" b="1" spc="300" kern="0" dirty="0">
                 <a:solidFill>
-                  <a:srgbClr val="4A9EFF"/>
+                  <a:srgbClr val="9A7B66"/>
                 </a:solidFill>
                 <a:latin typeface="Calibri" pitchFamily="34" charset="0"/>
                 <a:ea typeface="Calibri" pitchFamily="34" charset="-122"/>
@@ -8874,11 +8843,11 @@
             <a:r>
               <a:rPr lang="en-US" sz="3600" b="1" dirty="0">
                 <a:solidFill>
-                  <a:srgbClr val="EAF1FA"/>
-                </a:solidFill>
-                <a:latin typeface="Bookman Old Style" pitchFamily="34" charset="0"/>
-                <a:ea typeface="Bookman Old Style" pitchFamily="34" charset="-122"/>
-                <a:cs typeface="Bookman Old Style" pitchFamily="34" charset="-120"/>
+                  <a:srgbClr val="33302B"/>
+                </a:solidFill>
+                <a:latin typeface="Georgia" pitchFamily="34" charset="0"/>
+                <a:ea typeface="Georgia" pitchFamily="34" charset="-122"/>
+                <a:cs typeface="Georgia" pitchFamily="34" charset="-120"/>
               </a:rPr>
               <a:t>Do caos ao sistema, ao uau</a:t>
             </a:r>
@@ -8903,13 +8872,18 @@
             </a:avLst>
           </a:prstGeom>
           <a:solidFill>
-            <a:srgbClr val="13283F"/>
+            <a:srgbClr val="FFFFFF"/>
           </a:solidFill>
-          <a:ln/>
+          <a:ln w="12700">
+            <a:solidFill>
+              <a:srgbClr val="E3D9CC"/>
+            </a:solidFill>
+            <a:prstDash val="solid"/>
+          </a:ln>
           <a:effectLst>
-            <a:outerShdw sx="100000" sy="100000" kx="0" ky="0" algn="bl" rotWithShape="0" blurRad="127000" dist="38100" dir="5400000">
-              <a:srgbClr val="000000">
-                <a:alpha val="28000"/>
+            <a:outerShdw sx="100000" sy="100000" kx="0" ky="0" algn="bl" rotWithShape="0" blurRad="114300" dist="38100" dir="5400000">
+              <a:srgbClr val="7A6A55">
+                <a:alpha val="12000"/>
               </a:srgbClr>
             </a:outerShdw>
           </a:effectLst>
@@ -8930,9 +8904,14 @@
             <a:avLst/>
           </a:prstGeom>
           <a:solidFill>
-            <a:srgbClr val="16314F"/>
+            <a:srgbClr val="EADFD0"/>
           </a:solidFill>
-          <a:ln/>
+          <a:ln w="9525">
+            <a:solidFill>
+              <a:srgbClr val="E3D9CC"/>
+            </a:solidFill>
+            <a:prstDash val="solid"/>
+          </a:ln>
         </p:spPr>
       </p:sp>
       <p:pic>
@@ -8986,11 +8965,11 @@
             <a:r>
               <a:rPr lang="en-US" sz="2800" b="1" dirty="0">
                 <a:solidFill>
-                  <a:srgbClr val="C9A961"/>
-                </a:solidFill>
-                <a:latin typeface="Bookman Old Style" pitchFamily="34" charset="0"/>
-                <a:ea typeface="Bookman Old Style" pitchFamily="34" charset="-122"/>
-                <a:cs typeface="Bookman Old Style" pitchFamily="34" charset="-120"/>
+                  <a:srgbClr val="B1937E"/>
+                </a:solidFill>
+                <a:latin typeface="Georgia" pitchFamily="34" charset="0"/>
+                <a:ea typeface="Georgia" pitchFamily="34" charset="-122"/>
+                <a:cs typeface="Georgia" pitchFamily="34" charset="-120"/>
               </a:rPr>
               <a:t>01</a:t>
             </a:r>
@@ -9025,7 +9004,7 @@
             <a:r>
               <a:rPr lang="en-US" sz="1800" b="1" dirty="0">
                 <a:solidFill>
-                  <a:srgbClr val="EAF1FA"/>
+                  <a:srgbClr val="33302B"/>
                 </a:solidFill>
                 <a:latin typeface="Calibri" pitchFamily="34" charset="0"/>
                 <a:ea typeface="Calibri" pitchFamily="34" charset="-122"/>
@@ -9064,7 +9043,7 @@
             <a:r>
               <a:rPr lang="en-US" sz="1300" dirty="0">
                 <a:solidFill>
-                  <a:srgbClr val="9FB2C9"/>
+                  <a:srgbClr val="8A7E72"/>
                 </a:solidFill>
                 <a:latin typeface="Calibri" pitchFamily="34" charset="0"/>
                 <a:ea typeface="Calibri" pitchFamily="34" charset="-122"/>
@@ -9093,13 +9072,18 @@
             </a:avLst>
           </a:prstGeom>
           <a:solidFill>
-            <a:srgbClr val="13283F"/>
+            <a:srgbClr val="FFFFFF"/>
           </a:solidFill>
-          <a:ln/>
+          <a:ln w="12700">
+            <a:solidFill>
+              <a:srgbClr val="E3D9CC"/>
+            </a:solidFill>
+            <a:prstDash val="solid"/>
+          </a:ln>
           <a:effectLst>
-            <a:outerShdw sx="100000" sy="100000" kx="0" ky="0" algn="bl" rotWithShape="0" blurRad="127000" dist="38100" dir="5400000">
-              <a:srgbClr val="000000">
-                <a:alpha val="28000"/>
+            <a:outerShdw sx="100000" sy="100000" kx="0" ky="0" algn="bl" rotWithShape="0" blurRad="114300" dist="38100" dir="5400000">
+              <a:srgbClr val="7A6A55">
+                <a:alpha val="12000"/>
               </a:srgbClr>
             </a:outerShdw>
           </a:effectLst>
@@ -9120,9 +9104,14 @@
             <a:avLst/>
           </a:prstGeom>
           <a:solidFill>
-            <a:srgbClr val="16314F"/>
+            <a:srgbClr val="EADFD0"/>
           </a:solidFill>
-          <a:ln/>
+          <a:ln w="9525">
+            <a:solidFill>
+              <a:srgbClr val="E3D9CC"/>
+            </a:solidFill>
+            <a:prstDash val="solid"/>
+          </a:ln>
         </p:spPr>
       </p:sp>
       <p:pic>
@@ -9176,11 +9165,11 @@
             <a:r>
               <a:rPr lang="en-US" sz="2800" b="1" dirty="0">
                 <a:solidFill>
-                  <a:srgbClr val="C9A961"/>
-                </a:solidFill>
-                <a:latin typeface="Bookman Old Style" pitchFamily="34" charset="0"/>
-                <a:ea typeface="Bookman Old Style" pitchFamily="34" charset="-122"/>
-                <a:cs typeface="Bookman Old Style" pitchFamily="34" charset="-120"/>
+                  <a:srgbClr val="B1937E"/>
+                </a:solidFill>
+                <a:latin typeface="Georgia" pitchFamily="34" charset="0"/>
+                <a:ea typeface="Georgia" pitchFamily="34" charset="-122"/>
+                <a:cs typeface="Georgia" pitchFamily="34" charset="-120"/>
               </a:rPr>
               <a:t>02</a:t>
             </a:r>
@@ -9215,7 +9204,7 @@
             <a:r>
               <a:rPr lang="en-US" sz="1800" b="1" dirty="0">
                 <a:solidFill>
-                  <a:srgbClr val="EAF1FA"/>
+                  <a:srgbClr val="33302B"/>
                 </a:solidFill>
                 <a:latin typeface="Calibri" pitchFamily="34" charset="0"/>
                 <a:ea typeface="Calibri" pitchFamily="34" charset="-122"/>
@@ -9254,7 +9243,7 @@
             <a:r>
               <a:rPr lang="en-US" sz="1300" dirty="0">
                 <a:solidFill>
-                  <a:srgbClr val="9FB2C9"/>
+                  <a:srgbClr val="8A7E72"/>
                 </a:solidFill>
                 <a:latin typeface="Calibri" pitchFamily="34" charset="0"/>
                 <a:ea typeface="Calibri" pitchFamily="34" charset="-122"/>
@@ -9283,13 +9272,18 @@
             </a:avLst>
           </a:prstGeom>
           <a:solidFill>
-            <a:srgbClr val="13283F"/>
+            <a:srgbClr val="FFFFFF"/>
           </a:solidFill>
-          <a:ln/>
+          <a:ln w="12700">
+            <a:solidFill>
+              <a:srgbClr val="E3D9CC"/>
+            </a:solidFill>
+            <a:prstDash val="solid"/>
+          </a:ln>
           <a:effectLst>
-            <a:outerShdw sx="100000" sy="100000" kx="0" ky="0" algn="bl" rotWithShape="0" blurRad="127000" dist="38100" dir="5400000">
-              <a:srgbClr val="000000">
-                <a:alpha val="28000"/>
+            <a:outerShdw sx="100000" sy="100000" kx="0" ky="0" algn="bl" rotWithShape="0" blurRad="114300" dist="38100" dir="5400000">
+              <a:srgbClr val="7A6A55">
+                <a:alpha val="12000"/>
               </a:srgbClr>
             </a:outerShdw>
           </a:effectLst>
@@ -9310,9 +9304,14 @@
             <a:avLst/>
           </a:prstGeom>
           <a:solidFill>
-            <a:srgbClr val="16314F"/>
+            <a:srgbClr val="EADFD0"/>
           </a:solidFill>
-          <a:ln/>
+          <a:ln w="9525">
+            <a:solidFill>
+              <a:srgbClr val="E3D9CC"/>
+            </a:solidFill>
+            <a:prstDash val="solid"/>
+          </a:ln>
         </p:spPr>
       </p:sp>
       <p:pic>
@@ -9366,11 +9365,11 @@
             <a:r>
               <a:rPr lang="en-US" sz="2800" b="1" dirty="0">
                 <a:solidFill>
-                  <a:srgbClr val="C9A961"/>
-                </a:solidFill>
-                <a:latin typeface="Bookman Old Style" pitchFamily="34" charset="0"/>
-                <a:ea typeface="Bookman Old Style" pitchFamily="34" charset="-122"/>
-                <a:cs typeface="Bookman Old Style" pitchFamily="34" charset="-120"/>
+                  <a:srgbClr val="B1937E"/>
+                </a:solidFill>
+                <a:latin typeface="Georgia" pitchFamily="34" charset="0"/>
+                <a:ea typeface="Georgia" pitchFamily="34" charset="-122"/>
+                <a:cs typeface="Georgia" pitchFamily="34" charset="-120"/>
               </a:rPr>
               <a:t>03</a:t>
             </a:r>
@@ -9405,7 +9404,7 @@
             <a:r>
               <a:rPr lang="en-US" sz="1800" b="1" dirty="0">
                 <a:solidFill>
-                  <a:srgbClr val="EAF1FA"/>
+                  <a:srgbClr val="33302B"/>
                 </a:solidFill>
                 <a:latin typeface="Calibri" pitchFamily="34" charset="0"/>
                 <a:ea typeface="Calibri" pitchFamily="34" charset="-122"/>
@@ -9444,7 +9443,7 @@
             <a:r>
               <a:rPr lang="en-US" sz="1300" dirty="0">
                 <a:solidFill>
-                  <a:srgbClr val="9FB2C9"/>
+                  <a:srgbClr val="8A7E72"/>
                 </a:solidFill>
                 <a:latin typeface="Calibri" pitchFamily="34" charset="0"/>
                 <a:ea typeface="Calibri" pitchFamily="34" charset="-122"/>
@@ -9473,13 +9472,18 @@
             </a:avLst>
           </a:prstGeom>
           <a:solidFill>
-            <a:srgbClr val="13283F"/>
+            <a:srgbClr val="FFFFFF"/>
           </a:solidFill>
-          <a:ln/>
+          <a:ln w="12700">
+            <a:solidFill>
+              <a:srgbClr val="E3D9CC"/>
+            </a:solidFill>
+            <a:prstDash val="solid"/>
+          </a:ln>
           <a:effectLst>
-            <a:outerShdw sx="100000" sy="100000" kx="0" ky="0" algn="bl" rotWithShape="0" blurRad="127000" dist="38100" dir="5400000">
-              <a:srgbClr val="000000">
-                <a:alpha val="28000"/>
+            <a:outerShdw sx="100000" sy="100000" kx="0" ky="0" algn="bl" rotWithShape="0" blurRad="114300" dist="38100" dir="5400000">
+              <a:srgbClr val="7A6A55">
+                <a:alpha val="12000"/>
               </a:srgbClr>
             </a:outerShdw>
           </a:effectLst>
@@ -9500,9 +9504,14 @@
             <a:avLst/>
           </a:prstGeom>
           <a:solidFill>
-            <a:srgbClr val="16314F"/>
+            <a:srgbClr val="EADFD0"/>
           </a:solidFill>
-          <a:ln/>
+          <a:ln w="9525">
+            <a:solidFill>
+              <a:srgbClr val="E3D9CC"/>
+            </a:solidFill>
+            <a:prstDash val="solid"/>
+          </a:ln>
         </p:spPr>
       </p:sp>
       <p:pic>
@@ -9556,11 +9565,11 @@
             <a:r>
               <a:rPr lang="en-US" sz="2800" b="1" dirty="0">
                 <a:solidFill>
-                  <a:srgbClr val="C9A961"/>
-                </a:solidFill>
-                <a:latin typeface="Bookman Old Style" pitchFamily="34" charset="0"/>
-                <a:ea typeface="Bookman Old Style" pitchFamily="34" charset="-122"/>
-                <a:cs typeface="Bookman Old Style" pitchFamily="34" charset="-120"/>
+                  <a:srgbClr val="B1937E"/>
+                </a:solidFill>
+                <a:latin typeface="Georgia" pitchFamily="34" charset="0"/>
+                <a:ea typeface="Georgia" pitchFamily="34" charset="-122"/>
+                <a:cs typeface="Georgia" pitchFamily="34" charset="-120"/>
               </a:rPr>
               <a:t>04</a:t>
             </a:r>
@@ -9595,7 +9604,7 @@
             <a:r>
               <a:rPr lang="en-US" sz="1800" b="1" dirty="0">
                 <a:solidFill>
-                  <a:srgbClr val="EAF1FA"/>
+                  <a:srgbClr val="33302B"/>
                 </a:solidFill>
                 <a:latin typeface="Calibri" pitchFamily="34" charset="0"/>
                 <a:ea typeface="Calibri" pitchFamily="34" charset="-122"/>
@@ -9634,7 +9643,7 @@
             <a:r>
               <a:rPr lang="en-US" sz="1300" dirty="0">
                 <a:solidFill>
-                  <a:srgbClr val="9FB2C9"/>
+                  <a:srgbClr val="8A7E72"/>
                 </a:solidFill>
                 <a:latin typeface="Calibri" pitchFamily="34" charset="0"/>
                 <a:ea typeface="Calibri" pitchFamily="34" charset="-122"/>
@@ -9663,7 +9672,7 @@
           <a:noFill/>
           <a:ln w="9525">
             <a:solidFill>
-              <a:srgbClr val="5C708A">
+              <a:srgbClr val="A89A86">
                 <a:alpha val="60000"/>
               </a:srgbClr>
             </a:solidFill>
@@ -9698,7 +9707,7 @@
             <a:r>
               <a:rPr lang="en-US" sz="900" dirty="0">
                 <a:solidFill>
-                  <a:srgbClr val="5C708A"/>
+                  <a:srgbClr val="A89A86"/>
                 </a:solidFill>
                 <a:latin typeface="Calibri" pitchFamily="34" charset="0"/>
                 <a:ea typeface="Calibri" pitchFamily="34" charset="-122"/>
@@ -9737,7 +9746,7 @@
             <a:r>
               <a:rPr lang="en-US" sz="900" dirty="0">
                 <a:solidFill>
-                  <a:srgbClr val="5C708A"/>
+                  <a:srgbClr val="A89A86"/>
                 </a:solidFill>
                 <a:latin typeface="Calibri" pitchFamily="34" charset="0"/>
                 <a:ea typeface="Calibri" pitchFamily="34" charset="-122"/>
@@ -9763,7 +9772,7 @@
     <p:bg>
       <p:bgPr>
         <a:solidFill>
-          <a:srgbClr val="0B1D33"/>
+          <a:srgbClr val="F8F6F3"/>
         </a:solidFill>
       </p:bgPr>
     </p:bg>
@@ -9783,51 +9792,7 @@
       </p:grpSpPr>
       <p:sp>
         <p:nvSpPr>
-          <p:cNvPr id="2" name="Shape 0"/>
-          <p:cNvSpPr/>
-          <p:nvPr/>
-        </p:nvSpPr>
-        <p:spPr>
-          <a:xfrm>
-            <a:off x="8046720" y="-1645920"/>
-            <a:ext cx="5943600" cy="5943600"/>
-          </a:xfrm>
-          <a:prstGeom prst="ellipse">
-            <a:avLst/>
-          </a:prstGeom>
-          <a:solidFill>
-            <a:srgbClr val="4A9EFF">
-              <a:alpha val="14000"/>
-            </a:srgbClr>
-          </a:solidFill>
-          <a:ln/>
-        </p:spPr>
-      </p:sp>
-      <p:sp>
-        <p:nvSpPr>
-          <p:cNvPr id="3" name="Shape 1"/>
-          <p:cNvSpPr/>
-          <p:nvPr/>
-        </p:nvSpPr>
-        <p:spPr>
-          <a:xfrm>
-            <a:off x="-1828800" y="4389120"/>
-            <a:ext cx="5029200" cy="5029200"/>
-          </a:xfrm>
-          <a:prstGeom prst="ellipse">
-            <a:avLst/>
-          </a:prstGeom>
-          <a:solidFill>
-            <a:srgbClr val="C9A961">
-              <a:alpha val="10000"/>
-            </a:srgbClr>
-          </a:solidFill>
-          <a:ln/>
-        </p:spPr>
-      </p:sp>
-      <p:sp>
-        <p:nvSpPr>
-          <p:cNvPr id="4" name="Text 2"/>
+          <p:cNvPr id="2" name="Text 0"/>
           <p:cNvSpPr/>
           <p:nvPr/>
         </p:nvSpPr>
@@ -9852,7 +9817,7 @@
             <a:r>
               <a:rPr lang="en-US" sz="1400" b="1" spc="500" kern="0" dirty="0">
                 <a:solidFill>
-                  <a:srgbClr val="C9A961"/>
+                  <a:srgbClr val="B1937E"/>
                 </a:solidFill>
                 <a:latin typeface="Calibri" pitchFamily="34" charset="0"/>
                 <a:ea typeface="Calibri" pitchFamily="34" charset="-122"/>
@@ -9866,7 +9831,7 @@
       </p:sp>
       <p:sp>
         <p:nvSpPr>
-          <p:cNvPr id="5" name="Text 3"/>
+          <p:cNvPr id="3" name="Text 1"/>
           <p:cNvSpPr/>
           <p:nvPr/>
         </p:nvSpPr>
@@ -9892,17 +9857,17 @@
               <a:buNone/>
             </a:pPr>
             <a:r>
-              <a:rPr lang="en-US" sz="4200" b="1" dirty="0">
-                <a:solidFill>
-                  <a:srgbClr val="EAF1FA"/>
-                </a:solidFill>
-                <a:latin typeface="Bookman Old Style" pitchFamily="34" charset="0"/>
-                <a:ea typeface="Bookman Old Style" pitchFamily="34" charset="-122"/>
-                <a:cs typeface="Bookman Old Style" pitchFamily="34" charset="-120"/>
+              <a:rPr lang="en-US" sz="3800" b="1" dirty="0">
+                <a:solidFill>
+                  <a:srgbClr val="33302B"/>
+                </a:solidFill>
+                <a:latin typeface="Georgia" pitchFamily="34" charset="0"/>
+                <a:ea typeface="Georgia" pitchFamily="34" charset="-122"/>
+                <a:cs typeface="Georgia" pitchFamily="34" charset="-120"/>
               </a:rPr>
               <a:t>Sessão 08: Pós-venda,</a:t>
             </a:r>
-            <a:endParaRPr lang="en-US" sz="4200" dirty="0"/>
+            <a:endParaRPr lang="en-US" sz="3800" dirty="0"/>
           </a:p>
           <a:p>
             <a:pPr indent="0" marL="0">
@@ -9912,23 +9877,23 @@
               <a:buNone/>
             </a:pPr>
             <a:r>
-              <a:rPr lang="en-US" sz="4200" b="1" dirty="0">
-                <a:solidFill>
-                  <a:srgbClr val="EAF1FA"/>
-                </a:solidFill>
-                <a:latin typeface="Bookman Old Style" pitchFamily="34" charset="0"/>
-                <a:ea typeface="Bookman Old Style" pitchFamily="34" charset="-122"/>
-                <a:cs typeface="Bookman Old Style" pitchFamily="34" charset="-120"/>
+              <a:rPr lang="en-US" sz="3800" b="1" dirty="0">
+                <a:solidFill>
+                  <a:srgbClr val="33302B"/>
+                </a:solidFill>
+                <a:latin typeface="Georgia" pitchFamily="34" charset="0"/>
+                <a:ea typeface="Georgia" pitchFamily="34" charset="-122"/>
+                <a:cs typeface="Georgia" pitchFamily="34" charset="-120"/>
               </a:rPr>
               <a:t>Escala e Sistemas</a:t>
             </a:r>
-            <a:endParaRPr lang="en-US" sz="4200" dirty="0"/>
-          </a:p>
-        </p:txBody>
-      </p:sp>
-      <p:sp>
-        <p:nvSpPr>
-          <p:cNvPr id="6" name="Text 4"/>
+            <a:endParaRPr lang="en-US" sz="3800" dirty="0"/>
+          </a:p>
+        </p:txBody>
+      </p:sp>
+      <p:sp>
+        <p:nvSpPr>
+          <p:cNvPr id="4" name="Text 2"/>
           <p:cNvSpPr/>
           <p:nvPr/>
         </p:nvSpPr>
@@ -9953,7 +9918,7 @@
             <a:r>
               <a:rPr lang="en-US" sz="1700" dirty="0">
                 <a:solidFill>
-                  <a:srgbClr val="9FB2C9"/>
+                  <a:srgbClr val="8A7E72"/>
                 </a:solidFill>
                 <a:latin typeface="Calibri" pitchFamily="34" charset="0"/>
                 <a:ea typeface="Calibri" pitchFamily="34" charset="-122"/>
@@ -9967,7 +9932,7 @@
       </p:sp>
       <p:sp>
         <p:nvSpPr>
-          <p:cNvPr id="7" name="Shape 5"/>
+          <p:cNvPr id="5" name="Shape 3"/>
           <p:cNvSpPr/>
           <p:nvPr/>
         </p:nvSpPr>
@@ -9982,51 +9947,36 @@
           <a:noFill/>
           <a:ln w="31750">
             <a:solidFill>
-              <a:srgbClr val="C9A961"/>
+              <a:srgbClr val="B1937E"/>
             </a:solidFill>
             <a:prstDash val="solid"/>
           </a:ln>
         </p:spPr>
       </p:sp>
-      <p:sp>
-        <p:nvSpPr>
-          <p:cNvPr id="8" name="Text 6"/>
-          <p:cNvSpPr/>
-          <p:nvPr/>
-        </p:nvSpPr>
-        <p:spPr>
-          <a:xfrm>
-            <a:off x="640080" y="5943600"/>
-            <a:ext cx="7315200" cy="365760"/>
-          </a:xfrm>
-          <a:prstGeom prst="rect">
-            <a:avLst/>
-          </a:prstGeom>
-          <a:noFill/>
-          <a:ln/>
-        </p:spPr>
-        <p:txBody>
-          <a:bodyPr wrap="square" lIns="0" tIns="0" rIns="0" bIns="0" rtlCol="0" anchor="ctr"/>
-          <a:lstStyle/>
-          <a:p>
-            <a:pPr indent="0" marL="0">
-              <a:buNone/>
-            </a:pPr>
-            <a:r>
-              <a:rPr lang="en-US" sz="1200" spc="400" kern="0" dirty="0">
-                <a:solidFill>
-                  <a:srgbClr val="5C708A"/>
-                </a:solidFill>
-                <a:latin typeface="Calibri" pitchFamily="34" charset="0"/>
-                <a:ea typeface="Calibri" pitchFamily="34" charset="-122"/>
-                <a:cs typeface="Calibri" pitchFamily="34" charset="-120"/>
-              </a:rPr>
-              <a:t>MENTORIA · RL</a:t>
-            </a:r>
-            <a:endParaRPr lang="en-US" sz="1200" dirty="0"/>
-          </a:p>
-        </p:txBody>
-      </p:sp>
+      <p:pic>
+        <p:nvPicPr>
+          <p:cNvPr id="6" name="Image 0" descr="preencoded.png">    </p:cNvPr>
+          <p:cNvPicPr>
+            <a:picLocks noChangeAspect="1"/>
+          </p:cNvPicPr>
+          <p:nvPr/>
+        </p:nvPicPr>
+        <p:blipFill>
+          <a:blip r:embed="rId1"/>
+          <a:stretch>
+            <a:fillRect/>
+          </a:stretch>
+        </p:blipFill>
+        <p:spPr>
+          <a:xfrm>
+            <a:off x="640080" y="502920"/>
+            <a:ext cx="1280160" cy="1320800"/>
+          </a:xfrm>
+          <a:prstGeom prst="rect">
+            <a:avLst/>
+          </a:prstGeom>
+        </p:spPr>
+      </p:pic>
     </p:spTree>
   </p:cSld>
   <p:clrMapOvr>
@@ -10041,7 +9991,7 @@
     <p:bg>
       <p:bgPr>
         <a:solidFill>
-          <a:srgbClr val="0B1D33"/>
+          <a:srgbClr val="F8F6F3"/>
         </a:solidFill>
       </p:bgPr>
     </p:bg>
@@ -10061,51 +10011,7 @@
       </p:grpSpPr>
       <p:sp>
         <p:nvSpPr>
-          <p:cNvPr id="2" name="Shape 0"/>
-          <p:cNvSpPr/>
-          <p:nvPr/>
-        </p:nvSpPr>
-        <p:spPr>
-          <a:xfrm>
-            <a:off x="7772400" y="-1371600"/>
-            <a:ext cx="5486400" cy="5486400"/>
-          </a:xfrm>
-          <a:prstGeom prst="ellipse">
-            <a:avLst/>
-          </a:prstGeom>
-          <a:solidFill>
-            <a:srgbClr val="4A9EFF">
-              <a:alpha val="10000"/>
-            </a:srgbClr>
-          </a:solidFill>
-          <a:ln/>
-        </p:spPr>
-      </p:sp>
-      <p:sp>
-        <p:nvSpPr>
-          <p:cNvPr id="3" name="Shape 1"/>
-          <p:cNvSpPr/>
-          <p:nvPr/>
-        </p:nvSpPr>
-        <p:spPr>
-          <a:xfrm>
-            <a:off x="-1371600" y="4114800"/>
-            <a:ext cx="4572000" cy="4572000"/>
-          </a:xfrm>
-          <a:prstGeom prst="ellipse">
-            <a:avLst/>
-          </a:prstGeom>
-          <a:solidFill>
-            <a:srgbClr val="C9A961">
-              <a:alpha val="8000"/>
-            </a:srgbClr>
-          </a:solidFill>
-          <a:ln/>
-        </p:spPr>
-      </p:sp>
-      <p:sp>
-        <p:nvSpPr>
-          <p:cNvPr id="4" name="Text 2"/>
+          <p:cNvPr id="2" name="Text 0"/>
           <p:cNvSpPr/>
           <p:nvPr/>
         </p:nvSpPr>
@@ -10130,11 +10036,11 @@
             <a:r>
               <a:rPr lang="en-US" sz="15000" b="1" dirty="0">
                 <a:solidFill>
-                  <a:srgbClr val="16314F"/>
-                </a:solidFill>
-                <a:latin typeface="Bookman Old Style" pitchFamily="34" charset="0"/>
-                <a:ea typeface="Bookman Old Style" pitchFamily="34" charset="-122"/>
-                <a:cs typeface="Bookman Old Style" pitchFamily="34" charset="-120"/>
+                  <a:srgbClr val="EADFD0"/>
+                </a:solidFill>
+                <a:latin typeface="Georgia" pitchFamily="34" charset="0"/>
+                <a:ea typeface="Georgia" pitchFamily="34" charset="-122"/>
+                <a:cs typeface="Georgia" pitchFamily="34" charset="-120"/>
               </a:rPr>
               <a:t>A</a:t>
             </a:r>
@@ -10144,7 +10050,7 @@
       </p:sp>
       <p:sp>
         <p:nvSpPr>
-          <p:cNvPr id="5" name="Text 3"/>
+          <p:cNvPr id="3" name="Text 1"/>
           <p:cNvSpPr/>
           <p:nvPr/>
         </p:nvSpPr>
@@ -10169,7 +10075,7 @@
             <a:r>
               <a:rPr lang="en-US" sz="1300" b="1" spc="400" kern="0" dirty="0">
                 <a:solidFill>
-                  <a:srgbClr val="C9A961"/>
+                  <a:srgbClr val="B1937E"/>
                 </a:solidFill>
                 <a:latin typeface="Calibri" pitchFamily="34" charset="0"/>
                 <a:ea typeface="Calibri" pitchFamily="34" charset="-122"/>
@@ -10183,7 +10089,7 @@
       </p:sp>
       <p:sp>
         <p:nvSpPr>
-          <p:cNvPr id="6" name="Text 4"/>
+          <p:cNvPr id="4" name="Text 2"/>
           <p:cNvSpPr/>
           <p:nvPr/>
         </p:nvSpPr>
@@ -10209,23 +10115,23 @@
               <a:buNone/>
             </a:pPr>
             <a:r>
-              <a:rPr lang="en-US" sz="4400" b="1" dirty="0">
-                <a:solidFill>
-                  <a:srgbClr val="EAF1FA"/>
-                </a:solidFill>
-                <a:latin typeface="Bookman Old Style" pitchFamily="34" charset="0"/>
-                <a:ea typeface="Bookman Old Style" pitchFamily="34" charset="-122"/>
-                <a:cs typeface="Bookman Old Style" pitchFamily="34" charset="-120"/>
+              <a:rPr lang="en-US" sz="4000" b="1" dirty="0">
+                <a:solidFill>
+                  <a:srgbClr val="33302B"/>
+                </a:solidFill>
+                <a:latin typeface="Georgia" pitchFamily="34" charset="0"/>
+                <a:ea typeface="Georgia" pitchFamily="34" charset="-122"/>
+                <a:cs typeface="Georgia" pitchFamily="34" charset="-120"/>
               </a:rPr>
               <a:t>Workflow que Escala</a:t>
             </a:r>
-            <a:endParaRPr lang="en-US" sz="4400" dirty="0"/>
-          </a:p>
-        </p:txBody>
-      </p:sp>
-      <p:sp>
-        <p:nvSpPr>
-          <p:cNvPr id="7" name="Text 5"/>
+            <a:endParaRPr lang="en-US" sz="4000" dirty="0"/>
+          </a:p>
+        </p:txBody>
+      </p:sp>
+      <p:sp>
+        <p:nvSpPr>
+          <p:cNvPr id="5" name="Text 3"/>
           <p:cNvSpPr/>
           <p:nvPr/>
         </p:nvSpPr>
@@ -10250,7 +10156,7 @@
             <a:r>
               <a:rPr lang="en-US" sz="1600" dirty="0">
                 <a:solidFill>
-                  <a:srgbClr val="9FB2C9"/>
+                  <a:srgbClr val="8A7E72"/>
                 </a:solidFill>
                 <a:latin typeface="Calibri" pitchFamily="34" charset="0"/>
                 <a:ea typeface="Calibri" pitchFamily="34" charset="-122"/>
@@ -10264,7 +10170,7 @@
       </p:sp>
       <p:sp>
         <p:nvSpPr>
-          <p:cNvPr id="8" name="Shape 6"/>
+          <p:cNvPr id="6" name="Shape 4"/>
           <p:cNvSpPr/>
           <p:nvPr/>
         </p:nvSpPr>
@@ -10279,7 +10185,7 @@
           <a:noFill/>
           <a:ln w="9525">
             <a:solidFill>
-              <a:srgbClr val="5C708A">
+              <a:srgbClr val="A89A86">
                 <a:alpha val="60000"/>
               </a:srgbClr>
             </a:solidFill>
@@ -10289,7 +10195,7 @@
       </p:sp>
       <p:sp>
         <p:nvSpPr>
-          <p:cNvPr id="9" name="Text 7"/>
+          <p:cNvPr id="7" name="Text 5"/>
           <p:cNvSpPr/>
           <p:nvPr/>
         </p:nvSpPr>
@@ -10314,7 +10220,7 @@
             <a:r>
               <a:rPr lang="en-US" sz="900" dirty="0">
                 <a:solidFill>
-                  <a:srgbClr val="5C708A"/>
+                  <a:srgbClr val="A89A86"/>
                 </a:solidFill>
                 <a:latin typeface="Calibri" pitchFamily="34" charset="0"/>
                 <a:ea typeface="Calibri" pitchFamily="34" charset="-122"/>
@@ -10328,7 +10234,7 @@
       </p:sp>
       <p:sp>
         <p:nvSpPr>
-          <p:cNvPr id="10" name="Text 8"/>
+          <p:cNvPr id="8" name="Text 6"/>
           <p:cNvSpPr/>
           <p:nvPr/>
         </p:nvSpPr>
@@ -10353,7 +10259,7 @@
             <a:r>
               <a:rPr lang="en-US" sz="900" dirty="0">
                 <a:solidFill>
-                  <a:srgbClr val="5C708A"/>
+                  <a:srgbClr val="A89A86"/>
                 </a:solidFill>
                 <a:latin typeface="Calibri" pitchFamily="34" charset="0"/>
                 <a:ea typeface="Calibri" pitchFamily="34" charset="-122"/>
@@ -10379,7 +10285,7 @@
     <p:bg>
       <p:bgPr>
         <a:solidFill>
-          <a:srgbClr val="0B1D33"/>
+          <a:srgbClr val="F8F6F3"/>
         </a:solidFill>
       </p:bgPr>
     </p:bg>
@@ -10399,51 +10305,7 @@
       </p:grpSpPr>
       <p:sp>
         <p:nvSpPr>
-          <p:cNvPr id="2" name="Shape 0"/>
-          <p:cNvSpPr/>
-          <p:nvPr/>
-        </p:nvSpPr>
-        <p:spPr>
-          <a:xfrm>
-            <a:off x="8229600" y="-1463040"/>
-            <a:ext cx="5486400" cy="5486400"/>
-          </a:xfrm>
-          <a:prstGeom prst="ellipse">
-            <a:avLst/>
-          </a:prstGeom>
-          <a:solidFill>
-            <a:srgbClr val="4A9EFF">
-              <a:alpha val="10000"/>
-            </a:srgbClr>
-          </a:solidFill>
-          <a:ln/>
-        </p:spPr>
-      </p:sp>
-      <p:sp>
-        <p:nvSpPr>
-          <p:cNvPr id="3" name="Shape 1"/>
-          <p:cNvSpPr/>
-          <p:nvPr/>
-        </p:nvSpPr>
-        <p:spPr>
-          <a:xfrm>
-            <a:off x="-1463040" y="4206240"/>
-            <a:ext cx="4572000" cy="4572000"/>
-          </a:xfrm>
-          <a:prstGeom prst="ellipse">
-            <a:avLst/>
-          </a:prstGeom>
-          <a:solidFill>
-            <a:srgbClr val="C9A961">
-              <a:alpha val="8000"/>
-            </a:srgbClr>
-          </a:solidFill>
-          <a:ln/>
-        </p:spPr>
-      </p:sp>
-      <p:sp>
-        <p:nvSpPr>
-          <p:cNvPr id="4" name="Text 2"/>
+          <p:cNvPr id="2" name="Text 0"/>
           <p:cNvSpPr/>
           <p:nvPr/>
         </p:nvSpPr>
@@ -10468,7 +10330,7 @@
             <a:r>
               <a:rPr lang="en-US" sz="1200" b="1" spc="300" kern="0" dirty="0">
                 <a:solidFill>
-                  <a:srgbClr val="4A9EFF"/>
+                  <a:srgbClr val="9A7B66"/>
                 </a:solidFill>
                 <a:latin typeface="Calibri" pitchFamily="34" charset="0"/>
                 <a:ea typeface="Calibri" pitchFamily="34" charset="-122"/>
@@ -10482,7 +10344,7 @@
       </p:sp>
       <p:sp>
         <p:nvSpPr>
-          <p:cNvPr id="5" name="Shape 3"/>
+          <p:cNvPr id="3" name="Shape 1"/>
           <p:cNvSpPr/>
           <p:nvPr/>
         </p:nvSpPr>
@@ -10495,14 +10357,19 @@
             <a:avLst/>
           </a:prstGeom>
           <a:solidFill>
-            <a:srgbClr val="16314F"/>
+            <a:srgbClr val="EADFD0"/>
           </a:solidFill>
-          <a:ln/>
+          <a:ln w="9525">
+            <a:solidFill>
+              <a:srgbClr val="E3D9CC"/>
+            </a:solidFill>
+            <a:prstDash val="solid"/>
+          </a:ln>
         </p:spPr>
       </p:sp>
       <p:pic>
         <p:nvPicPr>
-          <p:cNvPr id="6" name="Image 0" descr="preencoded.png">    </p:cNvPr>
+          <p:cNvPr id="4" name="Image 0" descr="preencoded.png">    </p:cNvPr>
           <p:cNvPicPr>
             <a:picLocks noChangeAspect="1"/>
           </p:cNvPicPr>
@@ -10526,7 +10393,7 @@
       </p:pic>
       <p:sp>
         <p:nvSpPr>
-          <p:cNvPr id="7" name="Text 4"/>
+          <p:cNvPr id="5" name="Text 2"/>
           <p:cNvSpPr/>
           <p:nvPr/>
         </p:nvSpPr>
@@ -10554,11 +10421,11 @@
             <a:r>
               <a:rPr lang="en-US" sz="2800" b="1" i="1" dirty="0">
                 <a:solidFill>
-                  <a:srgbClr val="EAF1FA"/>
-                </a:solidFill>
-                <a:latin typeface="Bookman Old Style" pitchFamily="34" charset="0"/>
-                <a:ea typeface="Bookman Old Style" pitchFamily="34" charset="-122"/>
-                <a:cs typeface="Bookman Old Style" pitchFamily="34" charset="-120"/>
+                  <a:srgbClr val="33302B"/>
+                </a:solidFill>
+                <a:latin typeface="Georgia" pitchFamily="34" charset="0"/>
+                <a:ea typeface="Georgia" pitchFamily="34" charset="-122"/>
+                <a:cs typeface="Georgia" pitchFamily="34" charset="-120"/>
               </a:rPr>
               <a:t>Sistema é o que separa quem fatura 100k de quem trabalha 100 horas.</a:t>
             </a:r>
@@ -10568,7 +10435,7 @@
       </p:sp>
       <p:sp>
         <p:nvSpPr>
-          <p:cNvPr id="8" name="Text 5"/>
+          <p:cNvPr id="6" name="Text 3"/>
           <p:cNvSpPr/>
           <p:nvPr/>
         </p:nvSpPr>
@@ -10593,7 +10460,7 @@
             <a:r>
               <a:rPr lang="en-US" sz="1600" dirty="0">
                 <a:solidFill>
-                  <a:srgbClr val="9FB2C9"/>
+                  <a:srgbClr val="8A7E72"/>
                 </a:solidFill>
                 <a:latin typeface="Calibri" pitchFamily="34" charset="0"/>
                 <a:ea typeface="Calibri" pitchFamily="34" charset="-122"/>
@@ -10607,7 +10474,7 @@
       </p:sp>
       <p:sp>
         <p:nvSpPr>
-          <p:cNvPr id="9" name="Shape 6"/>
+          <p:cNvPr id="7" name="Shape 4"/>
           <p:cNvSpPr/>
           <p:nvPr/>
         </p:nvSpPr>
@@ -10622,7 +10489,7 @@
           <a:noFill/>
           <a:ln w="9525">
             <a:solidFill>
-              <a:srgbClr val="5C708A">
+              <a:srgbClr val="A89A86">
                 <a:alpha val="60000"/>
               </a:srgbClr>
             </a:solidFill>
@@ -10632,7 +10499,7 @@
       </p:sp>
       <p:sp>
         <p:nvSpPr>
-          <p:cNvPr id="10" name="Text 7"/>
+          <p:cNvPr id="8" name="Text 5"/>
           <p:cNvSpPr/>
           <p:nvPr/>
         </p:nvSpPr>
@@ -10657,7 +10524,7 @@
             <a:r>
               <a:rPr lang="en-US" sz="900" dirty="0">
                 <a:solidFill>
-                  <a:srgbClr val="5C708A"/>
+                  <a:srgbClr val="A89A86"/>
                 </a:solidFill>
                 <a:latin typeface="Calibri" pitchFamily="34" charset="0"/>
                 <a:ea typeface="Calibri" pitchFamily="34" charset="-122"/>
@@ -10671,7 +10538,7 @@
       </p:sp>
       <p:sp>
         <p:nvSpPr>
-          <p:cNvPr id="11" name="Text 8"/>
+          <p:cNvPr id="9" name="Text 6"/>
           <p:cNvSpPr/>
           <p:nvPr/>
         </p:nvSpPr>
@@ -10696,7 +10563,7 @@
             <a:r>
               <a:rPr lang="en-US" sz="900" dirty="0">
                 <a:solidFill>
-                  <a:srgbClr val="5C708A"/>
+                  <a:srgbClr val="A89A86"/>
                 </a:solidFill>
                 <a:latin typeface="Calibri" pitchFamily="34" charset="0"/>
                 <a:ea typeface="Calibri" pitchFamily="34" charset="-122"/>
@@ -10722,7 +10589,7 @@
     <p:bg>
       <p:bgPr>
         <a:solidFill>
-          <a:srgbClr val="0B1D33"/>
+          <a:srgbClr val="F8F6F3"/>
         </a:solidFill>
       </p:bgPr>
     </p:bg>
@@ -10767,7 +10634,7 @@
             <a:r>
               <a:rPr lang="en-US" sz="1200" b="1" spc="300" kern="0" dirty="0">
                 <a:solidFill>
-                  <a:srgbClr val="4A9EFF"/>
+                  <a:srgbClr val="9A7B66"/>
                 </a:solidFill>
                 <a:latin typeface="Calibri" pitchFamily="34" charset="0"/>
                 <a:ea typeface="Calibri" pitchFamily="34" charset="-122"/>
@@ -10809,11 +10676,11 @@
             <a:r>
               <a:rPr lang="en-US" sz="3000" b="1" dirty="0">
                 <a:solidFill>
-                  <a:srgbClr val="EAF1FA"/>
-                </a:solidFill>
-                <a:latin typeface="Bookman Old Style" pitchFamily="34" charset="0"/>
-                <a:ea typeface="Bookman Old Style" pitchFamily="34" charset="-122"/>
-                <a:cs typeface="Bookman Old Style" pitchFamily="34" charset="-120"/>
+                  <a:srgbClr val="33302B"/>
+                </a:solidFill>
+                <a:latin typeface="Georgia" pitchFamily="34" charset="0"/>
+                <a:ea typeface="Georgia" pitchFamily="34" charset="-122"/>
+                <a:cs typeface="Georgia" pitchFamily="34" charset="-120"/>
               </a:rPr>
               <a:t>As 5 etapas do workflow</a:t>
             </a:r>
@@ -10838,13 +10705,18 @@
             </a:avLst>
           </a:prstGeom>
           <a:solidFill>
-            <a:srgbClr val="13283F"/>
+            <a:srgbClr val="FFFFFF"/>
           </a:solidFill>
-          <a:ln/>
+          <a:ln w="12700">
+            <a:solidFill>
+              <a:srgbClr val="E3D9CC"/>
+            </a:solidFill>
+            <a:prstDash val="solid"/>
+          </a:ln>
           <a:effectLst>
-            <a:outerShdw sx="100000" sy="100000" kx="0" ky="0" algn="bl" rotWithShape="0" blurRad="127000" dist="38100" dir="5400000">
-              <a:srgbClr val="000000">
-                <a:alpha val="28000"/>
+            <a:outerShdw sx="100000" sy="100000" kx="0" ky="0" algn="bl" rotWithShape="0" blurRad="114300" dist="38100" dir="5400000">
+              <a:srgbClr val="7A6A55">
+                <a:alpha val="12000"/>
               </a:srgbClr>
             </a:outerShdw>
           </a:effectLst>
@@ -10865,9 +10737,14 @@
             <a:avLst/>
           </a:prstGeom>
           <a:solidFill>
-            <a:srgbClr val="16314F"/>
+            <a:srgbClr val="EADFD0"/>
           </a:solidFill>
-          <a:ln/>
+          <a:ln w="9525">
+            <a:solidFill>
+              <a:srgbClr val="E3D9CC"/>
+            </a:solidFill>
+            <a:prstDash val="solid"/>
+          </a:ln>
         </p:spPr>
       </p:sp>
       <p:pic>
@@ -10921,11 +10798,11 @@
             <a:r>
               <a:rPr lang="en-US" sz="1700" b="1" dirty="0">
                 <a:solidFill>
-                  <a:srgbClr val="EAF1FA"/>
-                </a:solidFill>
-                <a:latin typeface="Bookman Old Style" pitchFamily="34" charset="0"/>
-                <a:ea typeface="Bookman Old Style" pitchFamily="34" charset="-122"/>
-                <a:cs typeface="Bookman Old Style" pitchFamily="34" charset="-120"/>
+                  <a:srgbClr val="33302B"/>
+                </a:solidFill>
+                <a:latin typeface="Georgia" pitchFamily="34" charset="0"/>
+                <a:ea typeface="Georgia" pitchFamily="34" charset="-122"/>
+                <a:cs typeface="Georgia" pitchFamily="34" charset="-120"/>
               </a:rPr>
               <a:t>Importar</a:t>
             </a:r>
@@ -10960,7 +10837,7 @@
             <a:r>
               <a:rPr lang="en-US" sz="1250" dirty="0">
                 <a:solidFill>
-                  <a:srgbClr val="9FB2C9"/>
+                  <a:srgbClr val="8A7E72"/>
                 </a:solidFill>
                 <a:latin typeface="Calibri" pitchFamily="34" charset="0"/>
                 <a:ea typeface="Calibri" pitchFamily="34" charset="-122"/>
@@ -11013,13 +10890,18 @@
             </a:avLst>
           </a:prstGeom>
           <a:solidFill>
-            <a:srgbClr val="13283F"/>
+            <a:srgbClr val="FFFFFF"/>
           </a:solidFill>
-          <a:ln/>
+          <a:ln w="12700">
+            <a:solidFill>
+              <a:srgbClr val="E3D9CC"/>
+            </a:solidFill>
+            <a:prstDash val="solid"/>
+          </a:ln>
           <a:effectLst>
-            <a:outerShdw sx="100000" sy="100000" kx="0" ky="0" algn="bl" rotWithShape="0" blurRad="127000" dist="38100" dir="5400000">
-              <a:srgbClr val="000000">
-                <a:alpha val="28000"/>
+            <a:outerShdw sx="100000" sy="100000" kx="0" ky="0" algn="bl" rotWithShape="0" blurRad="114300" dist="38100" dir="5400000">
+              <a:srgbClr val="7A6A55">
+                <a:alpha val="12000"/>
               </a:srgbClr>
             </a:outerShdw>
           </a:effectLst>
@@ -11040,9 +10922,14 @@
             <a:avLst/>
           </a:prstGeom>
           <a:solidFill>
-            <a:srgbClr val="16314F"/>
+            <a:srgbClr val="EADFD0"/>
           </a:solidFill>
-          <a:ln/>
+          <a:ln w="9525">
+            <a:solidFill>
+              <a:srgbClr val="E3D9CC"/>
+            </a:solidFill>
+            <a:prstDash val="solid"/>
+          </a:ln>
         </p:spPr>
       </p:sp>
       <p:pic>
@@ -11096,11 +10983,11 @@
             <a:r>
               <a:rPr lang="en-US" sz="1700" b="1" dirty="0">
                 <a:solidFill>
-                  <a:srgbClr val="EAF1FA"/>
-                </a:solidFill>
-                <a:latin typeface="Bookman Old Style" pitchFamily="34" charset="0"/>
-                <a:ea typeface="Bookman Old Style" pitchFamily="34" charset="-122"/>
-                <a:cs typeface="Bookman Old Style" pitchFamily="34" charset="-120"/>
+                  <a:srgbClr val="33302B"/>
+                </a:solidFill>
+                <a:latin typeface="Georgia" pitchFamily="34" charset="0"/>
+                <a:ea typeface="Georgia" pitchFamily="34" charset="-122"/>
+                <a:cs typeface="Georgia" pitchFamily="34" charset="-120"/>
               </a:rPr>
               <a:t>Selecionar</a:t>
             </a:r>
@@ -11135,7 +11022,7 @@
             <a:r>
               <a:rPr lang="en-US" sz="1250" dirty="0">
                 <a:solidFill>
-                  <a:srgbClr val="9FB2C9"/>
+                  <a:srgbClr val="8A7E72"/>
                 </a:solidFill>
                 <a:latin typeface="Calibri" pitchFamily="34" charset="0"/>
                 <a:ea typeface="Calibri" pitchFamily="34" charset="-122"/>
@@ -11188,13 +11075,18 @@
             </a:avLst>
           </a:prstGeom>
           <a:solidFill>
-            <a:srgbClr val="13283F"/>
+            <a:srgbClr val="FFFFFF"/>
           </a:solidFill>
-          <a:ln/>
+          <a:ln w="12700">
+            <a:solidFill>
+              <a:srgbClr val="E3D9CC"/>
+            </a:solidFill>
+            <a:prstDash val="solid"/>
+          </a:ln>
           <a:effectLst>
-            <a:outerShdw sx="100000" sy="100000" kx="0" ky="0" algn="bl" rotWithShape="0" blurRad="127000" dist="38100" dir="5400000">
-              <a:srgbClr val="000000">
-                <a:alpha val="28000"/>
+            <a:outerShdw sx="100000" sy="100000" kx="0" ky="0" algn="bl" rotWithShape="0" blurRad="114300" dist="38100" dir="5400000">
+              <a:srgbClr val="7A6A55">
+                <a:alpha val="12000"/>
               </a:srgbClr>
             </a:outerShdw>
           </a:effectLst>
@@ -11215,9 +11107,14 @@
             <a:avLst/>
           </a:prstGeom>
           <a:solidFill>
-            <a:srgbClr val="16314F"/>
+            <a:srgbClr val="EADFD0"/>
           </a:solidFill>
-          <a:ln/>
+          <a:ln w="9525">
+            <a:solidFill>
+              <a:srgbClr val="E3D9CC"/>
+            </a:solidFill>
+            <a:prstDash val="solid"/>
+          </a:ln>
         </p:spPr>
       </p:sp>
       <p:pic>
@@ -11271,11 +11168,11 @@
             <a:r>
               <a:rPr lang="en-US" sz="1700" b="1" dirty="0">
                 <a:solidFill>
-                  <a:srgbClr val="EAF1FA"/>
-                </a:solidFill>
-                <a:latin typeface="Bookman Old Style" pitchFamily="34" charset="0"/>
-                <a:ea typeface="Bookman Old Style" pitchFamily="34" charset="-122"/>
-                <a:cs typeface="Bookman Old Style" pitchFamily="34" charset="-120"/>
+                  <a:srgbClr val="33302B"/>
+                </a:solidFill>
+                <a:latin typeface="Georgia" pitchFamily="34" charset="0"/>
+                <a:ea typeface="Georgia" pitchFamily="34" charset="-122"/>
+                <a:cs typeface="Georgia" pitchFamily="34" charset="-120"/>
               </a:rPr>
               <a:t>Editar</a:t>
             </a:r>
@@ -11310,7 +11207,7 @@
             <a:r>
               <a:rPr lang="en-US" sz="1250" dirty="0">
                 <a:solidFill>
-                  <a:srgbClr val="9FB2C9"/>
+                  <a:srgbClr val="8A7E72"/>
                 </a:solidFill>
                 <a:latin typeface="Calibri" pitchFamily="34" charset="0"/>
                 <a:ea typeface="Calibri" pitchFamily="34" charset="-122"/>
@@ -11363,13 +11260,18 @@
             </a:avLst>
           </a:prstGeom>
           <a:solidFill>
-            <a:srgbClr val="13283F"/>
+            <a:srgbClr val="FFFFFF"/>
           </a:solidFill>
-          <a:ln/>
+          <a:ln w="12700">
+            <a:solidFill>
+              <a:srgbClr val="E3D9CC"/>
+            </a:solidFill>
+            <a:prstDash val="solid"/>
+          </a:ln>
           <a:effectLst>
-            <a:outerShdw sx="100000" sy="100000" kx="0" ky="0" algn="bl" rotWithShape="0" blurRad="127000" dist="38100" dir="5400000">
-              <a:srgbClr val="000000">
-                <a:alpha val="28000"/>
+            <a:outerShdw sx="100000" sy="100000" kx="0" ky="0" algn="bl" rotWithShape="0" blurRad="114300" dist="38100" dir="5400000">
+              <a:srgbClr val="7A6A55">
+                <a:alpha val="12000"/>
               </a:srgbClr>
             </a:outerShdw>
           </a:effectLst>
@@ -11390,9 +11292,14 @@
             <a:avLst/>
           </a:prstGeom>
           <a:solidFill>
-            <a:srgbClr val="16314F"/>
+            <a:srgbClr val="EADFD0"/>
           </a:solidFill>
-          <a:ln/>
+          <a:ln w="9525">
+            <a:solidFill>
+              <a:srgbClr val="E3D9CC"/>
+            </a:solidFill>
+            <a:prstDash val="solid"/>
+          </a:ln>
         </p:spPr>
       </p:sp>
       <p:pic>
@@ -11446,11 +11353,11 @@
             <a:r>
               <a:rPr lang="en-US" sz="1700" b="1" dirty="0">
                 <a:solidFill>
-                  <a:srgbClr val="EAF1FA"/>
-                </a:solidFill>
-                <a:latin typeface="Bookman Old Style" pitchFamily="34" charset="0"/>
-                <a:ea typeface="Bookman Old Style" pitchFamily="34" charset="-122"/>
-                <a:cs typeface="Bookman Old Style" pitchFamily="34" charset="-120"/>
+                  <a:srgbClr val="33302B"/>
+                </a:solidFill>
+                <a:latin typeface="Georgia" pitchFamily="34" charset="0"/>
+                <a:ea typeface="Georgia" pitchFamily="34" charset="-122"/>
+                <a:cs typeface="Georgia" pitchFamily="34" charset="-120"/>
               </a:rPr>
               <a:t>Rever &amp; entregar</a:t>
             </a:r>
@@ -11485,7 +11392,7 @@
             <a:r>
               <a:rPr lang="en-US" sz="1250" dirty="0">
                 <a:solidFill>
-                  <a:srgbClr val="9FB2C9"/>
+                  <a:srgbClr val="8A7E72"/>
                 </a:solidFill>
                 <a:latin typeface="Calibri" pitchFamily="34" charset="0"/>
                 <a:ea typeface="Calibri" pitchFamily="34" charset="-122"/>
@@ -11524,7 +11431,7 @@
             <a:r>
               <a:rPr lang="en-US" sz="1500" i="1" dirty="0">
                 <a:solidFill>
-                  <a:srgbClr val="C9A961"/>
+                  <a:srgbClr val="B1937E"/>
                 </a:solidFill>
                 <a:latin typeface="Calibri" pitchFamily="34" charset="0"/>
                 <a:ea typeface="Calibri" pitchFamily="34" charset="-122"/>
@@ -11553,7 +11460,7 @@
           <a:noFill/>
           <a:ln w="9525">
             <a:solidFill>
-              <a:srgbClr val="5C708A">
+              <a:srgbClr val="A89A86">
                 <a:alpha val="60000"/>
               </a:srgbClr>
             </a:solidFill>
@@ -11588,7 +11495,7 @@
             <a:r>
               <a:rPr lang="en-US" sz="900" dirty="0">
                 <a:solidFill>
-                  <a:srgbClr val="5C708A"/>
+                  <a:srgbClr val="A89A86"/>
                 </a:solidFill>
                 <a:latin typeface="Calibri" pitchFamily="34" charset="0"/>
                 <a:ea typeface="Calibri" pitchFamily="34" charset="-122"/>
@@ -11627,7 +11534,7 @@
             <a:r>
               <a:rPr lang="en-US" sz="900" dirty="0">
                 <a:solidFill>
-                  <a:srgbClr val="5C708A"/>
+                  <a:srgbClr val="A89A86"/>
                 </a:solidFill>
                 <a:latin typeface="Calibri" pitchFamily="34" charset="0"/>
                 <a:ea typeface="Calibri" pitchFamily="34" charset="-122"/>
@@ -11653,7 +11560,7 @@
     <p:bg>
       <p:bgPr>
         <a:solidFill>
-          <a:srgbClr val="0B1D33"/>
+          <a:srgbClr val="F8F6F3"/>
         </a:solidFill>
       </p:bgPr>
     </p:bg>
@@ -11698,7 +11605,7 @@
             <a:r>
               <a:rPr lang="en-US" sz="1200" b="1" spc="300" kern="0" dirty="0">
                 <a:solidFill>
-                  <a:srgbClr val="4A9EFF"/>
+                  <a:srgbClr val="9A7B66"/>
                 </a:solidFill>
                 <a:latin typeface="Calibri" pitchFamily="34" charset="0"/>
                 <a:ea typeface="Calibri" pitchFamily="34" charset="-122"/>
@@ -11740,11 +11647,11 @@
             <a:r>
               <a:rPr lang="en-US" sz="3200" b="1" dirty="0">
                 <a:solidFill>
-                  <a:srgbClr val="EAF1FA"/>
-                </a:solidFill>
-                <a:latin typeface="Bookman Old Style" pitchFamily="34" charset="0"/>
-                <a:ea typeface="Bookman Old Style" pitchFamily="34" charset="-122"/>
-                <a:cs typeface="Bookman Old Style" pitchFamily="34" charset="-120"/>
+                  <a:srgbClr val="33302B"/>
+                </a:solidFill>
+                <a:latin typeface="Georgia" pitchFamily="34" charset="0"/>
+                <a:ea typeface="Georgia" pitchFamily="34" charset="-122"/>
+                <a:cs typeface="Georgia" pitchFamily="34" charset="-120"/>
               </a:rPr>
               <a:t>Porque a organização paga</a:t>
             </a:r>
@@ -11769,13 +11676,18 @@
             </a:avLst>
           </a:prstGeom>
           <a:solidFill>
-            <a:srgbClr val="13283F"/>
+            <a:srgbClr val="FFFFFF"/>
           </a:solidFill>
-          <a:ln/>
+          <a:ln w="12700">
+            <a:solidFill>
+              <a:srgbClr val="E3D9CC"/>
+            </a:solidFill>
+            <a:prstDash val="solid"/>
+          </a:ln>
           <a:effectLst>
-            <a:outerShdw sx="100000" sy="100000" kx="0" ky="0" algn="bl" rotWithShape="0" blurRad="127000" dist="38100" dir="5400000">
-              <a:srgbClr val="000000">
-                <a:alpha val="28000"/>
+            <a:outerShdw sx="100000" sy="100000" kx="0" ky="0" algn="bl" rotWithShape="0" blurRad="114300" dist="38100" dir="5400000">
+              <a:srgbClr val="7A6A55">
+                <a:alpha val="12000"/>
               </a:srgbClr>
             </a:outerShdw>
           </a:effectLst>
@@ -11808,11 +11720,11 @@
             <a:r>
               <a:rPr lang="en-US" sz="4600" b="1" dirty="0">
                 <a:solidFill>
-                  <a:srgbClr val="C9A961"/>
-                </a:solidFill>
-                <a:latin typeface="Bookman Old Style" pitchFamily="34" charset="0"/>
-                <a:ea typeface="Bookman Old Style" pitchFamily="34" charset="-122"/>
-                <a:cs typeface="Bookman Old Style" pitchFamily="34" charset="-120"/>
+                  <a:srgbClr val="B1937E"/>
+                </a:solidFill>
+                <a:latin typeface="Georgia" pitchFamily="34" charset="0"/>
+                <a:ea typeface="Georgia" pitchFamily="34" charset="-122"/>
+                <a:cs typeface="Georgia" pitchFamily="34" charset="-120"/>
               </a:rPr>
               <a:t>25</a:t>
             </a:r>
@@ -11847,7 +11759,7 @@
             <a:r>
               <a:rPr lang="en-US" sz="1500" b="1" dirty="0">
                 <a:solidFill>
-                  <a:srgbClr val="EAF1FA"/>
+                  <a:srgbClr val="33302B"/>
                 </a:solidFill>
                 <a:latin typeface="Calibri" pitchFamily="34" charset="0"/>
                 <a:ea typeface="Calibri" pitchFamily="34" charset="-122"/>
@@ -11876,7 +11788,7 @@
           <a:noFill/>
           <a:ln w="9525">
             <a:solidFill>
-              <a:srgbClr val="5C708A">
+              <a:srgbClr val="A89A86">
                 <a:alpha val="60000"/>
               </a:srgbClr>
             </a:solidFill>
@@ -11911,7 +11823,7 @@
             <a:r>
               <a:rPr lang="en-US" sz="1300" dirty="0">
                 <a:solidFill>
-                  <a:srgbClr val="9FB2C9"/>
+                  <a:srgbClr val="8A7E72"/>
                 </a:solidFill>
                 <a:latin typeface="Calibri" pitchFamily="34" charset="0"/>
                 <a:ea typeface="Calibri" pitchFamily="34" charset="-122"/>
@@ -11940,13 +11852,18 @@
             </a:avLst>
           </a:prstGeom>
           <a:solidFill>
-            <a:srgbClr val="13283F"/>
+            <a:srgbClr val="FFFFFF"/>
           </a:solidFill>
-          <a:ln/>
+          <a:ln w="12700">
+            <a:solidFill>
+              <a:srgbClr val="E3D9CC"/>
+            </a:solidFill>
+            <a:prstDash val="solid"/>
+          </a:ln>
           <a:effectLst>
-            <a:outerShdw sx="100000" sy="100000" kx="0" ky="0" algn="bl" rotWithShape="0" blurRad="127000" dist="38100" dir="5400000">
-              <a:srgbClr val="000000">
-                <a:alpha val="28000"/>
+            <a:outerShdw sx="100000" sy="100000" kx="0" ky="0" algn="bl" rotWithShape="0" blurRad="114300" dist="38100" dir="5400000">
+              <a:srgbClr val="7A6A55">
+                <a:alpha val="12000"/>
               </a:srgbClr>
             </a:outerShdw>
           </a:effectLst>
@@ -11979,11 +11896,11 @@
             <a:r>
               <a:rPr lang="en-US" sz="4600" b="1" dirty="0">
                 <a:solidFill>
-                  <a:srgbClr val="4A9EFF"/>
-                </a:solidFill>
-                <a:latin typeface="Bookman Old Style" pitchFamily="34" charset="0"/>
-                <a:ea typeface="Bookman Old Style" pitchFamily="34" charset="-122"/>
-                <a:cs typeface="Bookman Old Style" pitchFamily="34" charset="-120"/>
+                  <a:srgbClr val="9A7B66"/>
+                </a:solidFill>
+                <a:latin typeface="Georgia" pitchFamily="34" charset="0"/>
+                <a:ea typeface="Georgia" pitchFamily="34" charset="-122"/>
+                <a:cs typeface="Georgia" pitchFamily="34" charset="-120"/>
               </a:rPr>
               <a:t>-tempo</a:t>
             </a:r>
@@ -12018,7 +11935,7 @@
             <a:r>
               <a:rPr lang="en-US" sz="1500" b="1" dirty="0">
                 <a:solidFill>
-                  <a:srgbClr val="EAF1FA"/>
+                  <a:srgbClr val="33302B"/>
                 </a:solidFill>
                 <a:latin typeface="Calibri" pitchFamily="34" charset="0"/>
                 <a:ea typeface="Calibri" pitchFamily="34" charset="-122"/>
@@ -12047,7 +11964,7 @@
           <a:noFill/>
           <a:ln w="9525">
             <a:solidFill>
-              <a:srgbClr val="5C708A">
+              <a:srgbClr val="A89A86">
                 <a:alpha val="60000"/>
               </a:srgbClr>
             </a:solidFill>
@@ -12082,7 +11999,7 @@
             <a:r>
               <a:rPr lang="en-US" sz="1300" dirty="0">
                 <a:solidFill>
-                  <a:srgbClr val="9FB2C9"/>
+                  <a:srgbClr val="8A7E72"/>
                 </a:solidFill>
                 <a:latin typeface="Calibri" pitchFamily="34" charset="0"/>
                 <a:ea typeface="Calibri" pitchFamily="34" charset="-122"/>
@@ -12111,13 +12028,18 @@
             </a:avLst>
           </a:prstGeom>
           <a:solidFill>
-            <a:srgbClr val="13283F"/>
+            <a:srgbClr val="FFFFFF"/>
           </a:solidFill>
-          <a:ln/>
+          <a:ln w="12700">
+            <a:solidFill>
+              <a:srgbClr val="E3D9CC"/>
+            </a:solidFill>
+            <a:prstDash val="solid"/>
+          </a:ln>
           <a:effectLst>
-            <a:outerShdw sx="100000" sy="100000" kx="0" ky="0" algn="bl" rotWithShape="0" blurRad="127000" dist="38100" dir="5400000">
-              <a:srgbClr val="000000">
-                <a:alpha val="28000"/>
+            <a:outerShdw sx="100000" sy="100000" kx="0" ky="0" algn="bl" rotWithShape="0" blurRad="114300" dist="38100" dir="5400000">
+              <a:srgbClr val="7A6A55">
+                <a:alpha val="12000"/>
               </a:srgbClr>
             </a:outerShdw>
           </a:effectLst>
@@ -12150,11 +12072,11 @@
             <a:r>
               <a:rPr lang="en-US" sz="3400" b="1" dirty="0">
                 <a:solidFill>
-                  <a:srgbClr val="4A9EFF"/>
-                </a:solidFill>
-                <a:latin typeface="Bookman Old Style" pitchFamily="34" charset="0"/>
-                <a:ea typeface="Bookman Old Style" pitchFamily="34" charset="-122"/>
-                <a:cs typeface="Bookman Old Style" pitchFamily="34" charset="-120"/>
+                  <a:srgbClr val="9A7B66"/>
+                </a:solidFill>
+                <a:latin typeface="Georgia" pitchFamily="34" charset="0"/>
+                <a:ea typeface="Georgia" pitchFamily="34" charset="-122"/>
+                <a:cs typeface="Georgia" pitchFamily="34" charset="-120"/>
               </a:rPr>
               <a:t>=qualidade</a:t>
             </a:r>
@@ -12189,7 +12111,7 @@
             <a:r>
               <a:rPr lang="en-US" sz="1500" b="1" dirty="0">
                 <a:solidFill>
-                  <a:srgbClr val="EAF1FA"/>
+                  <a:srgbClr val="33302B"/>
                 </a:solidFill>
                 <a:latin typeface="Calibri" pitchFamily="34" charset="0"/>
                 <a:ea typeface="Calibri" pitchFamily="34" charset="-122"/>
@@ -12218,7 +12140,7 @@
           <a:noFill/>
           <a:ln w="9525">
             <a:solidFill>
-              <a:srgbClr val="5C708A">
+              <a:srgbClr val="A89A86">
                 <a:alpha val="60000"/>
               </a:srgbClr>
             </a:solidFill>
@@ -12253,7 +12175,7 @@
             <a:r>
               <a:rPr lang="en-US" sz="1300" dirty="0">
                 <a:solidFill>
-                  <a:srgbClr val="9FB2C9"/>
+                  <a:srgbClr val="8A7E72"/>
                 </a:solidFill>
                 <a:latin typeface="Calibri" pitchFamily="34" charset="0"/>
                 <a:ea typeface="Calibri" pitchFamily="34" charset="-122"/>
@@ -12282,7 +12204,7 @@
           <a:noFill/>
           <a:ln w="9525">
             <a:solidFill>
-              <a:srgbClr val="5C708A">
+              <a:srgbClr val="A89A86">
                 <a:alpha val="60000"/>
               </a:srgbClr>
             </a:solidFill>
@@ -12317,7 +12239,7 @@
             <a:r>
               <a:rPr lang="en-US" sz="900" dirty="0">
                 <a:solidFill>
-                  <a:srgbClr val="5C708A"/>
+                  <a:srgbClr val="A89A86"/>
                 </a:solidFill>
                 <a:latin typeface="Calibri" pitchFamily="34" charset="0"/>
                 <a:ea typeface="Calibri" pitchFamily="34" charset="-122"/>
@@ -12356,7 +12278,7 @@
             <a:r>
               <a:rPr lang="en-US" sz="900" dirty="0">
                 <a:solidFill>
-                  <a:srgbClr val="5C708A"/>
+                  <a:srgbClr val="A89A86"/>
                 </a:solidFill>
                 <a:latin typeface="Calibri" pitchFamily="34" charset="0"/>
                 <a:ea typeface="Calibri" pitchFamily="34" charset="-122"/>
@@ -12382,7 +12304,7 @@
     <p:bg>
       <p:bgPr>
         <a:solidFill>
-          <a:srgbClr val="0B1D33"/>
+          <a:srgbClr val="F8F6F3"/>
         </a:solidFill>
       </p:bgPr>
     </p:bg>
@@ -12427,7 +12349,7 @@
             <a:r>
               <a:rPr lang="en-US" sz="1200" b="1" spc="300" kern="0" dirty="0">
                 <a:solidFill>
-                  <a:srgbClr val="4A9EFF"/>
+                  <a:srgbClr val="9A7B66"/>
                 </a:solidFill>
                 <a:latin typeface="Calibri" pitchFamily="34" charset="0"/>
                 <a:ea typeface="Calibri" pitchFamily="34" charset="-122"/>
@@ -12469,11 +12391,11 @@
             <a:r>
               <a:rPr lang="en-US" sz="3200" b="1" dirty="0">
                 <a:solidFill>
-                  <a:srgbClr val="EAF1FA"/>
-                </a:solidFill>
-                <a:latin typeface="Bookman Old Style" pitchFamily="34" charset="0"/>
-                <a:ea typeface="Bookman Old Style" pitchFamily="34" charset="-122"/>
-                <a:cs typeface="Bookman Old Style" pitchFamily="34" charset="-120"/>
+                  <a:srgbClr val="33302B"/>
+                </a:solidFill>
+                <a:latin typeface="Georgia" pitchFamily="34" charset="0"/>
+                <a:ea typeface="Georgia" pitchFamily="34" charset="-122"/>
+                <a:cs typeface="Georgia" pitchFamily="34" charset="-120"/>
               </a:rPr>
               <a:t>Gestão de prazos e expectativas</a:t>
             </a:r>
@@ -12498,13 +12420,18 @@
             </a:avLst>
           </a:prstGeom>
           <a:solidFill>
-            <a:srgbClr val="13283F"/>
+            <a:srgbClr val="FFFFFF"/>
           </a:solidFill>
-          <a:ln/>
+          <a:ln w="12700">
+            <a:solidFill>
+              <a:srgbClr val="E3D9CC"/>
+            </a:solidFill>
+            <a:prstDash val="solid"/>
+          </a:ln>
           <a:effectLst>
-            <a:outerShdw sx="100000" sy="100000" kx="0" ky="0" algn="bl" rotWithShape="0" blurRad="127000" dist="38100" dir="5400000">
-              <a:srgbClr val="000000">
-                <a:alpha val="28000"/>
+            <a:outerShdw sx="100000" sy="100000" kx="0" ky="0" algn="bl" rotWithShape="0" blurRad="114300" dist="38100" dir="5400000">
+              <a:srgbClr val="7A6A55">
+                <a:alpha val="12000"/>
               </a:srgbClr>
             </a:outerShdw>
           </a:effectLst>
@@ -12525,9 +12452,14 @@
             <a:avLst/>
           </a:prstGeom>
           <a:solidFill>
-            <a:srgbClr val="16314F"/>
+            <a:srgbClr val="EADFD0"/>
           </a:solidFill>
-          <a:ln/>
+          <a:ln w="9525">
+            <a:solidFill>
+              <a:srgbClr val="E3D9CC"/>
+            </a:solidFill>
+            <a:prstDash val="solid"/>
+          </a:ln>
         </p:spPr>
       </p:sp>
       <p:pic>
@@ -12581,11 +12513,11 @@
             <a:r>
               <a:rPr lang="en-US" sz="1900" b="1" dirty="0">
                 <a:solidFill>
-                  <a:srgbClr val="C9A961"/>
-                </a:solidFill>
-                <a:latin typeface="Bookman Old Style" pitchFamily="34" charset="0"/>
-                <a:ea typeface="Bookman Old Style" pitchFamily="34" charset="-122"/>
-                <a:cs typeface="Bookman Old Style" pitchFamily="34" charset="-120"/>
+                  <a:srgbClr val="B1937E"/>
+                </a:solidFill>
+                <a:latin typeface="Georgia" pitchFamily="34" charset="0"/>
+                <a:ea typeface="Georgia" pitchFamily="34" charset="-122"/>
+                <a:cs typeface="Georgia" pitchFamily="34" charset="-120"/>
               </a:rPr>
               <a:t>Promete realista</a:t>
             </a:r>
@@ -12620,7 +12552,7 @@
             <a:r>
               <a:rPr lang="en-US" sz="1400" dirty="0">
                 <a:solidFill>
-                  <a:srgbClr val="9FB2C9"/>
+                  <a:srgbClr val="8A7E72"/>
                 </a:solidFill>
                 <a:latin typeface="Calibri" pitchFamily="34" charset="0"/>
                 <a:ea typeface="Calibri" pitchFamily="34" charset="-122"/>
@@ -12649,13 +12581,18 @@
             </a:avLst>
           </a:prstGeom>
           <a:solidFill>
-            <a:srgbClr val="13283F"/>
+            <a:srgbClr val="FFFFFF"/>
           </a:solidFill>
-          <a:ln/>
+          <a:ln w="12700">
+            <a:solidFill>
+              <a:srgbClr val="E3D9CC"/>
+            </a:solidFill>
+            <a:prstDash val="solid"/>
+          </a:ln>
           <a:effectLst>
-            <a:outerShdw sx="100000" sy="100000" kx="0" ky="0" algn="bl" rotWithShape="0" blurRad="127000" dist="38100" dir="5400000">
-              <a:srgbClr val="000000">
-                <a:alpha val="28000"/>
+            <a:outerShdw sx="100000" sy="100000" kx="0" ky="0" algn="bl" rotWithShape="0" blurRad="114300" dist="38100" dir="5400000">
+              <a:srgbClr val="7A6A55">
+                <a:alpha val="12000"/>
               </a:srgbClr>
             </a:outerShdw>
           </a:effectLst>
@@ -12676,9 +12613,14 @@
             <a:avLst/>
           </a:prstGeom>
           <a:solidFill>
-            <a:srgbClr val="16314F"/>
+            <a:srgbClr val="EADFD0"/>
           </a:solidFill>
-          <a:ln/>
+          <a:ln w="9525">
+            <a:solidFill>
+              <a:srgbClr val="E3D9CC"/>
+            </a:solidFill>
+            <a:prstDash val="solid"/>
+          </a:ln>
         </p:spPr>
       </p:sp>
       <p:pic>
@@ -12732,11 +12674,11 @@
             <a:r>
               <a:rPr lang="en-US" sz="1900" b="1" dirty="0">
                 <a:solidFill>
-                  <a:srgbClr val="C9A961"/>
-                </a:solidFill>
-                <a:latin typeface="Bookman Old Style" pitchFamily="34" charset="0"/>
-                <a:ea typeface="Bookman Old Style" pitchFamily="34" charset="-122"/>
-                <a:cs typeface="Bookman Old Style" pitchFamily="34" charset="-120"/>
+                  <a:srgbClr val="B1937E"/>
+                </a:solidFill>
+                <a:latin typeface="Georgia" pitchFamily="34" charset="0"/>
+                <a:ea typeface="Georgia" pitchFamily="34" charset="-122"/>
+                <a:cs typeface="Georgia" pitchFamily="34" charset="-120"/>
               </a:rPr>
               <a:t>Comunica no onboarding</a:t>
             </a:r>
@@ -12771,7 +12713,7 @@
             <a:r>
               <a:rPr lang="en-US" sz="1400" dirty="0">
                 <a:solidFill>
-                  <a:srgbClr val="9FB2C9"/>
+                  <a:srgbClr val="8A7E72"/>
                 </a:solidFill>
                 <a:latin typeface="Calibri" pitchFamily="34" charset="0"/>
                 <a:ea typeface="Calibri" pitchFamily="34" charset="-122"/>
@@ -12800,13 +12742,18 @@
             </a:avLst>
           </a:prstGeom>
           <a:solidFill>
-            <a:srgbClr val="13283F"/>
+            <a:srgbClr val="FFFFFF"/>
           </a:solidFill>
-          <a:ln/>
+          <a:ln w="12700">
+            <a:solidFill>
+              <a:srgbClr val="E3D9CC"/>
+            </a:solidFill>
+            <a:prstDash val="solid"/>
+          </a:ln>
           <a:effectLst>
-            <a:outerShdw sx="100000" sy="100000" kx="0" ky="0" algn="bl" rotWithShape="0" blurRad="127000" dist="38100" dir="5400000">
-              <a:srgbClr val="000000">
-                <a:alpha val="28000"/>
+            <a:outerShdw sx="100000" sy="100000" kx="0" ky="0" algn="bl" rotWithShape="0" blurRad="114300" dist="38100" dir="5400000">
+              <a:srgbClr val="7A6A55">
+                <a:alpha val="12000"/>
               </a:srgbClr>
             </a:outerShdw>
           </a:effectLst>
@@ -12827,9 +12774,14 @@
             <a:avLst/>
           </a:prstGeom>
           <a:solidFill>
-            <a:srgbClr val="16314F"/>
+            <a:srgbClr val="EADFD0"/>
           </a:solidFill>
-          <a:ln/>
+          <a:ln w="9525">
+            <a:solidFill>
+              <a:srgbClr val="E3D9CC"/>
+            </a:solidFill>
+            <a:prstDash val="solid"/>
+          </a:ln>
         </p:spPr>
       </p:sp>
       <p:pic>
@@ -12883,11 +12835,11 @@
             <a:r>
               <a:rPr lang="en-US" sz="1900" b="1" dirty="0">
                 <a:solidFill>
-                  <a:srgbClr val="C9A961"/>
-                </a:solidFill>
-                <a:latin typeface="Bookman Old Style" pitchFamily="34" charset="0"/>
-                <a:ea typeface="Bookman Old Style" pitchFamily="34" charset="-122"/>
-                <a:cs typeface="Bookman Old Style" pitchFamily="34" charset="-120"/>
+                  <a:srgbClr val="B1937E"/>
+                </a:solidFill>
+                <a:latin typeface="Georgia" pitchFamily="34" charset="0"/>
+                <a:ea typeface="Georgia" pitchFamily="34" charset="-122"/>
+                <a:cs typeface="Georgia" pitchFamily="34" charset="-120"/>
               </a:rPr>
               <a:t>Gere a expectativa</a:t>
             </a:r>
@@ -12922,7 +12874,7 @@
             <a:r>
               <a:rPr lang="en-US" sz="1400" dirty="0">
                 <a:solidFill>
-                  <a:srgbClr val="9FB2C9"/>
+                  <a:srgbClr val="8A7E72"/>
                 </a:solidFill>
                 <a:latin typeface="Calibri" pitchFamily="34" charset="0"/>
                 <a:ea typeface="Calibri" pitchFamily="34" charset="-122"/>
@@ -12951,7 +12903,7 @@
           <a:noFill/>
           <a:ln w="9525">
             <a:solidFill>
-              <a:srgbClr val="5C708A">
+              <a:srgbClr val="A89A86">
                 <a:alpha val="60000"/>
               </a:srgbClr>
             </a:solidFill>
@@ -12986,7 +12938,7 @@
             <a:r>
               <a:rPr lang="en-US" sz="900" dirty="0">
                 <a:solidFill>
-                  <a:srgbClr val="5C708A"/>
+                  <a:srgbClr val="A89A86"/>
                 </a:solidFill>
                 <a:latin typeface="Calibri" pitchFamily="34" charset="0"/>
                 <a:ea typeface="Calibri" pitchFamily="34" charset="-122"/>
@@ -13025,7 +12977,7 @@
             <a:r>
               <a:rPr lang="en-US" sz="900" dirty="0">
                 <a:solidFill>
-                  <a:srgbClr val="5C708A"/>
+                  <a:srgbClr val="A89A86"/>
                 </a:solidFill>
                 <a:latin typeface="Calibri" pitchFamily="34" charset="0"/>
                 <a:ea typeface="Calibri" pitchFamily="34" charset="-122"/>
@@ -13051,7 +13003,7 @@
     <p:bg>
       <p:bgPr>
         <a:solidFill>
-          <a:srgbClr val="0B1D33"/>
+          <a:srgbClr val="F8F6F3"/>
         </a:solidFill>
       </p:bgPr>
     </p:bg>
@@ -13096,7 +13048,7 @@
             <a:r>
               <a:rPr lang="en-US" sz="1200" b="1" spc="300" kern="0" dirty="0">
                 <a:solidFill>
-                  <a:srgbClr val="4A9EFF"/>
+                  <a:srgbClr val="9A7B66"/>
                 </a:solidFill>
                 <a:latin typeface="Calibri" pitchFamily="34" charset="0"/>
                 <a:ea typeface="Calibri" pitchFamily="34" charset="-122"/>
@@ -13138,11 +13090,11 @@
             <a:r>
               <a:rPr lang="en-US" sz="3200" b="1" dirty="0">
                 <a:solidFill>
-                  <a:srgbClr val="EAF1FA"/>
-                </a:solidFill>
-                <a:latin typeface="Bookman Old Style" pitchFamily="34" charset="0"/>
-                <a:ea typeface="Bookman Old Style" pitchFamily="34" charset="-122"/>
-                <a:cs typeface="Bookman Old Style" pitchFamily="34" charset="-120"/>
+                  <a:srgbClr val="33302B"/>
+                </a:solidFill>
+                <a:latin typeface="Georgia" pitchFamily="34" charset="0"/>
+                <a:ea typeface="Georgia" pitchFamily="34" charset="-122"/>
+                <a:cs typeface="Georgia" pitchFamily="34" charset="-120"/>
               </a:rPr>
               <a:t>O que comunicar ao casal</a:t>
             </a:r>
@@ -13167,13 +13119,18 @@
             </a:avLst>
           </a:prstGeom>
           <a:solidFill>
-            <a:srgbClr val="13283F"/>
+            <a:srgbClr val="FFFFFF"/>
           </a:solidFill>
-          <a:ln/>
+          <a:ln w="12700">
+            <a:solidFill>
+              <a:srgbClr val="E3D9CC"/>
+            </a:solidFill>
+            <a:prstDash val="solid"/>
+          </a:ln>
           <a:effectLst>
-            <a:outerShdw sx="100000" sy="100000" kx="0" ky="0" algn="bl" rotWithShape="0" blurRad="127000" dist="38100" dir="5400000">
-              <a:srgbClr val="000000">
-                <a:alpha val="28000"/>
+            <a:outerShdw sx="100000" sy="100000" kx="0" ky="0" algn="bl" rotWithShape="0" blurRad="114300" dist="38100" dir="5400000">
+              <a:srgbClr val="7A6A55">
+                <a:alpha val="12000"/>
               </a:srgbClr>
             </a:outerShdw>
           </a:effectLst>
@@ -13194,9 +13151,14 @@
             <a:avLst/>
           </a:prstGeom>
           <a:solidFill>
-            <a:srgbClr val="16314F"/>
+            <a:srgbClr val="EADFD0"/>
           </a:solidFill>
-          <a:ln/>
+          <a:ln w="9525">
+            <a:solidFill>
+              <a:srgbClr val="E3D9CC"/>
+            </a:solidFill>
+            <a:prstDash val="solid"/>
+          </a:ln>
         </p:spPr>
       </p:sp>
       <p:pic>
@@ -13250,11 +13212,11 @@
             <a:r>
               <a:rPr lang="en-US" sz="1800" b="1" dirty="0">
                 <a:solidFill>
-                  <a:srgbClr val="C9A961"/>
-                </a:solidFill>
-                <a:latin typeface="Bookman Old Style" pitchFamily="34" charset="0"/>
-                <a:ea typeface="Bookman Old Style" pitchFamily="34" charset="-122"/>
-                <a:cs typeface="Bookman Old Style" pitchFamily="34" charset="-120"/>
+                  <a:srgbClr val="B1937E"/>
+                </a:solidFill>
+                <a:latin typeface="Georgia" pitchFamily="34" charset="0"/>
+                <a:ea typeface="Georgia" pitchFamily="34" charset="-122"/>
+                <a:cs typeface="Georgia" pitchFamily="34" charset="-120"/>
               </a:rPr>
               <a:t>Sneak peek</a:t>
             </a:r>
@@ -13289,7 +13251,7 @@
             <a:r>
               <a:rPr lang="en-US" sz="1350" dirty="0">
                 <a:solidFill>
-                  <a:srgbClr val="9FB2C9"/>
+                  <a:srgbClr val="8A7E72"/>
                 </a:solidFill>
                 <a:latin typeface="Calibri" pitchFamily="34" charset="0"/>
                 <a:ea typeface="Calibri" pitchFamily="34" charset="-122"/>
@@ -13318,13 +13280,18 @@
             </a:avLst>
           </a:prstGeom>
           <a:solidFill>
-            <a:srgbClr val="13283F"/>
+            <a:srgbClr val="FFFFFF"/>
           </a:solidFill>
-          <a:ln/>
+          <a:ln w="12700">
+            <a:solidFill>
+              <a:srgbClr val="E3D9CC"/>
+            </a:solidFill>
+            <a:prstDash val="solid"/>
+          </a:ln>
           <a:effectLst>
-            <a:outerShdw sx="100000" sy="100000" kx="0" ky="0" algn="bl" rotWithShape="0" blurRad="127000" dist="38100" dir="5400000">
-              <a:srgbClr val="000000">
-                <a:alpha val="28000"/>
+            <a:outerShdw sx="100000" sy="100000" kx="0" ky="0" algn="bl" rotWithShape="0" blurRad="114300" dist="38100" dir="5400000">
+              <a:srgbClr val="7A6A55">
+                <a:alpha val="12000"/>
               </a:srgbClr>
             </a:outerShdw>
           </a:effectLst>
@@ -13345,9 +13312,14 @@
             <a:avLst/>
           </a:prstGeom>
           <a:solidFill>
-            <a:srgbClr val="16314F"/>
+            <a:srgbClr val="EADFD0"/>
           </a:solidFill>
-          <a:ln/>
+          <a:ln w="9525">
+            <a:solidFill>
+              <a:srgbClr val="E3D9CC"/>
+            </a:solidFill>
+            <a:prstDash val="solid"/>
+          </a:ln>
         </p:spPr>
       </p:sp>
       <p:pic>
@@ -13401,11 +13373,11 @@
             <a:r>
               <a:rPr lang="en-US" sz="1800" b="1" dirty="0">
                 <a:solidFill>
-                  <a:srgbClr val="C9A961"/>
-                </a:solidFill>
-                <a:latin typeface="Bookman Old Style" pitchFamily="34" charset="0"/>
-                <a:ea typeface="Bookman Old Style" pitchFamily="34" charset="-122"/>
-                <a:cs typeface="Bookman Old Style" pitchFamily="34" charset="-120"/>
+                  <a:srgbClr val="B1937E"/>
+                </a:solidFill>
+                <a:latin typeface="Georgia" pitchFamily="34" charset="0"/>
+                <a:ea typeface="Georgia" pitchFamily="34" charset="-122"/>
+                <a:cs typeface="Georgia" pitchFamily="34" charset="-120"/>
               </a:rPr>
               <a:t>Galeria completa</a:t>
             </a:r>
@@ -13440,7 +13412,7 @@
             <a:r>
               <a:rPr lang="en-US" sz="1350" dirty="0">
                 <a:solidFill>
-                  <a:srgbClr val="9FB2C9"/>
+                  <a:srgbClr val="8A7E72"/>
                 </a:solidFill>
                 <a:latin typeface="Calibri" pitchFamily="34" charset="0"/>
                 <a:ea typeface="Calibri" pitchFamily="34" charset="-122"/>
@@ -13469,13 +13441,18 @@
             </a:avLst>
           </a:prstGeom>
           <a:solidFill>
-            <a:srgbClr val="13283F"/>
+            <a:srgbClr val="FFFFFF"/>
           </a:solidFill>
-          <a:ln/>
+          <a:ln w="12700">
+            <a:solidFill>
+              <a:srgbClr val="E3D9CC"/>
+            </a:solidFill>
+            <a:prstDash val="solid"/>
+          </a:ln>
           <a:effectLst>
-            <a:outerShdw sx="100000" sy="100000" kx="0" ky="0" algn="bl" rotWithShape="0" blurRad="127000" dist="38100" dir="5400000">
-              <a:srgbClr val="000000">
-                <a:alpha val="28000"/>
+            <a:outerShdw sx="100000" sy="100000" kx="0" ky="0" algn="bl" rotWithShape="0" blurRad="114300" dist="38100" dir="5400000">
+              <a:srgbClr val="7A6A55">
+                <a:alpha val="12000"/>
               </a:srgbClr>
             </a:outerShdw>
           </a:effectLst>
@@ -13496,9 +13473,14 @@
             <a:avLst/>
           </a:prstGeom>
           <a:solidFill>
-            <a:srgbClr val="16314F"/>
+            <a:srgbClr val="EADFD0"/>
           </a:solidFill>
-          <a:ln/>
+          <a:ln w="9525">
+            <a:solidFill>
+              <a:srgbClr val="E3D9CC"/>
+            </a:solidFill>
+            <a:prstDash val="solid"/>
+          </a:ln>
         </p:spPr>
       </p:sp>
       <p:pic>
@@ -13552,11 +13534,11 @@
             <a:r>
               <a:rPr lang="en-US" sz="1800" b="1" dirty="0">
                 <a:solidFill>
-                  <a:srgbClr val="C9A961"/>
-                </a:solidFill>
-                <a:latin typeface="Bookman Old Style" pitchFamily="34" charset="0"/>
-                <a:ea typeface="Bookman Old Style" pitchFamily="34" charset="-122"/>
-                <a:cs typeface="Bookman Old Style" pitchFamily="34" charset="-120"/>
+                  <a:srgbClr val="B1937E"/>
+                </a:solidFill>
+                <a:latin typeface="Georgia" pitchFamily="34" charset="0"/>
+                <a:ea typeface="Georgia" pitchFamily="34" charset="-122"/>
+                <a:cs typeface="Georgia" pitchFamily="34" charset="-120"/>
               </a:rPr>
               <a:t>Filme</a:t>
             </a:r>
@@ -13591,7 +13573,7 @@
             <a:r>
               <a:rPr lang="en-US" sz="1350" dirty="0">
                 <a:solidFill>
-                  <a:srgbClr val="9FB2C9"/>
+                  <a:srgbClr val="8A7E72"/>
                 </a:solidFill>
                 <a:latin typeface="Calibri" pitchFamily="34" charset="0"/>
                 <a:ea typeface="Calibri" pitchFamily="34" charset="-122"/>
@@ -13620,13 +13602,18 @@
             </a:avLst>
           </a:prstGeom>
           <a:solidFill>
-            <a:srgbClr val="13283F"/>
+            <a:srgbClr val="FFFFFF"/>
           </a:solidFill>
-          <a:ln/>
+          <a:ln w="12700">
+            <a:solidFill>
+              <a:srgbClr val="E3D9CC"/>
+            </a:solidFill>
+            <a:prstDash val="solid"/>
+          </a:ln>
           <a:effectLst>
-            <a:outerShdw sx="100000" sy="100000" kx="0" ky="0" algn="bl" rotWithShape="0" blurRad="127000" dist="38100" dir="5400000">
-              <a:srgbClr val="000000">
-                <a:alpha val="28000"/>
+            <a:outerShdw sx="100000" sy="100000" kx="0" ky="0" algn="bl" rotWithShape="0" blurRad="114300" dist="38100" dir="5400000">
+              <a:srgbClr val="7A6A55">
+                <a:alpha val="12000"/>
               </a:srgbClr>
             </a:outerShdw>
           </a:effectLst>
@@ -13647,9 +13634,14 @@
             <a:avLst/>
           </a:prstGeom>
           <a:solidFill>
-            <a:srgbClr val="16314F"/>
+            <a:srgbClr val="EADFD0"/>
           </a:solidFill>
-          <a:ln/>
+          <a:ln w="9525">
+            <a:solidFill>
+              <a:srgbClr val="E3D9CC"/>
+            </a:solidFill>
+            <a:prstDash val="solid"/>
+          </a:ln>
         </p:spPr>
       </p:sp>
       <p:pic>
@@ -13703,11 +13695,11 @@
             <a:r>
               <a:rPr lang="en-US" sz="1800" b="1" dirty="0">
                 <a:solidFill>
-                  <a:srgbClr val="C9A961"/>
-                </a:solidFill>
-                <a:latin typeface="Bookman Old Style" pitchFamily="34" charset="0"/>
-                <a:ea typeface="Bookman Old Style" pitchFamily="34" charset="-122"/>
-                <a:cs typeface="Bookman Old Style" pitchFamily="34" charset="-120"/>
+                  <a:srgbClr val="B1937E"/>
+                </a:solidFill>
+                <a:latin typeface="Georgia" pitchFamily="34" charset="0"/>
+                <a:ea typeface="Georgia" pitchFamily="34" charset="-122"/>
+                <a:cs typeface="Georgia" pitchFamily="34" charset="-120"/>
               </a:rPr>
               <a:t>Álbum</a:t>
             </a:r>
@@ -13742,7 +13734,7 @@
             <a:r>
               <a:rPr lang="en-US" sz="1350" dirty="0">
                 <a:solidFill>
-                  <a:srgbClr val="9FB2C9"/>
+                  <a:srgbClr val="8A7E72"/>
                 </a:solidFill>
                 <a:latin typeface="Calibri" pitchFamily="34" charset="0"/>
                 <a:ea typeface="Calibri" pitchFamily="34" charset="-122"/>
@@ -13771,7 +13763,7 @@
           <a:noFill/>
           <a:ln w="9525">
             <a:solidFill>
-              <a:srgbClr val="5C708A">
+              <a:srgbClr val="A89A86">
                 <a:alpha val="60000"/>
               </a:srgbClr>
             </a:solidFill>
@@ -13806,7 +13798,7 @@
             <a:r>
               <a:rPr lang="en-US" sz="900" dirty="0">
                 <a:solidFill>
-                  <a:srgbClr val="5C708A"/>
+                  <a:srgbClr val="A89A86"/>
                 </a:solidFill>
                 <a:latin typeface="Calibri" pitchFamily="34" charset="0"/>
                 <a:ea typeface="Calibri" pitchFamily="34" charset="-122"/>
@@ -13845,7 +13837,7 @@
             <a:r>
               <a:rPr lang="en-US" sz="900" dirty="0">
                 <a:solidFill>
-                  <a:srgbClr val="5C708A"/>
+                  <a:srgbClr val="A89A86"/>
                 </a:solidFill>
                 <a:latin typeface="Calibri" pitchFamily="34" charset="0"/>
                 <a:ea typeface="Calibri" pitchFamily="34" charset="-122"/>
@@ -13871,7 +13863,7 @@
     <p:bg>
       <p:bgPr>
         <a:solidFill>
-          <a:srgbClr val="0B1D33"/>
+          <a:srgbClr val="F8F6F3"/>
         </a:solidFill>
       </p:bgPr>
     </p:bg>
@@ -13916,7 +13908,7 @@
             <a:r>
               <a:rPr lang="en-US" sz="1200" b="1" spc="300" kern="0" dirty="0">
                 <a:solidFill>
-                  <a:srgbClr val="4A9EFF"/>
+                  <a:srgbClr val="9A7B66"/>
                 </a:solidFill>
                 <a:latin typeface="Calibri" pitchFamily="34" charset="0"/>
                 <a:ea typeface="Calibri" pitchFamily="34" charset="-122"/>
@@ -13958,11 +13950,11 @@
             <a:r>
               <a:rPr lang="en-US" sz="3200" b="1" dirty="0">
                 <a:solidFill>
-                  <a:srgbClr val="EAF1FA"/>
-                </a:solidFill>
-                <a:latin typeface="Bookman Old Style" pitchFamily="34" charset="0"/>
-                <a:ea typeface="Bookman Old Style" pitchFamily="34" charset="-122"/>
-                <a:cs typeface="Bookman Old Style" pitchFamily="34" charset="-120"/>
+                  <a:srgbClr val="33302B"/>
+                </a:solidFill>
+                <a:latin typeface="Georgia" pitchFamily="34" charset="0"/>
+                <a:ea typeface="Georgia" pitchFamily="34" charset="-122"/>
+                <a:cs typeface="Georgia" pitchFamily="34" charset="-120"/>
               </a:rPr>
               <a:t>Organização que protege a qualidade</a:t>
             </a:r>
@@ -13987,13 +13979,18 @@
             </a:avLst>
           </a:prstGeom>
           <a:solidFill>
-            <a:srgbClr val="13283F"/>
+            <a:srgbClr val="FFFFFF"/>
           </a:solidFill>
-          <a:ln/>
+          <a:ln w="12700">
+            <a:solidFill>
+              <a:srgbClr val="E3D9CC"/>
+            </a:solidFill>
+            <a:prstDash val="solid"/>
+          </a:ln>
           <a:effectLst>
-            <a:outerShdw sx="100000" sy="100000" kx="0" ky="0" algn="bl" rotWithShape="0" blurRad="127000" dist="38100" dir="5400000">
-              <a:srgbClr val="000000">
-                <a:alpha val="28000"/>
+            <a:outerShdw sx="100000" sy="100000" kx="0" ky="0" algn="bl" rotWithShape="0" blurRad="114300" dist="38100" dir="5400000">
+              <a:srgbClr val="7A6A55">
+                <a:alpha val="12000"/>
               </a:srgbClr>
             </a:outerShdw>
           </a:effectLst>
@@ -14014,9 +14011,14 @@
             <a:avLst/>
           </a:prstGeom>
           <a:solidFill>
-            <a:srgbClr val="16314F"/>
+            <a:srgbClr val="EADFD0"/>
           </a:solidFill>
-          <a:ln/>
+          <a:ln w="9525">
+            <a:solidFill>
+              <a:srgbClr val="E3D9CC"/>
+            </a:solidFill>
+            <a:prstDash val="solid"/>
+          </a:ln>
         </p:spPr>
       </p:sp>
       <p:pic>
@@ -14070,11 +14072,11 @@
             <a:r>
               <a:rPr lang="en-US" sz="1900" b="1" dirty="0">
                 <a:solidFill>
-                  <a:srgbClr val="C9A961"/>
-                </a:solidFill>
-                <a:latin typeface="Bookman Old Style" pitchFamily="34" charset="0"/>
-                <a:ea typeface="Bookman Old Style" pitchFamily="34" charset="-122"/>
-                <a:cs typeface="Bookman Old Style" pitchFamily="34" charset="-120"/>
+                  <a:srgbClr val="B1937E"/>
+                </a:solidFill>
+                <a:latin typeface="Georgia" pitchFamily="34" charset="0"/>
+                <a:ea typeface="Georgia" pitchFamily="34" charset="-122"/>
+                <a:cs typeface="Georgia" pitchFamily="34" charset="-120"/>
               </a:rPr>
               <a:t>Backups e nomenclatura</a:t>
             </a:r>
@@ -14109,7 +14111,7 @@
             <a:r>
               <a:rPr lang="en-US" sz="1400" dirty="0">
                 <a:solidFill>
-                  <a:srgbClr val="9FB2C9"/>
+                  <a:srgbClr val="8A7E72"/>
                 </a:solidFill>
                 <a:latin typeface="Calibri" pitchFamily="34" charset="0"/>
                 <a:ea typeface="Calibri" pitchFamily="34" charset="-122"/>
@@ -14138,13 +14140,18 @@
             </a:avLst>
           </a:prstGeom>
           <a:solidFill>
-            <a:srgbClr val="13283F"/>
+            <a:srgbClr val="FFFFFF"/>
           </a:solidFill>
-          <a:ln/>
+          <a:ln w="12700">
+            <a:solidFill>
+              <a:srgbClr val="E3D9CC"/>
+            </a:solidFill>
+            <a:prstDash val="solid"/>
+          </a:ln>
           <a:effectLst>
-            <a:outerShdw sx="100000" sy="100000" kx="0" ky="0" algn="bl" rotWithShape="0" blurRad="127000" dist="38100" dir="5400000">
-              <a:srgbClr val="000000">
-                <a:alpha val="28000"/>
+            <a:outerShdw sx="100000" sy="100000" kx="0" ky="0" algn="bl" rotWithShape="0" blurRad="114300" dist="38100" dir="5400000">
+              <a:srgbClr val="7A6A55">
+                <a:alpha val="12000"/>
               </a:srgbClr>
             </a:outerShdw>
           </a:effectLst>
@@ -14165,9 +14172,14 @@
             <a:avLst/>
           </a:prstGeom>
           <a:solidFill>
-            <a:srgbClr val="16314F"/>
+            <a:srgbClr val="EADFD0"/>
           </a:solidFill>
-          <a:ln/>
+          <a:ln w="9525">
+            <a:solidFill>
+              <a:srgbClr val="E3D9CC"/>
+            </a:solidFill>
+            <a:prstDash val="solid"/>
+          </a:ln>
         </p:spPr>
       </p:sp>
       <p:pic>
@@ -14221,11 +14233,11 @@
             <a:r>
               <a:rPr lang="en-US" sz="1900" b="1" dirty="0">
                 <a:solidFill>
-                  <a:srgbClr val="C9A961"/>
-                </a:solidFill>
-                <a:latin typeface="Bookman Old Style" pitchFamily="34" charset="0"/>
-                <a:ea typeface="Bookman Old Style" pitchFamily="34" charset="-122"/>
-                <a:cs typeface="Bookman Old Style" pitchFamily="34" charset="-120"/>
+                  <a:srgbClr val="B1937E"/>
+                </a:solidFill>
+                <a:latin typeface="Georgia" pitchFamily="34" charset="0"/>
+                <a:ea typeface="Georgia" pitchFamily="34" charset="-122"/>
+                <a:cs typeface="Georgia" pitchFamily="34" charset="-120"/>
               </a:rPr>
               <a:t>Numeração e seleção</a:t>
             </a:r>
@@ -14260,7 +14272,7 @@
             <a:r>
               <a:rPr lang="en-US" sz="1400" dirty="0">
                 <a:solidFill>
-                  <a:srgbClr val="9FB2C9"/>
+                  <a:srgbClr val="8A7E72"/>
                 </a:solidFill>
                 <a:latin typeface="Calibri" pitchFamily="34" charset="0"/>
                 <a:ea typeface="Calibri" pitchFamily="34" charset="-122"/>
@@ -14289,13 +14301,18 @@
             </a:avLst>
           </a:prstGeom>
           <a:solidFill>
-            <a:srgbClr val="13283F"/>
+            <a:srgbClr val="FFFFFF"/>
           </a:solidFill>
-          <a:ln/>
+          <a:ln w="12700">
+            <a:solidFill>
+              <a:srgbClr val="E3D9CC"/>
+            </a:solidFill>
+            <a:prstDash val="solid"/>
+          </a:ln>
           <a:effectLst>
-            <a:outerShdw sx="100000" sy="100000" kx="0" ky="0" algn="bl" rotWithShape="0" blurRad="127000" dist="38100" dir="5400000">
-              <a:srgbClr val="000000">
-                <a:alpha val="28000"/>
+            <a:outerShdw sx="100000" sy="100000" kx="0" ky="0" algn="bl" rotWithShape="0" blurRad="114300" dist="38100" dir="5400000">
+              <a:srgbClr val="7A6A55">
+                <a:alpha val="12000"/>
               </a:srgbClr>
             </a:outerShdw>
           </a:effectLst>
@@ -14316,9 +14333,14 @@
             <a:avLst/>
           </a:prstGeom>
           <a:solidFill>
-            <a:srgbClr val="16314F"/>
+            <a:srgbClr val="EADFD0"/>
           </a:solidFill>
-          <a:ln/>
+          <a:ln w="9525">
+            <a:solidFill>
+              <a:srgbClr val="E3D9CC"/>
+            </a:solidFill>
+            <a:prstDash val="solid"/>
+          </a:ln>
         </p:spPr>
       </p:sp>
       <p:pic>
@@ -14372,11 +14394,11 @@
             <a:r>
               <a:rPr lang="en-US" sz="1900" b="1" dirty="0">
                 <a:solidFill>
-                  <a:srgbClr val="C9A961"/>
-                </a:solidFill>
-                <a:latin typeface="Bookman Old Style" pitchFamily="34" charset="0"/>
-                <a:ea typeface="Bookman Old Style" pitchFamily="34" charset="-122"/>
-                <a:cs typeface="Bookman Old Style" pitchFamily="34" charset="-120"/>
+                  <a:srgbClr val="B1937E"/>
+                </a:solidFill>
+                <a:latin typeface="Georgia" pitchFamily="34" charset="0"/>
+                <a:ea typeface="Georgia" pitchFamily="34" charset="-122"/>
+                <a:cs typeface="Georgia" pitchFamily="34" charset="-120"/>
               </a:rPr>
               <a:t>Marca de água e proteção</a:t>
             </a:r>
@@ -14411,7 +14433,7 @@
             <a:r>
               <a:rPr lang="en-US" sz="1400" dirty="0">
                 <a:solidFill>
-                  <a:srgbClr val="9FB2C9"/>
+                  <a:srgbClr val="8A7E72"/>
                 </a:solidFill>
                 <a:latin typeface="Calibri" pitchFamily="34" charset="0"/>
                 <a:ea typeface="Calibri" pitchFamily="34" charset="-122"/>
@@ -14440,7 +14462,7 @@
           <a:noFill/>
           <a:ln w="9525">
             <a:solidFill>
-              <a:srgbClr val="5C708A">
+              <a:srgbClr val="A89A86">
                 <a:alpha val="60000"/>
               </a:srgbClr>
             </a:solidFill>
@@ -14475,7 +14497,7 @@
             <a:r>
               <a:rPr lang="en-US" sz="900" dirty="0">
                 <a:solidFill>
-                  <a:srgbClr val="5C708A"/>
+                  <a:srgbClr val="A89A86"/>
                 </a:solidFill>
                 <a:latin typeface="Calibri" pitchFamily="34" charset="0"/>
                 <a:ea typeface="Calibri" pitchFamily="34" charset="-122"/>
@@ -14514,7 +14536,7 @@
             <a:r>
               <a:rPr lang="en-US" sz="900" dirty="0">
                 <a:solidFill>
-                  <a:srgbClr val="5C708A"/>
+                  <a:srgbClr val="A89A86"/>
                 </a:solidFill>
                 <a:latin typeface="Calibri" pitchFamily="34" charset="0"/>
                 <a:ea typeface="Calibri" pitchFamily="34" charset="-122"/>
